--- a/defense doc/Defense_Deck.pptx
+++ b/defense doc/Defense_Deck.pptx
@@ -537,6 +537,612 @@
               <a:t>Cardiovascular disease kills about 17.9 million people a year — roughly a third of all deaths. Most of those cases trace back to a small set of modifiable risk factors, and a lot of them walk into a hospital but don't get triaged with the urgency they need. The bottleneck isn't medical knowledge — it's clinician bandwidth at the front door. So I built a tool that takes one patient's tabular data, returns a risk probability, and produces a citation-backed summary a clinician can accept, reject, or interrogate in seconds. The goal is to help the clinician, not to replace them — deferral, not autonomy.</a:t>
             </a:r>
           </a:p>
+          <a:p>
+            <a:endParaRPr lang="en-US" dirty="0"/>
+          </a:p>
+          <a:p>
+            <a:r>
+              <a:rPr lang="en-US" dirty="0"/>
+              <a:t>#2 </a:t>
+            </a:r>
+            <a:r>
+              <a:rPr lang="en-US" sz="1200" b="0" i="0" kern="1200" dirty="0">
+                <a:solidFill>
+                  <a:schemeClr val="tx1"/>
+                </a:solidFill>
+                <a:effectLst/>
+                <a:latin typeface="+mn-lt"/>
+                <a:ea typeface="+mn-ea"/>
+                <a:cs typeface="+mn-cs"/>
+              </a:rPr>
+              <a:t>That bullet describes the </a:t>
+            </a:r>
+            <a:r>
+              <a:rPr lang="en-US" sz="1200" b="1" i="0" kern="1200" dirty="0">
+                <a:solidFill>
+                  <a:schemeClr val="tx1"/>
+                </a:solidFill>
+                <a:effectLst/>
+                <a:latin typeface="+mn-lt"/>
+                <a:ea typeface="+mn-ea"/>
+                <a:cs typeface="+mn-cs"/>
+              </a:rPr>
+              <a:t>RAG knowledge base</a:t>
+            </a:r>
+            <a:r>
+              <a:rPr lang="en-US" sz="1200" b="0" i="0" kern="1200" dirty="0">
+                <a:solidFill>
+                  <a:schemeClr val="tx1"/>
+                </a:solidFill>
+                <a:effectLst/>
+                <a:latin typeface="+mn-lt"/>
+                <a:ea typeface="+mn-ea"/>
+                <a:cs typeface="+mn-cs"/>
+              </a:rPr>
+              <a:t> — a set of curated Markdown documents the agent can retrieve from at inference time to ground its explanations (rather than relying purely on the LLM's parametric memory).</a:t>
+            </a:r>
+          </a:p>
+          <a:p>
+            <a:r>
+              <a:rPr lang="en-US" sz="1200" b="0" i="0" kern="1200" dirty="0">
+                <a:solidFill>
+                  <a:schemeClr val="tx1"/>
+                </a:solidFill>
+                <a:effectLst/>
+                <a:latin typeface="+mn-lt"/>
+                <a:ea typeface="+mn-ea"/>
+                <a:cs typeface="+mn-cs"/>
+              </a:rPr>
+              <a:t>They live under </a:t>
+            </a:r>
+            <a:r>
+              <a:rPr lang="en-US" sz="1200" b="0" i="0" kern="1200" dirty="0" err="1">
+                <a:solidFill>
+                  <a:schemeClr val="tx1"/>
+                </a:solidFill>
+                <a:effectLst/>
+                <a:latin typeface="+mn-lt"/>
+                <a:ea typeface="+mn-ea"/>
+                <a:cs typeface="+mn-cs"/>
+              </a:rPr>
+              <a:t>knowledge_base</a:t>
+            </a:r>
+            <a:r>
+              <a:rPr lang="en-US" sz="1200" b="0" i="0" kern="1200" dirty="0">
+                <a:solidFill>
+                  <a:schemeClr val="tx1"/>
+                </a:solidFill>
+                <a:effectLst/>
+                <a:latin typeface="+mn-lt"/>
+                <a:ea typeface="+mn-ea"/>
+                <a:cs typeface="+mn-cs"/>
+              </a:rPr>
+              <a:t>/:</a:t>
+            </a:r>
+          </a:p>
+          <a:p>
+            <a:r>
+              <a:rPr lang="en-US" sz="1200" b="0" i="0" kern="1200" dirty="0">
+                <a:solidFill>
+                  <a:schemeClr val="tx1"/>
+                </a:solidFill>
+                <a:effectLst/>
+                <a:latin typeface="+mn-lt"/>
+                <a:ea typeface="+mn-ea"/>
+                <a:cs typeface="+mn-cs"/>
+              </a:rPr>
+              <a:t>knowledge_base/feature_dictionary.md — Defines each input feature (e.g., cp, </a:t>
+            </a:r>
+            <a:r>
+              <a:rPr lang="en-US" sz="1200" b="0" i="0" kern="1200" dirty="0" err="1">
+                <a:solidFill>
+                  <a:schemeClr val="tx1"/>
+                </a:solidFill>
+                <a:effectLst/>
+                <a:latin typeface="+mn-lt"/>
+                <a:ea typeface="+mn-ea"/>
+                <a:cs typeface="+mn-cs"/>
+              </a:rPr>
+              <a:t>thalach</a:t>
+            </a:r>
+            <a:r>
+              <a:rPr lang="en-US" sz="1200" b="0" i="0" kern="1200" dirty="0">
+                <a:solidFill>
+                  <a:schemeClr val="tx1"/>
+                </a:solidFill>
+                <a:effectLst/>
+                <a:latin typeface="+mn-lt"/>
+                <a:ea typeface="+mn-ea"/>
+                <a:cs typeface="+mn-cs"/>
+              </a:rPr>
+              <a:t>, </a:t>
+            </a:r>
+            <a:r>
+              <a:rPr lang="en-US" sz="1200" b="0" i="0" kern="1200" dirty="0" err="1">
+                <a:solidFill>
+                  <a:schemeClr val="tx1"/>
+                </a:solidFill>
+                <a:effectLst/>
+                <a:latin typeface="+mn-lt"/>
+                <a:ea typeface="+mn-ea"/>
+                <a:cs typeface="+mn-cs"/>
+              </a:rPr>
+              <a:t>oldpeak</a:t>
+            </a:r>
+            <a:r>
+              <a:rPr lang="en-US" sz="1200" b="0" i="0" kern="1200" dirty="0">
+                <a:solidFill>
+                  <a:schemeClr val="tx1"/>
+                </a:solidFill>
+                <a:effectLst/>
+                <a:latin typeface="+mn-lt"/>
+                <a:ea typeface="+mn-ea"/>
+                <a:cs typeface="+mn-cs"/>
+              </a:rPr>
+              <a:t>): what it means clinically, valid ranges, and units. Lets the agent translate raw model inputs into human-readable terms.</a:t>
+            </a:r>
+          </a:p>
+          <a:p>
+            <a:r>
+              <a:rPr lang="en-US" sz="1200" b="0" i="0" kern="1200" dirty="0">
+                <a:solidFill>
+                  <a:schemeClr val="tx1"/>
+                </a:solidFill>
+                <a:effectLst/>
+                <a:latin typeface="+mn-lt"/>
+                <a:ea typeface="+mn-ea"/>
+                <a:cs typeface="+mn-cs"/>
+              </a:rPr>
+              <a:t>knowledge_base/risk_factors.md — Clinical context on known heart-disease risk factors (age, cholesterol, exercise-induced angina, etc.). Used to justify </a:t>
+            </a:r>
+            <a:r>
+              <a:rPr lang="en-US" sz="1200" b="0" i="1" kern="1200" dirty="0">
+                <a:solidFill>
+                  <a:schemeClr val="tx1"/>
+                </a:solidFill>
+                <a:effectLst/>
+                <a:latin typeface="+mn-lt"/>
+                <a:ea typeface="+mn-ea"/>
+                <a:cs typeface="+mn-cs"/>
+              </a:rPr>
+              <a:t>why</a:t>
+            </a:r>
+            <a:r>
+              <a:rPr lang="en-US" sz="1200" b="0" i="0" kern="1200" dirty="0">
+                <a:solidFill>
+                  <a:schemeClr val="tx1"/>
+                </a:solidFill>
+                <a:effectLst/>
+                <a:latin typeface="+mn-lt"/>
+                <a:ea typeface="+mn-ea"/>
+                <a:cs typeface="+mn-cs"/>
+              </a:rPr>
+              <a:t> a given feature pushed risk up or down.</a:t>
+            </a:r>
+          </a:p>
+          <a:p>
+            <a:r>
+              <a:rPr lang="en-US" sz="1200" b="0" i="0" kern="1200" dirty="0">
+                <a:solidFill>
+                  <a:schemeClr val="tx1"/>
+                </a:solidFill>
+                <a:effectLst/>
+                <a:latin typeface="+mn-lt"/>
+                <a:ea typeface="+mn-ea"/>
+                <a:cs typeface="+mn-cs"/>
+              </a:rPr>
+              <a:t>knowledge_base/triage_workflow.md — The action playbook tied to risk bands (low / medium / high → monitor, follow-up, urgent referral). Used by the decision layer and surfaced in the recommendation text.</a:t>
+            </a:r>
+          </a:p>
+          <a:p>
+            <a:r>
+              <a:rPr lang="en-US" sz="1200" b="0" i="0" kern="1200" dirty="0">
+                <a:solidFill>
+                  <a:schemeClr val="tx1"/>
+                </a:solidFill>
+                <a:effectLst/>
+                <a:latin typeface="+mn-lt"/>
+                <a:ea typeface="+mn-ea"/>
+                <a:cs typeface="+mn-cs"/>
+              </a:rPr>
+              <a:t>knowledge_base/model_card.md — Documents the ML/DL models: training data, performance, limitations, intended use. Supports transparency and safeguard responses (e.g., out-of-scope or low-confidence cases).</a:t>
+            </a:r>
+          </a:p>
+          <a:p>
+            <a:endParaRPr lang="en-US" dirty="0"/>
+          </a:p>
+          <a:p>
+            <a:r>
+              <a:rPr lang="en-US" sz="1200" b="1" i="0" kern="1200" dirty="0">
+                <a:solidFill>
+                  <a:schemeClr val="tx1"/>
+                </a:solidFill>
+                <a:effectLst/>
+                <a:latin typeface="+mn-lt"/>
+                <a:ea typeface="+mn-ea"/>
+                <a:cs typeface="+mn-cs"/>
+              </a:rPr>
+              <a:t>"Retrievable"</a:t>
+            </a:r>
+            <a:r>
+              <a:rPr lang="en-US" sz="1200" b="0" i="0" kern="1200" dirty="0">
+                <a:solidFill>
+                  <a:schemeClr val="tx1"/>
+                </a:solidFill>
+                <a:effectLst/>
+                <a:latin typeface="+mn-lt"/>
+                <a:ea typeface="+mn-ea"/>
+                <a:cs typeface="+mn-cs"/>
+              </a:rPr>
+              <a:t> means these aren't hard-coded into prompts — they're chunked, embedded, and stored in </a:t>
+            </a:r>
+            <a:r>
+              <a:rPr lang="en-US" sz="1200" b="0" i="0" kern="1200" dirty="0" err="1">
+                <a:solidFill>
+                  <a:schemeClr val="tx1"/>
+                </a:solidFill>
+                <a:effectLst/>
+                <a:latin typeface="+mn-lt"/>
+                <a:ea typeface="+mn-ea"/>
+                <a:cs typeface="+mn-cs"/>
+              </a:rPr>
+              <a:t>chroma_db</a:t>
+            </a:r>
+            <a:r>
+              <a:rPr lang="en-US" sz="1200" b="0" i="0" kern="1200" dirty="0">
+                <a:solidFill>
+                  <a:schemeClr val="tx1"/>
+                </a:solidFill>
+                <a:effectLst/>
+                <a:latin typeface="+mn-lt"/>
+                <a:ea typeface="+mn-ea"/>
+                <a:cs typeface="+mn-cs"/>
+              </a:rPr>
+              <a:t>/, then the orchestrator pulls only the top-k relevant passages per query and injects them into the GenAI explainer's context. That makes the system's reasoning </a:t>
+            </a:r>
+            <a:r>
+              <a:rPr lang="en-US" sz="1200" b="1" i="0" kern="1200" dirty="0">
+                <a:solidFill>
+                  <a:schemeClr val="tx1"/>
+                </a:solidFill>
+                <a:effectLst/>
+                <a:latin typeface="+mn-lt"/>
+                <a:ea typeface="+mn-ea"/>
+                <a:cs typeface="+mn-cs"/>
+              </a:rPr>
+              <a:t>grounded, auditable, and updatable</a:t>
+            </a:r>
+            <a:r>
+              <a:rPr lang="en-US" sz="1200" b="0" i="0" kern="1200" dirty="0">
+                <a:solidFill>
+                  <a:schemeClr val="tx1"/>
+                </a:solidFill>
+                <a:effectLst/>
+                <a:latin typeface="+mn-lt"/>
+                <a:ea typeface="+mn-ea"/>
+                <a:cs typeface="+mn-cs"/>
+              </a:rPr>
+              <a:t> (edit a Markdown file → re-ingest → behavior changes, no model retraining).</a:t>
+            </a:r>
+          </a:p>
+          <a:p>
+            <a:endParaRPr lang="en-US" sz="1200" b="0" i="0" kern="1200" dirty="0">
+              <a:solidFill>
+                <a:schemeClr val="tx1"/>
+              </a:solidFill>
+              <a:effectLst/>
+              <a:latin typeface="+mn-lt"/>
+              <a:ea typeface="+mn-ea"/>
+              <a:cs typeface="+mn-cs"/>
+            </a:endParaRPr>
+          </a:p>
+          <a:p>
+            <a:r>
+              <a:rPr lang="en-US" sz="1200" b="0" i="0" kern="1200" dirty="0">
+                <a:solidFill>
+                  <a:schemeClr val="tx1"/>
+                </a:solidFill>
+                <a:effectLst/>
+                <a:latin typeface="+mn-lt"/>
+                <a:ea typeface="+mn-ea"/>
+                <a:cs typeface="+mn-cs"/>
+              </a:rPr>
+              <a:t>#3 </a:t>
+            </a:r>
+            <a:r>
+              <a:rPr lang="en-US" sz="1200" b="1" i="0" kern="1200" dirty="0">
+                <a:solidFill>
+                  <a:schemeClr val="tx1"/>
+                </a:solidFill>
+                <a:effectLst/>
+                <a:latin typeface="+mn-lt"/>
+                <a:ea typeface="+mn-ea"/>
+                <a:cs typeface="+mn-cs"/>
+              </a:rPr>
+              <a:t>"Natural-language </a:t>
+            </a:r>
+            <a:r>
+              <a:rPr lang="en-US" sz="1200" b="1" i="0" kern="1200" dirty="0" err="1">
+                <a:solidFill>
+                  <a:schemeClr val="tx1"/>
+                </a:solidFill>
+                <a:effectLst/>
+                <a:latin typeface="+mn-lt"/>
+                <a:ea typeface="+mn-ea"/>
+                <a:cs typeface="+mn-cs"/>
+              </a:rPr>
+              <a:t>summarisation</a:t>
+            </a:r>
+            <a:r>
+              <a:rPr lang="en-US" sz="1200" b="1" i="0" kern="1200" dirty="0">
+                <a:solidFill>
+                  <a:schemeClr val="tx1"/>
+                </a:solidFill>
+                <a:effectLst/>
+                <a:latin typeface="+mn-lt"/>
+                <a:ea typeface="+mn-ea"/>
+                <a:cs typeface="+mn-cs"/>
+              </a:rPr>
+              <a:t>"</a:t>
+            </a:r>
+            <a:r>
+              <a:rPr lang="en-US" sz="1200" b="0" i="0" kern="1200" dirty="0">
+                <a:solidFill>
+                  <a:schemeClr val="tx1"/>
+                </a:solidFill>
+                <a:effectLst/>
+                <a:latin typeface="+mn-lt"/>
+                <a:ea typeface="+mn-ea"/>
+                <a:cs typeface="+mn-cs"/>
+              </a:rPr>
+              <a:t> — the LLM rewrites raw model output (e.g., risk=0.78, </a:t>
+            </a:r>
+            <a:r>
+              <a:rPr lang="en-US" sz="1200" b="0" i="0" kern="1200" dirty="0" err="1">
+                <a:solidFill>
+                  <a:schemeClr val="tx1"/>
+                </a:solidFill>
+                <a:effectLst/>
+                <a:latin typeface="+mn-lt"/>
+                <a:ea typeface="+mn-ea"/>
+                <a:cs typeface="+mn-cs"/>
+              </a:rPr>
+              <a:t>top_features</a:t>
+            </a:r>
+            <a:r>
+              <a:rPr lang="en-US" sz="1200" b="0" i="0" kern="1200" dirty="0">
+                <a:solidFill>
+                  <a:schemeClr val="tx1"/>
+                </a:solidFill>
+                <a:effectLst/>
+                <a:latin typeface="+mn-lt"/>
+                <a:ea typeface="+mn-ea"/>
+                <a:cs typeface="+mn-cs"/>
+              </a:rPr>
+              <a:t>=[cp, </a:t>
+            </a:r>
+            <a:r>
+              <a:rPr lang="en-US" sz="1200" b="0" i="0" kern="1200" dirty="0" err="1">
+                <a:solidFill>
+                  <a:schemeClr val="tx1"/>
+                </a:solidFill>
+                <a:effectLst/>
+                <a:latin typeface="+mn-lt"/>
+                <a:ea typeface="+mn-ea"/>
+                <a:cs typeface="+mn-cs"/>
+              </a:rPr>
+              <a:t>thalach</a:t>
+            </a:r>
+            <a:r>
+              <a:rPr lang="en-US" sz="1200" b="0" i="0" kern="1200" dirty="0">
+                <a:solidFill>
+                  <a:schemeClr val="tx1"/>
+                </a:solidFill>
+                <a:effectLst/>
+                <a:latin typeface="+mn-lt"/>
+                <a:ea typeface="+mn-ea"/>
+                <a:cs typeface="+mn-cs"/>
+              </a:rPr>
+              <a:t>, </a:t>
+            </a:r>
+            <a:r>
+              <a:rPr lang="en-US" sz="1200" b="0" i="0" kern="1200" dirty="0" err="1">
+                <a:solidFill>
+                  <a:schemeClr val="tx1"/>
+                </a:solidFill>
+                <a:effectLst/>
+                <a:latin typeface="+mn-lt"/>
+                <a:ea typeface="+mn-ea"/>
+                <a:cs typeface="+mn-cs"/>
+              </a:rPr>
+              <a:t>oldpeak</a:t>
+            </a:r>
+            <a:r>
+              <a:rPr lang="en-US" sz="1200" b="0" i="0" kern="1200" dirty="0">
+                <a:solidFill>
+                  <a:schemeClr val="tx1"/>
+                </a:solidFill>
+                <a:effectLst/>
+                <a:latin typeface="+mn-lt"/>
+                <a:ea typeface="+mn-ea"/>
+                <a:cs typeface="+mn-cs"/>
+              </a:rPr>
+              <a:t>], band=HIGH) into a clinician-readable narrative like </a:t>
+            </a:r>
+            <a:r>
+              <a:rPr lang="en-US" sz="1200" b="0" i="1" kern="1200" dirty="0">
+                <a:solidFill>
+                  <a:schemeClr val="tx1"/>
+                </a:solidFill>
+                <a:effectLst/>
+                <a:latin typeface="+mn-lt"/>
+                <a:ea typeface="+mn-ea"/>
+                <a:cs typeface="+mn-cs"/>
+              </a:rPr>
+              <a:t>"The model assessed this patient as high risk, driven primarily by chest-pain type and reduced maximum heart rate...“. </a:t>
+            </a:r>
+          </a:p>
+          <a:p>
+            <a:r>
+              <a:rPr lang="en-US" sz="1200" b="1" i="0" kern="1200" dirty="0">
+                <a:solidFill>
+                  <a:schemeClr val="tx1"/>
+                </a:solidFill>
+                <a:effectLst/>
+                <a:latin typeface="+mn-lt"/>
+                <a:ea typeface="+mn-ea"/>
+                <a:cs typeface="+mn-cs"/>
+              </a:rPr>
+              <a:t>"Under structural constraints"</a:t>
+            </a:r>
+            <a:r>
+              <a:rPr lang="en-US" sz="1200" b="0" i="0" kern="1200" dirty="0">
+                <a:solidFill>
+                  <a:schemeClr val="tx1"/>
+                </a:solidFill>
+                <a:effectLst/>
+                <a:latin typeface="+mn-lt"/>
+                <a:ea typeface="+mn-ea"/>
+                <a:cs typeface="+mn-cs"/>
+              </a:rPr>
+              <a:t> — the output isn't allowed to be whatever the LLM feels like producing. It must conform to rules enforced by your code, such as:</a:t>
+            </a:r>
+          </a:p>
+          <a:p>
+            <a:r>
+              <a:rPr lang="en-US" sz="1200" b="0" i="0" kern="1200" dirty="0">
+                <a:solidFill>
+                  <a:schemeClr val="tx1"/>
+                </a:solidFill>
+                <a:effectLst/>
+                <a:latin typeface="+mn-lt"/>
+                <a:ea typeface="+mn-ea"/>
+                <a:cs typeface="+mn-cs"/>
+              </a:rPr>
+              <a:t>A fixed schema / sections (e.g., </a:t>
+            </a:r>
+            <a:r>
+              <a:rPr lang="en-US" sz="1200" b="0" i="1" kern="1200" dirty="0">
+                <a:solidFill>
+                  <a:schemeClr val="tx1"/>
+                </a:solidFill>
+                <a:effectLst/>
+                <a:latin typeface="+mn-lt"/>
+                <a:ea typeface="+mn-ea"/>
+                <a:cs typeface="+mn-cs"/>
+              </a:rPr>
+              <a:t>Summary → Key drivers → Recommendation → Caveats</a:t>
+            </a:r>
+            <a:r>
+              <a:rPr lang="en-US" sz="1200" b="0" i="0" kern="1200" dirty="0">
+                <a:solidFill>
+                  <a:schemeClr val="tx1"/>
+                </a:solidFill>
+                <a:effectLst/>
+                <a:latin typeface="+mn-lt"/>
+                <a:ea typeface="+mn-ea"/>
+                <a:cs typeface="+mn-cs"/>
+              </a:rPr>
+              <a:t>)</a:t>
+            </a:r>
+          </a:p>
+          <a:p>
+            <a:r>
+              <a:rPr lang="en-US" sz="1200" b="0" i="0" kern="1200" dirty="0">
+                <a:solidFill>
+                  <a:schemeClr val="tx1"/>
+                </a:solidFill>
+                <a:effectLst/>
+                <a:latin typeface="+mn-lt"/>
+                <a:ea typeface="+mn-ea"/>
+                <a:cs typeface="+mn-cs"/>
+              </a:rPr>
+              <a:t>Required fields (must cite the risk band, must list top-k features, must include a confidence statement)</a:t>
+            </a:r>
+          </a:p>
+          <a:p>
+            <a:r>
+              <a:rPr lang="en-US" sz="1200" b="0" i="0" kern="1200" dirty="0">
+                <a:solidFill>
+                  <a:schemeClr val="tx1"/>
+                </a:solidFill>
+                <a:effectLst/>
+                <a:latin typeface="+mn-lt"/>
+                <a:ea typeface="+mn-ea"/>
+                <a:cs typeface="+mn-cs"/>
+              </a:rPr>
+              <a:t>Length and tone limits (concise, non-diagnostic language)</a:t>
+            </a:r>
+          </a:p>
+          <a:p>
+            <a:r>
+              <a:rPr lang="en-US" sz="1200" b="0" i="0" kern="1200" dirty="0">
+                <a:solidFill>
+                  <a:schemeClr val="tx1"/>
+                </a:solidFill>
+                <a:effectLst/>
+                <a:latin typeface="+mn-lt"/>
+                <a:ea typeface="+mn-ea"/>
+                <a:cs typeface="+mn-cs"/>
+              </a:rPr>
+              <a:t>Safeguard rules — refuse or hedge when confidence is low or input is out-of-scope (</a:t>
+            </a:r>
+            <a:r>
+              <a:rPr lang="en-US" sz="1200" b="0" i="0" kern="1200" dirty="0" err="1">
+                <a:solidFill>
+                  <a:schemeClr val="tx1"/>
+                </a:solidFill>
+                <a:effectLst/>
+                <a:latin typeface="+mn-lt"/>
+                <a:ea typeface="+mn-ea"/>
+                <a:cs typeface="+mn-cs"/>
+              </a:rPr>
+              <a:t>src</a:t>
+            </a:r>
+            <a:r>
+              <a:rPr lang="en-US" sz="1200" b="0" i="0" kern="1200" dirty="0">
+                <a:solidFill>
+                  <a:schemeClr val="tx1"/>
+                </a:solidFill>
+                <a:effectLst/>
+                <a:latin typeface="+mn-lt"/>
+                <a:ea typeface="+mn-ea"/>
+                <a:cs typeface="+mn-cs"/>
+              </a:rPr>
+              <a:t>/safeguards.py)</a:t>
+            </a:r>
+          </a:p>
+          <a:p>
+            <a:r>
+              <a:rPr lang="en-US" sz="1200" b="0" i="0" kern="1200" dirty="0">
+                <a:solidFill>
+                  <a:schemeClr val="tx1"/>
+                </a:solidFill>
+                <a:effectLst/>
+                <a:latin typeface="+mn-lt"/>
+                <a:ea typeface="+mn-ea"/>
+                <a:cs typeface="+mn-cs"/>
+              </a:rPr>
+              <a:t>Grounded only in retrieved knowledge-base passages, no invented clinical facts</a:t>
+            </a:r>
+          </a:p>
+          <a:p>
+            <a:r>
+              <a:rPr lang="en-US" sz="1200" b="0" i="0" kern="1200" dirty="0">
+                <a:solidFill>
+                  <a:schemeClr val="tx1"/>
+                </a:solidFill>
+                <a:effectLst/>
+                <a:latin typeface="+mn-lt"/>
+                <a:ea typeface="+mn-ea"/>
+                <a:cs typeface="+mn-cs"/>
+              </a:rPr>
+              <a:t>In your codebase this is implemented in src/genai_explainer.py and validated by tests/test_genai_explainer.py.</a:t>
+            </a:r>
+          </a:p>
+          <a:p>
+            <a:endParaRPr lang="en-US" dirty="0"/>
+          </a:p>
         </p:txBody>
       </p:sp>
       <p:sp>
@@ -629,7 +1235,21 @@
                 <a:ea typeface="+mn-ea"/>
                 <a:cs typeface="+mn-cs"/>
               </a:rPr>
-              <a:t>"End-to-end, the system is five stages. Preprocess the patient row. Run two independent models — a gradient-boosting classifier and a </a:t>
+              <a:t>"End-to-end, the system is five stages. Preprocess the patient row. </a:t>
+            </a:r>
+          </a:p>
+          <a:p>
+            <a:r>
+              <a:rPr lang="en-US" sz="1200" b="0" i="0" kern="1200" dirty="0">
+                <a:solidFill>
+                  <a:schemeClr val="tx1"/>
+                </a:solidFill>
+                <a:effectLst/>
+                <a:latin typeface="+mn-lt"/>
+                <a:ea typeface="+mn-ea"/>
+                <a:cs typeface="+mn-cs"/>
+              </a:rPr>
+              <a:t>Run two independent models — a gradient-boosting classifier and a </a:t>
             </a:r>
             <a:r>
               <a:rPr lang="en-US" sz="1200" b="0" i="0" kern="1200" dirty="0" err="1">
@@ -653,7 +1273,35 @@
                 <a:ea typeface="+mn-ea"/>
                 <a:cs typeface="+mn-cs"/>
               </a:rPr>
-              <a:t> MLP. Average them into a risk tier, and flag low confidence when they disagree by more than 0.20. Then the agent kicks in: it checks for banned requests, retrieves evidence from a small clinical knowledge base, has an LLM draft an explanation grounded only in that evidence, and has a </a:t>
+              <a:t> MLP. </a:t>
+            </a:r>
+          </a:p>
+          <a:p>
+            <a:r>
+              <a:rPr lang="en-US" sz="1200" b="0" i="0" kern="1200" dirty="0">
+                <a:solidFill>
+                  <a:schemeClr val="tx1"/>
+                </a:solidFill>
+                <a:effectLst/>
+                <a:latin typeface="+mn-lt"/>
+                <a:ea typeface="+mn-ea"/>
+                <a:cs typeface="+mn-cs"/>
+              </a:rPr>
+              <a:t>Average them into a risk tier, and flag low confidence when they disagree by more than 0.20. </a:t>
+            </a:r>
+          </a:p>
+          <a:p>
+            <a:r>
+              <a:rPr lang="en-US" sz="1200" b="0" i="0" kern="1200" dirty="0">
+                <a:solidFill>
+                  <a:schemeClr val="tx1"/>
+                </a:solidFill>
+                <a:effectLst/>
+                <a:latin typeface="+mn-lt"/>
+                <a:ea typeface="+mn-ea"/>
+                <a:cs typeface="+mn-cs"/>
+              </a:rPr>
+              <a:t>Then the agent kicks in: it checks for banned requests, retrieves evidence from a small clinical knowledge base, has an LLM draft an explanation grounded only in that evidence, and has a </a:t>
             </a:r>
             <a:r>
               <a:rPr lang="en-US" sz="1200" b="0" i="1" kern="1200" dirty="0">
@@ -677,8 +1325,299 @@
                 <a:ea typeface="+mn-ea"/>
                 <a:cs typeface="+mn-cs"/>
               </a:rPr>
-              <a:t> LLM evaluate the draft against a rubric. If the draft fails, one bounded revision is allowed. Every step gets logged to JSONL and a human-readable transcript."</a:t>
-            </a:r>
+              <a:t> LLM evaluate the draft against a rubric. </a:t>
+            </a:r>
+          </a:p>
+          <a:p>
+            <a:r>
+              <a:rPr lang="en-US" sz="1200" b="0" i="0" kern="1200" dirty="0">
+                <a:solidFill>
+                  <a:schemeClr val="tx1"/>
+                </a:solidFill>
+                <a:effectLst/>
+                <a:latin typeface="+mn-lt"/>
+                <a:ea typeface="+mn-ea"/>
+                <a:cs typeface="+mn-cs"/>
+              </a:rPr>
+              <a:t>If the draft fails, one bounded revision is allowed. Every step gets logged to JSONL and a human-readable transcript.“</a:t>
+            </a:r>
+          </a:p>
+          <a:p>
+            <a:endParaRPr lang="en-US" sz="1200" b="0" i="0" kern="1200" dirty="0">
+              <a:solidFill>
+                <a:schemeClr val="tx1"/>
+              </a:solidFill>
+              <a:effectLst/>
+              <a:latin typeface="+mn-lt"/>
+              <a:ea typeface="+mn-ea"/>
+              <a:cs typeface="+mn-cs"/>
+            </a:endParaRPr>
+          </a:p>
+          <a:p>
+            <a:r>
+              <a:rPr lang="en-US" sz="1200" b="0" i="0" kern="1200" dirty="0">
+                <a:solidFill>
+                  <a:schemeClr val="tx1"/>
+                </a:solidFill>
+                <a:effectLst/>
+                <a:latin typeface="+mn-lt"/>
+                <a:ea typeface="+mn-ea"/>
+                <a:cs typeface="+mn-cs"/>
+              </a:rPr>
+              <a:t>The end-to-end flow. Each arrow is a real module in </a:t>
+            </a:r>
+            <a:r>
+              <a:rPr lang="en-US" sz="1200" b="0" i="0" kern="1200" dirty="0" err="1">
+                <a:solidFill>
+                  <a:schemeClr val="tx1"/>
+                </a:solidFill>
+                <a:effectLst/>
+                <a:latin typeface="+mn-lt"/>
+                <a:ea typeface="+mn-ea"/>
+                <a:cs typeface="+mn-cs"/>
+              </a:rPr>
+              <a:t>src</a:t>
+            </a:r>
+            <a:r>
+              <a:rPr lang="en-US" sz="1200" b="0" i="0" kern="1200" dirty="0">
+                <a:solidFill>
+                  <a:schemeClr val="tx1"/>
+                </a:solidFill>
+                <a:effectLst/>
+                <a:latin typeface="+mn-lt"/>
+                <a:ea typeface="+mn-ea"/>
+                <a:cs typeface="+mn-cs"/>
+              </a:rPr>
+              <a:t>/:</a:t>
+            </a:r>
+          </a:p>
+          <a:p>
+            <a:r>
+              <a:rPr lang="en-US" sz="1200" b="0" i="1" kern="1200" dirty="0">
+                <a:solidFill>
+                  <a:schemeClr val="tx1"/>
+                </a:solidFill>
+                <a:effectLst/>
+                <a:latin typeface="+mn-lt"/>
+                <a:ea typeface="+mn-ea"/>
+                <a:cs typeface="+mn-cs"/>
+              </a:rPr>
+              <a:t>Preprocessing</a:t>
+            </a:r>
+            <a:r>
+              <a:rPr lang="en-US" sz="1200" b="0" i="0" kern="1200" dirty="0">
+                <a:solidFill>
+                  <a:schemeClr val="tx1"/>
+                </a:solidFill>
+                <a:effectLst/>
+                <a:latin typeface="+mn-lt"/>
+                <a:ea typeface="+mn-ea"/>
+                <a:cs typeface="+mn-cs"/>
+              </a:rPr>
+              <a:t> → src/preprocessing.py</a:t>
+            </a:r>
+          </a:p>
+          <a:p>
+            <a:r>
+              <a:rPr lang="en-US" sz="1200" b="0" i="1" kern="1200" dirty="0">
+                <a:solidFill>
+                  <a:schemeClr val="tx1"/>
+                </a:solidFill>
+                <a:effectLst/>
+                <a:latin typeface="+mn-lt"/>
+                <a:ea typeface="+mn-ea"/>
+                <a:cs typeface="+mn-cs"/>
+              </a:rPr>
+              <a:t>ML + DL</a:t>
+            </a:r>
+            <a:r>
+              <a:rPr lang="en-US" sz="1200" b="0" i="0" kern="1200" dirty="0">
+                <a:solidFill>
+                  <a:schemeClr val="tx1"/>
+                </a:solidFill>
+                <a:effectLst/>
+                <a:latin typeface="+mn-lt"/>
+                <a:ea typeface="+mn-ea"/>
+                <a:cs typeface="+mn-cs"/>
+              </a:rPr>
+              <a:t> → </a:t>
+            </a:r>
+            <a:r>
+              <a:rPr lang="en-US" sz="1200" b="0" i="0" kern="1200" dirty="0" err="1">
+                <a:solidFill>
+                  <a:schemeClr val="tx1"/>
+                </a:solidFill>
+                <a:effectLst/>
+                <a:latin typeface="+mn-lt"/>
+                <a:ea typeface="+mn-ea"/>
+                <a:cs typeface="+mn-cs"/>
+              </a:rPr>
+              <a:t>src</a:t>
+            </a:r>
+            <a:r>
+              <a:rPr lang="en-US" sz="1200" b="0" i="0" kern="1200" dirty="0">
+                <a:solidFill>
+                  <a:schemeClr val="tx1"/>
+                </a:solidFill>
+                <a:effectLst/>
+                <a:latin typeface="+mn-lt"/>
+                <a:ea typeface="+mn-ea"/>
+                <a:cs typeface="+mn-cs"/>
+              </a:rPr>
+              <a:t>/ml_model.py, src/dl_model.py</a:t>
+            </a:r>
+          </a:p>
+          <a:p>
+            <a:r>
+              <a:rPr lang="en-US" sz="1200" b="0" i="1" kern="1200" dirty="0">
+                <a:solidFill>
+                  <a:schemeClr val="tx1"/>
+                </a:solidFill>
+                <a:effectLst/>
+                <a:latin typeface="+mn-lt"/>
+                <a:ea typeface="+mn-ea"/>
+                <a:cs typeface="+mn-cs"/>
+              </a:rPr>
+              <a:t>Ensemble + Confidence</a:t>
+            </a:r>
+            <a:r>
+              <a:rPr lang="en-US" sz="1200" b="0" i="0" kern="1200" dirty="0">
+                <a:solidFill>
+                  <a:schemeClr val="tx1"/>
+                </a:solidFill>
+                <a:effectLst/>
+                <a:latin typeface="+mn-lt"/>
+                <a:ea typeface="+mn-ea"/>
+                <a:cs typeface="+mn-cs"/>
+              </a:rPr>
+              <a:t> → src/decision.py</a:t>
+            </a:r>
+          </a:p>
+          <a:p>
+            <a:r>
+              <a:rPr lang="en-US" sz="1200" b="0" i="1" kern="1200" dirty="0">
+                <a:solidFill>
+                  <a:schemeClr val="tx1"/>
+                </a:solidFill>
+                <a:effectLst/>
+                <a:latin typeface="+mn-lt"/>
+                <a:ea typeface="+mn-ea"/>
+                <a:cs typeface="+mn-cs"/>
+              </a:rPr>
+              <a:t>Agent (RAG + Explainer + Evaluator)</a:t>
+            </a:r>
+            <a:r>
+              <a:rPr lang="en-US" sz="1200" b="0" i="0" kern="1200" dirty="0">
+                <a:solidFill>
+                  <a:schemeClr val="tx1"/>
+                </a:solidFill>
+                <a:effectLst/>
+                <a:latin typeface="+mn-lt"/>
+                <a:ea typeface="+mn-ea"/>
+                <a:cs typeface="+mn-cs"/>
+              </a:rPr>
+              <a:t> → </a:t>
+            </a:r>
+            <a:r>
+              <a:rPr lang="en-US" sz="1200" b="0" i="0" kern="1200" dirty="0" err="1">
+                <a:solidFill>
+                  <a:schemeClr val="tx1"/>
+                </a:solidFill>
+                <a:effectLst/>
+                <a:latin typeface="+mn-lt"/>
+                <a:ea typeface="+mn-ea"/>
+                <a:cs typeface="+mn-cs"/>
+              </a:rPr>
+              <a:t>src</a:t>
+            </a:r>
+            <a:r>
+              <a:rPr lang="en-US" sz="1200" b="0" i="0" kern="1200" dirty="0">
+                <a:solidFill>
+                  <a:schemeClr val="tx1"/>
+                </a:solidFill>
+                <a:effectLst/>
+                <a:latin typeface="+mn-lt"/>
+                <a:ea typeface="+mn-ea"/>
+                <a:cs typeface="+mn-cs"/>
+              </a:rPr>
+              <a:t>/agent_orchestrator.py, </a:t>
+            </a:r>
+            <a:r>
+              <a:rPr lang="en-US" sz="1200" b="0" i="0" kern="1200" dirty="0" err="1">
+                <a:solidFill>
+                  <a:schemeClr val="tx1"/>
+                </a:solidFill>
+                <a:effectLst/>
+                <a:latin typeface="+mn-lt"/>
+                <a:ea typeface="+mn-ea"/>
+                <a:cs typeface="+mn-cs"/>
+              </a:rPr>
+              <a:t>src</a:t>
+            </a:r>
+            <a:r>
+              <a:rPr lang="en-US" sz="1200" b="0" i="0" kern="1200" dirty="0">
+                <a:solidFill>
+                  <a:schemeClr val="tx1"/>
+                </a:solidFill>
+                <a:effectLst/>
+                <a:latin typeface="+mn-lt"/>
+                <a:ea typeface="+mn-ea"/>
+                <a:cs typeface="+mn-cs"/>
+              </a:rPr>
+              <a:t>/rag/, </a:t>
+            </a:r>
+            <a:r>
+              <a:rPr lang="en-US" sz="1200" b="0" i="0" kern="1200" dirty="0" err="1">
+                <a:solidFill>
+                  <a:schemeClr val="tx1"/>
+                </a:solidFill>
+                <a:effectLst/>
+                <a:latin typeface="+mn-lt"/>
+                <a:ea typeface="+mn-ea"/>
+                <a:cs typeface="+mn-cs"/>
+              </a:rPr>
+              <a:t>src</a:t>
+            </a:r>
+            <a:r>
+              <a:rPr lang="en-US" sz="1200" b="0" i="0" kern="1200" dirty="0">
+                <a:solidFill>
+                  <a:schemeClr val="tx1"/>
+                </a:solidFill>
+                <a:effectLst/>
+                <a:latin typeface="+mn-lt"/>
+                <a:ea typeface="+mn-ea"/>
+                <a:cs typeface="+mn-cs"/>
+              </a:rPr>
+              <a:t>/genai_explainer.py, src/evaluation.py</a:t>
+            </a:r>
+          </a:p>
+          <a:p>
+            <a:r>
+              <a:rPr lang="en-US" sz="1200" b="0" i="1" kern="1200" dirty="0">
+                <a:solidFill>
+                  <a:schemeClr val="tx1"/>
+                </a:solidFill>
+                <a:effectLst/>
+                <a:latin typeface="+mn-lt"/>
+                <a:ea typeface="+mn-ea"/>
+                <a:cs typeface="+mn-cs"/>
+              </a:rPr>
+              <a:t>Persisted Transcript</a:t>
+            </a:r>
+            <a:r>
+              <a:rPr lang="en-US" sz="1200" b="0" i="0" kern="1200" dirty="0">
+                <a:solidFill>
+                  <a:schemeClr val="tx1"/>
+                </a:solidFill>
+                <a:effectLst/>
+                <a:latin typeface="+mn-lt"/>
+                <a:ea typeface="+mn-ea"/>
+                <a:cs typeface="+mn-cs"/>
+              </a:rPr>
+              <a:t> → src/transcripts.py</a:t>
+            </a:r>
+          </a:p>
+          <a:p>
             <a:endParaRPr lang="en-US" dirty="0"/>
           </a:p>
         </p:txBody>
@@ -773,7 +1712,166 @@
                 <a:ea typeface="+mn-ea"/>
                 <a:cs typeface="+mn-cs"/>
               </a:rPr>
-              <a:t>"I integrated five prior capstones — but as patterns, not copy-pasted code. P2 gave me the initial data analysis discipline and the limitations framing. P3 gave me the scikit-learn pipeline and the log1p skew handling. P4 gave me the dropout </a:t>
+              <a:t>"I integrated five prior capstones — but as patterns, not copy-pasted code. </a:t>
+            </a:r>
+          </a:p>
+          <a:p>
+            <a:r>
+              <a:rPr lang="en-US" sz="1200" b="1" i="0" u="sng" kern="1200" dirty="0">
+                <a:solidFill>
+                  <a:schemeClr val="tx1"/>
+                </a:solidFill>
+                <a:effectLst/>
+                <a:latin typeface="+mn-lt"/>
+                <a:ea typeface="+mn-ea"/>
+                <a:cs typeface="+mn-cs"/>
+              </a:rPr>
+              <a:t>P2</a:t>
+            </a:r>
+            <a:r>
+              <a:rPr lang="en-US" sz="1200" b="0" i="0" kern="1200" dirty="0">
+                <a:solidFill>
+                  <a:schemeClr val="tx1"/>
+                </a:solidFill>
+                <a:effectLst/>
+                <a:latin typeface="+mn-lt"/>
+                <a:ea typeface="+mn-ea"/>
+                <a:cs typeface="+mn-cs"/>
+              </a:rPr>
+              <a:t> gave me the initial data analysis discipline and the limitations framing. </a:t>
+            </a:r>
+            <a:br>
+              <a:rPr lang="en-US" sz="1200" b="0" i="0" kern="1200" dirty="0">
+                <a:solidFill>
+                  <a:schemeClr val="tx1"/>
+                </a:solidFill>
+                <a:effectLst/>
+                <a:latin typeface="+mn-lt"/>
+                <a:ea typeface="+mn-ea"/>
+                <a:cs typeface="+mn-cs"/>
+              </a:rPr>
+            </a:br>
+            <a:r>
+              <a:rPr lang="en-US" sz="1200" b="0" i="0" kern="1200" dirty="0">
+                <a:solidFill>
+                  <a:schemeClr val="tx1"/>
+                </a:solidFill>
+                <a:effectLst/>
+                <a:latin typeface="+mn-lt"/>
+                <a:ea typeface="+mn-ea"/>
+                <a:cs typeface="+mn-cs"/>
+              </a:rPr>
+              <a:t> The </a:t>
+            </a:r>
+            <a:r>
+              <a:rPr lang="en-US" sz="1200" b="1" i="0" kern="1200" dirty="0">
+                <a:solidFill>
+                  <a:schemeClr val="tx1"/>
+                </a:solidFill>
+                <a:effectLst/>
+                <a:latin typeface="+mn-lt"/>
+                <a:ea typeface="+mn-ea"/>
+                <a:cs typeface="+mn-cs"/>
+              </a:rPr>
+              <a:t>exploratory data analysis / statistical foundations</a:t>
+            </a:r>
+            <a:r>
+              <a:rPr lang="en-US" sz="1200" b="0" i="0" kern="1200" dirty="0">
+                <a:solidFill>
+                  <a:schemeClr val="tx1"/>
+                </a:solidFill>
+                <a:effectLst/>
+                <a:latin typeface="+mn-lt"/>
+                <a:ea typeface="+mn-ea"/>
+                <a:cs typeface="+mn-cs"/>
+              </a:rPr>
+              <a:t> project (typically a dataset investigation: load, profile, clean, visualize distributions, identify outliers, state assumptions and limitations).</a:t>
+            </a:r>
+            <a:br>
+              <a:rPr lang="en-US" sz="1200" b="0" i="0" kern="1200" dirty="0">
+                <a:solidFill>
+                  <a:schemeClr val="tx1"/>
+                </a:solidFill>
+                <a:effectLst/>
+                <a:latin typeface="+mn-lt"/>
+                <a:ea typeface="+mn-ea"/>
+                <a:cs typeface="+mn-cs"/>
+              </a:rPr>
+            </a:br>
+            <a:br>
+              <a:rPr lang="en-US" sz="1200" b="0" i="0" kern="1200" dirty="0">
+                <a:solidFill>
+                  <a:schemeClr val="tx1"/>
+                </a:solidFill>
+                <a:effectLst/>
+                <a:latin typeface="+mn-lt"/>
+                <a:ea typeface="+mn-ea"/>
+                <a:cs typeface="+mn-cs"/>
+              </a:rPr>
+            </a:br>
+            <a:r>
+              <a:rPr lang="en-US" sz="1200" b="1" i="0" kern="1200" dirty="0">
+                <a:solidFill>
+                  <a:schemeClr val="tx1"/>
+                </a:solidFill>
+                <a:effectLst/>
+                <a:latin typeface="+mn-lt"/>
+                <a:ea typeface="+mn-ea"/>
+                <a:cs typeface="+mn-cs"/>
+              </a:rPr>
+              <a:t>"Initial data analysis discipline“</a:t>
+            </a:r>
+          </a:p>
+          <a:p>
+            <a:r>
+              <a:rPr lang="en-US" sz="1200" b="0" i="0" kern="1200" dirty="0">
+                <a:solidFill>
+                  <a:schemeClr val="tx1"/>
+                </a:solidFill>
+                <a:effectLst/>
+                <a:latin typeface="+mn-lt"/>
+                <a:ea typeface="+mn-ea"/>
+                <a:cs typeface="+mn-cs"/>
+              </a:rPr>
+              <a:t>The habit of </a:t>
+            </a:r>
+            <a:r>
+              <a:rPr lang="en-US" sz="1200" b="0" i="1" kern="1200" dirty="0">
+                <a:solidFill>
+                  <a:schemeClr val="tx1"/>
+                </a:solidFill>
+                <a:effectLst/>
+                <a:latin typeface="+mn-lt"/>
+                <a:ea typeface="+mn-ea"/>
+                <a:cs typeface="+mn-cs"/>
+              </a:rPr>
+              <a:t>not</a:t>
+            </a:r>
+            <a:r>
+              <a:rPr lang="en-US" sz="1200" b="0" i="0" kern="1200" dirty="0">
+                <a:solidFill>
+                  <a:schemeClr val="tx1"/>
+                </a:solidFill>
+                <a:effectLst/>
+                <a:latin typeface="+mn-lt"/>
+                <a:ea typeface="+mn-ea"/>
+                <a:cs typeface="+mn-cs"/>
+              </a:rPr>
+              <a:t> jumping straight to modelling. Before any ML/DL code runs in this project, you:</a:t>
+            </a:r>
+          </a:p>
+          <a:p>
+            <a:r>
+              <a:rPr lang="en-US" sz="1200" b="0" i="0" kern="1200" dirty="0">
+                <a:solidFill>
+                  <a:schemeClr val="tx1"/>
+                </a:solidFill>
+                <a:effectLst/>
+                <a:latin typeface="+mn-lt"/>
+                <a:ea typeface="+mn-ea"/>
+                <a:cs typeface="+mn-cs"/>
+              </a:rPr>
+              <a:t>  - inspect the dataset shape, </a:t>
             </a:r>
             <a:r>
               <a:rPr lang="en-US" sz="1200" b="0" i="0" kern="1200" dirty="0" err="1">
@@ -785,6 +1883,530 @@
                 <a:ea typeface="+mn-ea"/>
                 <a:cs typeface="+mn-cs"/>
               </a:rPr>
+              <a:t>dtypes</a:t>
+            </a:r>
+            <a:r>
+              <a:rPr lang="en-US" sz="1200" b="0" i="0" kern="1200" dirty="0">
+                <a:solidFill>
+                  <a:schemeClr val="tx1"/>
+                </a:solidFill>
+                <a:effectLst/>
+                <a:latin typeface="+mn-lt"/>
+                <a:ea typeface="+mn-ea"/>
+                <a:cs typeface="+mn-cs"/>
+              </a:rPr>
+              <a:t>, missingness, class balance</a:t>
+            </a:r>
+          </a:p>
+          <a:p>
+            <a:r>
+              <a:rPr lang="en-US" sz="1200" b="0" i="0" kern="1200" dirty="0">
+                <a:solidFill>
+                  <a:schemeClr val="tx1"/>
+                </a:solidFill>
+                <a:effectLst/>
+                <a:latin typeface="+mn-lt"/>
+                <a:ea typeface="+mn-ea"/>
+                <a:cs typeface="+mn-cs"/>
+              </a:rPr>
+              <a:t>  - check feature distributions and ranges (drives the </a:t>
+            </a:r>
+            <a:r>
+              <a:rPr lang="en-US" sz="1200" b="0" i="0" kern="1200" dirty="0" err="1">
+                <a:solidFill>
+                  <a:schemeClr val="tx1"/>
+                </a:solidFill>
+                <a:effectLst/>
+                <a:latin typeface="+mn-lt"/>
+                <a:ea typeface="+mn-ea"/>
+                <a:cs typeface="+mn-cs"/>
+              </a:rPr>
+              <a:t>knowledge_base</a:t>
+            </a:r>
+            <a:r>
+              <a:rPr lang="en-US" sz="1200" b="0" i="0" kern="1200" dirty="0">
+                <a:solidFill>
+                  <a:schemeClr val="tx1"/>
+                </a:solidFill>
+                <a:effectLst/>
+                <a:latin typeface="+mn-lt"/>
+                <a:ea typeface="+mn-ea"/>
+                <a:cs typeface="+mn-cs"/>
+              </a:rPr>
+              <a:t>/feature_dictionary.md)</a:t>
+            </a:r>
+          </a:p>
+          <a:p>
+            <a:r>
+              <a:rPr lang="en-US" sz="1200" b="0" i="0" kern="1200" dirty="0">
+                <a:solidFill>
+                  <a:schemeClr val="tx1"/>
+                </a:solidFill>
+                <a:effectLst/>
+                <a:latin typeface="+mn-lt"/>
+                <a:ea typeface="+mn-ea"/>
+                <a:cs typeface="+mn-cs"/>
+              </a:rPr>
+              <a:t>  - validate inputs in src/data_loader.py and src/preprocessing.py</a:t>
+            </a:r>
+          </a:p>
+          <a:p>
+            <a:r>
+              <a:rPr lang="en-US" sz="1200" b="0" i="0" kern="1200" dirty="0">
+                <a:solidFill>
+                  <a:schemeClr val="tx1"/>
+                </a:solidFill>
+                <a:effectLst/>
+                <a:latin typeface="+mn-lt"/>
+                <a:ea typeface="+mn-ea"/>
+                <a:cs typeface="+mn-cs"/>
+              </a:rPr>
+              <a:t>  - document findings in notebooks/01_data_exploration.ipynb</a:t>
+            </a:r>
+          </a:p>
+          <a:p>
+            <a:r>
+              <a:rPr lang="en-US" sz="1200" b="0" i="0" kern="1200" dirty="0">
+                <a:solidFill>
+                  <a:schemeClr val="tx1"/>
+                </a:solidFill>
+                <a:effectLst/>
+                <a:latin typeface="+mn-lt"/>
+                <a:ea typeface="+mn-ea"/>
+                <a:cs typeface="+mn-cs"/>
+              </a:rPr>
+              <a:t>That structured "look before you model" routine is what P2 trained.</a:t>
+            </a:r>
+          </a:p>
+          <a:p>
+            <a:endParaRPr lang="en-US" sz="1200" b="0" i="0" kern="1200" dirty="0">
+              <a:solidFill>
+                <a:schemeClr val="tx1"/>
+              </a:solidFill>
+              <a:effectLst/>
+              <a:latin typeface="+mn-lt"/>
+              <a:ea typeface="+mn-ea"/>
+              <a:cs typeface="+mn-cs"/>
+            </a:endParaRPr>
+          </a:p>
+          <a:p>
+            <a:r>
+              <a:rPr lang="en-US" sz="1200" b="1" i="0" kern="1200" dirty="0">
+                <a:solidFill>
+                  <a:schemeClr val="tx1"/>
+                </a:solidFill>
+                <a:effectLst/>
+                <a:latin typeface="+mn-lt"/>
+                <a:ea typeface="+mn-ea"/>
+                <a:cs typeface="+mn-cs"/>
+              </a:rPr>
+              <a:t>"Limitations framing"</a:t>
+            </a:r>
+            <a:br>
+              <a:rPr lang="en-US" sz="1200" b="0" i="0" kern="1200" dirty="0">
+                <a:solidFill>
+                  <a:schemeClr val="tx1"/>
+                </a:solidFill>
+                <a:effectLst/>
+                <a:latin typeface="+mn-lt"/>
+                <a:ea typeface="+mn-ea"/>
+                <a:cs typeface="+mn-cs"/>
+              </a:rPr>
+            </a:br>
+            <a:r>
+              <a:rPr lang="en-US" sz="1200" b="0" i="0" kern="1200" dirty="0">
+                <a:solidFill>
+                  <a:schemeClr val="tx1"/>
+                </a:solidFill>
+                <a:effectLst/>
+                <a:latin typeface="+mn-lt"/>
+                <a:ea typeface="+mn-ea"/>
+                <a:cs typeface="+mn-cs"/>
+              </a:rPr>
+              <a:t>The discipline of </a:t>
+            </a:r>
+            <a:r>
+              <a:rPr lang="en-US" sz="1200" b="0" i="1" kern="1200" dirty="0">
+                <a:solidFill>
+                  <a:schemeClr val="tx1"/>
+                </a:solidFill>
+                <a:effectLst/>
+                <a:latin typeface="+mn-lt"/>
+                <a:ea typeface="+mn-ea"/>
+                <a:cs typeface="+mn-cs"/>
+              </a:rPr>
+              <a:t>explicitly stating what the data and model cannot do</a:t>
+            </a:r>
+            <a:r>
+              <a:rPr lang="en-US" sz="1200" b="0" i="0" kern="1200" dirty="0">
+                <a:solidFill>
+                  <a:schemeClr val="tx1"/>
+                </a:solidFill>
+                <a:effectLst/>
+                <a:latin typeface="+mn-lt"/>
+                <a:ea typeface="+mn-ea"/>
+                <a:cs typeface="+mn-cs"/>
+              </a:rPr>
+              <a:t> — sample size, demographic scope, label noise, </a:t>
+            </a:r>
+            <a:r>
+              <a:rPr lang="en-US" sz="1200" b="0" i="0" kern="1200" dirty="0" err="1">
+                <a:solidFill>
+                  <a:schemeClr val="tx1"/>
+                </a:solidFill>
+                <a:effectLst/>
+                <a:latin typeface="+mn-lt"/>
+                <a:ea typeface="+mn-ea"/>
+                <a:cs typeface="+mn-cs"/>
+              </a:rPr>
+              <a:t>generalisation</a:t>
+            </a:r>
+            <a:r>
+              <a:rPr lang="en-US" sz="1200" b="0" i="0" kern="1200" dirty="0">
+                <a:solidFill>
+                  <a:schemeClr val="tx1"/>
+                </a:solidFill>
+                <a:effectLst/>
+                <a:latin typeface="+mn-lt"/>
+                <a:ea typeface="+mn-ea"/>
+                <a:cs typeface="+mn-cs"/>
+              </a:rPr>
+              <a:t> caveats. In this project it shows up as:</a:t>
+            </a:r>
+          </a:p>
+          <a:p>
+            <a:r>
+              <a:rPr lang="en-US" sz="1200" b="0" i="0" kern="1200" dirty="0">
+                <a:solidFill>
+                  <a:schemeClr val="tx1"/>
+                </a:solidFill>
+                <a:effectLst/>
+                <a:latin typeface="+mn-lt"/>
+                <a:ea typeface="+mn-ea"/>
+                <a:cs typeface="+mn-cs"/>
+              </a:rPr>
+              <a:t>the </a:t>
+            </a:r>
+            <a:r>
+              <a:rPr lang="en-US" sz="1200" b="1" i="0" kern="1200" dirty="0">
+                <a:solidFill>
+                  <a:schemeClr val="tx1"/>
+                </a:solidFill>
+                <a:effectLst/>
+                <a:latin typeface="+mn-lt"/>
+                <a:ea typeface="+mn-ea"/>
+                <a:cs typeface="+mn-cs"/>
+              </a:rPr>
+              <a:t>Limitations / Intended Use</a:t>
+            </a:r>
+            <a:r>
+              <a:rPr lang="en-US" sz="1200" b="0" i="0" kern="1200" dirty="0">
+                <a:solidFill>
+                  <a:schemeClr val="tx1"/>
+                </a:solidFill>
+                <a:effectLst/>
+                <a:latin typeface="+mn-lt"/>
+                <a:ea typeface="+mn-ea"/>
+                <a:cs typeface="+mn-cs"/>
+              </a:rPr>
+              <a:t> sections in knowledge_base/model_card.md</a:t>
+            </a:r>
+          </a:p>
+          <a:p>
+            <a:r>
+              <a:rPr lang="en-US" sz="1200" b="0" i="0" kern="1200" dirty="0">
+                <a:solidFill>
+                  <a:schemeClr val="tx1"/>
+                </a:solidFill>
+                <a:effectLst/>
+                <a:latin typeface="+mn-lt"/>
+                <a:ea typeface="+mn-ea"/>
+                <a:cs typeface="+mn-cs"/>
+              </a:rPr>
+              <a:t>the </a:t>
+            </a:r>
+            <a:r>
+              <a:rPr lang="en-US" sz="1200" b="1" i="0" kern="1200" dirty="0">
+                <a:solidFill>
+                  <a:schemeClr val="tx1"/>
+                </a:solidFill>
+                <a:effectLst/>
+                <a:latin typeface="+mn-lt"/>
+                <a:ea typeface="+mn-ea"/>
+                <a:cs typeface="+mn-cs"/>
+              </a:rPr>
+              <a:t>"Educational artifact, not for clinical use"</a:t>
+            </a:r>
+            <a:r>
+              <a:rPr lang="en-US" sz="1200" b="0" i="0" kern="1200" dirty="0">
+                <a:solidFill>
+                  <a:schemeClr val="tx1"/>
+                </a:solidFill>
+                <a:effectLst/>
+                <a:latin typeface="+mn-lt"/>
+                <a:ea typeface="+mn-ea"/>
+                <a:cs typeface="+mn-cs"/>
+              </a:rPr>
+              <a:t> disclaimer in every slide footer and transcript</a:t>
+            </a:r>
+          </a:p>
+          <a:p>
+            <a:r>
+              <a:rPr lang="en-US" sz="1200" b="0" i="0" kern="1200" dirty="0">
+                <a:solidFill>
+                  <a:schemeClr val="tx1"/>
+                </a:solidFill>
+                <a:effectLst/>
+                <a:latin typeface="+mn-lt"/>
+                <a:ea typeface="+mn-ea"/>
+                <a:cs typeface="+mn-cs"/>
+              </a:rPr>
+              <a:t>the </a:t>
+            </a:r>
+            <a:r>
+              <a:rPr lang="en-US" sz="1200" b="1" i="0" kern="1200" dirty="0">
+                <a:solidFill>
+                  <a:schemeClr val="tx1"/>
+                </a:solidFill>
+                <a:effectLst/>
+                <a:latin typeface="+mn-lt"/>
+                <a:ea typeface="+mn-ea"/>
+                <a:cs typeface="+mn-cs"/>
+              </a:rPr>
+              <a:t>safeguard refusals</a:t>
+            </a:r>
+            <a:r>
+              <a:rPr lang="en-US" sz="1200" b="0" i="0" kern="1200" dirty="0">
+                <a:solidFill>
+                  <a:schemeClr val="tx1"/>
+                </a:solidFill>
+                <a:effectLst/>
+                <a:latin typeface="+mn-lt"/>
+                <a:ea typeface="+mn-ea"/>
+                <a:cs typeface="+mn-cs"/>
+              </a:rPr>
+              <a:t> and low-confidence hedging in src/safeguards.py</a:t>
+            </a:r>
+            <a:br>
+              <a:rPr lang="en-US" sz="1200" b="0" i="0" kern="1200" dirty="0">
+                <a:solidFill>
+                  <a:schemeClr val="tx1"/>
+                </a:solidFill>
+                <a:effectLst/>
+                <a:latin typeface="+mn-lt"/>
+                <a:ea typeface="+mn-ea"/>
+                <a:cs typeface="+mn-cs"/>
+              </a:rPr>
+            </a:br>
+            <a:endParaRPr lang="en-US" sz="1200" b="0" i="0" kern="1200" dirty="0">
+              <a:solidFill>
+                <a:schemeClr val="tx1"/>
+              </a:solidFill>
+              <a:effectLst/>
+              <a:latin typeface="+mn-lt"/>
+              <a:ea typeface="+mn-ea"/>
+              <a:cs typeface="+mn-cs"/>
+            </a:endParaRPr>
+          </a:p>
+          <a:p>
+            <a:r>
+              <a:rPr lang="en-US" sz="1200" b="0" i="0" kern="1200" dirty="0">
+                <a:solidFill>
+                  <a:schemeClr val="tx1"/>
+                </a:solidFill>
+                <a:effectLst/>
+                <a:latin typeface="+mn-lt"/>
+                <a:ea typeface="+mn-ea"/>
+                <a:cs typeface="+mn-cs"/>
+              </a:rPr>
+              <a:t>P2 taught me to say </a:t>
+            </a:r>
+            <a:r>
+              <a:rPr lang="en-US" sz="1200" b="0" i="1" kern="1200" dirty="0">
+                <a:solidFill>
+                  <a:schemeClr val="tx1"/>
+                </a:solidFill>
+                <a:effectLst/>
+                <a:latin typeface="+mn-lt"/>
+                <a:ea typeface="+mn-ea"/>
+                <a:cs typeface="+mn-cs"/>
+              </a:rPr>
+              <a:t>"here's what this dataset doesn't tell us"</a:t>
+            </a:r>
+            <a:r>
+              <a:rPr lang="en-US" sz="1200" b="0" i="0" kern="1200" dirty="0">
+                <a:solidFill>
+                  <a:schemeClr val="tx1"/>
+                </a:solidFill>
+                <a:effectLst/>
+                <a:latin typeface="+mn-lt"/>
+                <a:ea typeface="+mn-ea"/>
+                <a:cs typeface="+mn-cs"/>
+              </a:rPr>
+              <a:t> — and that mindset is what makes the final system safe to demo to regulators.</a:t>
+            </a:r>
+          </a:p>
+          <a:p>
+            <a:endParaRPr lang="en-US" sz="1200" b="0" i="0" kern="1200" dirty="0">
+              <a:solidFill>
+                <a:schemeClr val="tx1"/>
+              </a:solidFill>
+              <a:effectLst/>
+              <a:latin typeface="+mn-lt"/>
+              <a:ea typeface="+mn-ea"/>
+              <a:cs typeface="+mn-cs"/>
+            </a:endParaRPr>
+          </a:p>
+          <a:p>
+            <a:endParaRPr lang="en-US" sz="1200" b="0" i="0" kern="1200" dirty="0">
+              <a:solidFill>
+                <a:schemeClr val="tx1"/>
+              </a:solidFill>
+              <a:effectLst/>
+              <a:latin typeface="+mn-lt"/>
+              <a:ea typeface="+mn-ea"/>
+              <a:cs typeface="+mn-cs"/>
+            </a:endParaRPr>
+          </a:p>
+          <a:p>
+            <a:pPr marL="0" marR="0" lvl="0" indent="0" algn="l" defTabSz="914400" rtl="0" eaLnBrk="1" fontAlgn="auto" latinLnBrk="0" hangingPunct="1">
+              <a:lnSpc>
+                <a:spcPct val="100000"/>
+              </a:lnSpc>
+              <a:spcBef>
+                <a:spcPts val="0"/>
+              </a:spcBef>
+              <a:spcAft>
+                <a:spcPts val="0"/>
+              </a:spcAft>
+              <a:buClrTx/>
+              <a:buSzTx/>
+              <a:buFontTx/>
+              <a:buNone/>
+              <a:tabLst/>
+              <a:defRPr/>
+            </a:pPr>
+            <a:r>
+              <a:rPr lang="en-US" sz="1200" b="1" i="0" u="sng" kern="1200" dirty="0">
+                <a:solidFill>
+                  <a:schemeClr val="tx1"/>
+                </a:solidFill>
+                <a:effectLst/>
+                <a:latin typeface="+mn-lt"/>
+                <a:ea typeface="+mn-ea"/>
+                <a:cs typeface="+mn-cs"/>
+              </a:rPr>
+              <a:t>P3</a:t>
+            </a:r>
+            <a:r>
+              <a:rPr lang="en-US" sz="1200" b="0" i="0" kern="1200" dirty="0">
+                <a:solidFill>
+                  <a:schemeClr val="tx1"/>
+                </a:solidFill>
+                <a:effectLst/>
+                <a:latin typeface="+mn-lt"/>
+                <a:ea typeface="+mn-ea"/>
+                <a:cs typeface="+mn-cs"/>
+              </a:rPr>
+              <a:t> gave me the scikit-learn pipeline and the log1p skew handling. </a:t>
+            </a:r>
+            <a:br>
+              <a:rPr lang="en-US" sz="1200" b="0" i="0" kern="1200" dirty="0">
+                <a:solidFill>
+                  <a:schemeClr val="tx1"/>
+                </a:solidFill>
+                <a:effectLst/>
+                <a:latin typeface="+mn-lt"/>
+                <a:ea typeface="+mn-ea"/>
+                <a:cs typeface="+mn-cs"/>
+              </a:rPr>
+            </a:br>
+            <a:r>
+              <a:rPr lang="en-US" sz="1200" b="0" i="0" kern="1200" dirty="0">
+                <a:solidFill>
+                  <a:schemeClr val="tx1"/>
+                </a:solidFill>
+                <a:effectLst/>
+                <a:latin typeface="+mn-lt"/>
+                <a:ea typeface="+mn-ea"/>
+                <a:cs typeface="+mn-cs"/>
+              </a:rPr>
+              <a:t>      </a:t>
+            </a:r>
+            <a:r>
+              <a:rPr lang="en-US" sz="1200" i="1" dirty="0"/>
+              <a:t>Project 3 taught me to put every transform inside a single </a:t>
+            </a:r>
+            <a:r>
+              <a:rPr lang="en-US" sz="1200" i="1" dirty="0" err="1"/>
+              <a:t>sklearn</a:t>
+            </a:r>
+            <a:r>
+              <a:rPr lang="en-US" sz="1200" i="1" dirty="0"/>
+              <a:t> Pipeline and to tame skewed features</a:t>
+            </a:r>
+            <a:br>
+              <a:rPr lang="en-US" sz="1200" i="1" dirty="0"/>
+            </a:br>
+            <a:r>
+              <a:rPr lang="en-US" sz="1200" i="1" dirty="0"/>
+              <a:t>      with log1p — both patterns are exactly what preprocessing.py and ml_model.py use today, which is why the</a:t>
+            </a:r>
+            <a:br>
+              <a:rPr lang="en-US" sz="1200" i="1" dirty="0"/>
+            </a:br>
+            <a:r>
+              <a:rPr lang="en-US" sz="1200" i="1" dirty="0"/>
+              <a:t>      ML stage is reproducible and leakage-free.</a:t>
+            </a:r>
+            <a:endParaRPr lang="en-US" sz="1200" dirty="0"/>
+          </a:p>
+          <a:p>
+            <a:endParaRPr lang="en-US" sz="1200" b="0" i="0" kern="1200" dirty="0">
+              <a:solidFill>
+                <a:schemeClr val="tx1"/>
+              </a:solidFill>
+              <a:effectLst/>
+              <a:latin typeface="+mn-lt"/>
+              <a:ea typeface="+mn-ea"/>
+              <a:cs typeface="+mn-cs"/>
+            </a:endParaRPr>
+          </a:p>
+          <a:p>
+            <a:r>
+              <a:rPr lang="en-US" sz="1200" b="1" i="0" u="sng" kern="1200" dirty="0">
+                <a:solidFill>
+                  <a:schemeClr val="tx1"/>
+                </a:solidFill>
+                <a:effectLst/>
+                <a:latin typeface="+mn-lt"/>
+                <a:ea typeface="+mn-ea"/>
+                <a:cs typeface="+mn-cs"/>
+              </a:rPr>
+              <a:t>P4</a:t>
+            </a:r>
+            <a:r>
+              <a:rPr lang="en-US" sz="1200" b="0" i="0" kern="1200" dirty="0">
+                <a:solidFill>
+                  <a:schemeClr val="tx1"/>
+                </a:solidFill>
+                <a:effectLst/>
+                <a:latin typeface="+mn-lt"/>
+                <a:ea typeface="+mn-ea"/>
+                <a:cs typeface="+mn-cs"/>
+              </a:rPr>
+              <a:t> gave me the dropout </a:t>
+            </a:r>
+            <a:r>
+              <a:rPr lang="en-US" sz="1200" b="0" i="0" kern="1200" dirty="0" err="1">
+                <a:solidFill>
+                  <a:schemeClr val="tx1"/>
+                </a:solidFill>
+                <a:effectLst/>
+                <a:latin typeface="+mn-lt"/>
+                <a:ea typeface="+mn-ea"/>
+                <a:cs typeface="+mn-cs"/>
+              </a:rPr>
               <a:t>regularisation</a:t>
             </a:r>
             <a:r>
@@ -797,7 +2419,92 @@
                 <a:ea typeface="+mn-ea"/>
                 <a:cs typeface="+mn-cs"/>
               </a:rPr>
-              <a:t> and — more importantly — the habit of disaggregated per-slice evaluation instead of headline accuracy. P5 was a generative project; what carried over wasn't the VAE, it was the </a:t>
+              <a:t> and — more importantly — the habit of disaggregated per-slice evaluation instead of headline accuracy. </a:t>
+            </a:r>
+          </a:p>
+          <a:p>
+            <a:pPr marL="0" marR="0" lvl="0" indent="0" algn="l" defTabSz="914400" rtl="0" eaLnBrk="1" fontAlgn="auto" latinLnBrk="0" hangingPunct="1">
+              <a:lnSpc>
+                <a:spcPct val="100000"/>
+              </a:lnSpc>
+              <a:spcBef>
+                <a:spcPts val="0"/>
+              </a:spcBef>
+              <a:spcAft>
+                <a:spcPts val="0"/>
+              </a:spcAft>
+              <a:buClrTx/>
+              <a:buSzTx/>
+              <a:buFontTx/>
+              <a:buNone/>
+              <a:tabLst/>
+              <a:defRPr/>
+            </a:pPr>
+            <a:r>
+              <a:rPr lang="en-US" sz="1200" i="1" dirty="0"/>
+              <a:t>      Project 4 taught me to regularize small-data neural nets with dropout and to never trust a single aggregate metric — that’s</a:t>
+            </a:r>
+            <a:br>
+              <a:rPr lang="en-US" sz="1200" i="1" dirty="0"/>
+            </a:br>
+            <a:r>
+              <a:rPr lang="en-US" sz="1200" i="1" dirty="0"/>
+              <a:t>       why dl_model.py uses dropout layers and evaluation.py reports disaggregated per-slice performance instead of just a global AUC</a:t>
+            </a:r>
+            <a:endParaRPr lang="en-US" sz="1200" dirty="0"/>
+          </a:p>
+          <a:p>
+            <a:endParaRPr lang="en-US" sz="1200" b="0" i="0" kern="1200" dirty="0">
+              <a:solidFill>
+                <a:schemeClr val="tx1"/>
+              </a:solidFill>
+              <a:effectLst/>
+              <a:latin typeface="+mn-lt"/>
+              <a:ea typeface="+mn-ea"/>
+              <a:cs typeface="+mn-cs"/>
+            </a:endParaRPr>
+          </a:p>
+          <a:p>
+            <a:pPr marL="0" marR="0" lvl="0" indent="0" algn="l" defTabSz="914400" rtl="0" eaLnBrk="1" fontAlgn="auto" latinLnBrk="0" hangingPunct="1">
+              <a:lnSpc>
+                <a:spcPct val="100000"/>
+              </a:lnSpc>
+              <a:spcBef>
+                <a:spcPts val="0"/>
+              </a:spcBef>
+              <a:spcAft>
+                <a:spcPts val="0"/>
+              </a:spcAft>
+              <a:buClrTx/>
+              <a:buSzTx/>
+              <a:buFontTx/>
+              <a:buNone/>
+              <a:tabLst/>
+              <a:defRPr/>
+            </a:pPr>
+            <a:r>
+              <a:rPr lang="en-US" sz="1200" b="1" i="0" u="sng" kern="1200" dirty="0">
+                <a:solidFill>
+                  <a:schemeClr val="tx1"/>
+                </a:solidFill>
+                <a:effectLst/>
+                <a:latin typeface="+mn-lt"/>
+                <a:ea typeface="+mn-ea"/>
+                <a:cs typeface="+mn-cs"/>
+              </a:rPr>
+              <a:t>P5</a:t>
+            </a:r>
+            <a:r>
+              <a:rPr lang="en-US" sz="1200" b="0" i="0" kern="1200" dirty="0">
+                <a:solidFill>
+                  <a:schemeClr val="tx1"/>
+                </a:solidFill>
+                <a:effectLst/>
+                <a:latin typeface="+mn-lt"/>
+                <a:ea typeface="+mn-ea"/>
+                <a:cs typeface="+mn-cs"/>
+              </a:rPr>
+              <a:t> was a generative project; what carried over wasn't the VAE, it was the </a:t>
             </a:r>
             <a:r>
               <a:rPr lang="en-US" sz="1200" b="0" i="1" kern="1200" dirty="0">
@@ -821,7 +2528,365 @@
                 <a:ea typeface="+mn-ea"/>
                 <a:cs typeface="+mn-cs"/>
               </a:rPr>
-              <a:t> that generative models need structural mitigations, not prompt pleas. And P6 gave me the plan–retrieve–evaluate–revise agent loop, the Chroma RAG layer, and the JSONL run log. The projects chain — the two models feed the ensemble, the ensemble disagreement flag drives the explainer's confidence message, and the bias finding from the per-slice eval is written into the model card the RAG layer can retrieve."</a:t>
+              <a:t> that generative models need structural mitigations, not prompt pleas. </a:t>
+            </a:r>
+            <a:br>
+              <a:rPr lang="en-US" sz="1200" b="0" i="0" kern="1200" dirty="0">
+                <a:solidFill>
+                  <a:schemeClr val="tx1"/>
+                </a:solidFill>
+                <a:effectLst/>
+                <a:latin typeface="+mn-lt"/>
+                <a:ea typeface="+mn-ea"/>
+                <a:cs typeface="+mn-cs"/>
+              </a:rPr>
+            </a:br>
+            <a:r>
+              <a:rPr lang="en-US" sz="1200" b="0" i="0" kern="1200" dirty="0">
+                <a:solidFill>
+                  <a:schemeClr val="tx1"/>
+                </a:solidFill>
+                <a:effectLst/>
+                <a:latin typeface="+mn-lt"/>
+                <a:ea typeface="+mn-ea"/>
+                <a:cs typeface="+mn-cs"/>
+              </a:rPr>
+              <a:t>      </a:t>
+            </a:r>
+            <a:r>
+              <a:rPr lang="en-US" sz="1200" i="1" dirty="0"/>
+              <a:t>Project 5 taught me that generative models need engineering controls around them, not just better prompts — that’s</a:t>
+            </a:r>
+            <a:br>
+              <a:rPr lang="en-US" sz="1200" i="1" dirty="0"/>
+            </a:br>
+            <a:r>
+              <a:rPr lang="en-US" sz="1200" i="1" dirty="0"/>
+              <a:t>      why genai_explainer.py enforces a fixed output schema, grounds every claim in retrieved knowledge-base passages, and hands off to</a:t>
+            </a:r>
+            <a:br>
+              <a:rPr lang="en-US" sz="1200" i="1" dirty="0"/>
+            </a:br>
+            <a:r>
+              <a:rPr lang="en-US" sz="1200" i="1" dirty="0"/>
+              <a:t>       safeguards that can refuse or hedge before anything is shown.</a:t>
+            </a:r>
+            <a:endParaRPr lang="en-US" sz="1200" dirty="0"/>
+          </a:p>
+          <a:p>
+            <a:endParaRPr lang="en-US" sz="1200" b="0" i="0" kern="1200" dirty="0">
+              <a:solidFill>
+                <a:schemeClr val="tx1"/>
+              </a:solidFill>
+              <a:effectLst/>
+              <a:latin typeface="+mn-lt"/>
+              <a:ea typeface="+mn-ea"/>
+              <a:cs typeface="+mn-cs"/>
+            </a:endParaRPr>
+          </a:p>
+          <a:p>
+            <a:endParaRPr lang="en-US" sz="1200" b="0" i="0" kern="1200" dirty="0">
+              <a:solidFill>
+                <a:schemeClr val="tx1"/>
+              </a:solidFill>
+              <a:effectLst/>
+              <a:latin typeface="+mn-lt"/>
+              <a:ea typeface="+mn-ea"/>
+              <a:cs typeface="+mn-cs"/>
+            </a:endParaRPr>
+          </a:p>
+          <a:p>
+            <a:r>
+              <a:rPr lang="en-US" sz="1200" b="1" i="0" u="sng" kern="1200" dirty="0">
+                <a:solidFill>
+                  <a:schemeClr val="tx1"/>
+                </a:solidFill>
+                <a:effectLst/>
+                <a:latin typeface="+mn-lt"/>
+                <a:ea typeface="+mn-ea"/>
+                <a:cs typeface="+mn-cs"/>
+              </a:rPr>
+              <a:t>P6</a:t>
+            </a:r>
+            <a:r>
+              <a:rPr lang="en-US" sz="1200" b="0" i="0" kern="1200" dirty="0">
+                <a:solidFill>
+                  <a:schemeClr val="tx1"/>
+                </a:solidFill>
+                <a:effectLst/>
+                <a:latin typeface="+mn-lt"/>
+                <a:ea typeface="+mn-ea"/>
+                <a:cs typeface="+mn-cs"/>
+              </a:rPr>
+              <a:t> gave me the plan–retrieve–evaluate–revise agent loop, the Chroma RAG layer, and the JSONL run log. </a:t>
+            </a:r>
+          </a:p>
+          <a:p>
+            <a:r>
+              <a:rPr lang="en-US" sz="1200" b="0" i="0" kern="1200" dirty="0">
+                <a:solidFill>
+                  <a:schemeClr val="tx1"/>
+                </a:solidFill>
+                <a:effectLst/>
+                <a:latin typeface="+mn-lt"/>
+                <a:ea typeface="+mn-ea"/>
+                <a:cs typeface="+mn-cs"/>
+              </a:rPr>
+              <a:t>The projects chain — the two models feed the ensemble, the ensemble disagreement flag drives the explainer's confidence message, and the bias finding from the per-slice eval is written into the model card the RAG layer can retrieve.“</a:t>
+            </a:r>
+            <a:br>
+              <a:rPr lang="en-US" sz="1200" b="0" i="0" kern="1200" dirty="0">
+                <a:solidFill>
+                  <a:schemeClr val="tx1"/>
+                </a:solidFill>
+                <a:effectLst/>
+                <a:latin typeface="+mn-lt"/>
+                <a:ea typeface="+mn-ea"/>
+                <a:cs typeface="+mn-cs"/>
+              </a:rPr>
+            </a:br>
+            <a:r>
+              <a:rPr lang="en-US" sz="1200" b="1" i="0" kern="1200" dirty="0">
+                <a:solidFill>
+                  <a:schemeClr val="tx1"/>
+                </a:solidFill>
+                <a:effectLst/>
+                <a:latin typeface="+mn-lt"/>
+                <a:ea typeface="+mn-ea"/>
+                <a:cs typeface="+mn-cs"/>
+              </a:rPr>
+              <a:t>What P6 specifically gave you</a:t>
+            </a:r>
+          </a:p>
+          <a:p>
+            <a:r>
+              <a:rPr lang="en-US" sz="1200" b="1" i="0" kern="1200" dirty="0">
+                <a:solidFill>
+                  <a:schemeClr val="tx1"/>
+                </a:solidFill>
+                <a:effectLst/>
+                <a:latin typeface="+mn-lt"/>
+                <a:ea typeface="+mn-ea"/>
+                <a:cs typeface="+mn-cs"/>
+              </a:rPr>
+              <a:t>1. Plan → Retrieve → Evaluate → Revise loop</a:t>
+            </a:r>
+            <a:br>
+              <a:rPr lang="en-US" sz="1200" b="0" i="0" kern="1200" dirty="0">
+                <a:solidFill>
+                  <a:schemeClr val="tx1"/>
+                </a:solidFill>
+                <a:effectLst/>
+                <a:latin typeface="+mn-lt"/>
+                <a:ea typeface="+mn-ea"/>
+                <a:cs typeface="+mn-cs"/>
+              </a:rPr>
+            </a:br>
+            <a:r>
+              <a:rPr lang="en-US" sz="1200" b="0" i="0" kern="1200" dirty="0">
+                <a:solidFill>
+                  <a:schemeClr val="tx1"/>
+                </a:solidFill>
+                <a:effectLst/>
+                <a:latin typeface="+mn-lt"/>
+                <a:ea typeface="+mn-ea"/>
+                <a:cs typeface="+mn-cs"/>
+              </a:rPr>
+              <a:t>A four-stage control cycle the orchestrator runs for every request, rather than a single LLM call:</a:t>
+            </a:r>
+          </a:p>
+          <a:p>
+            <a:r>
+              <a:rPr lang="en-US" sz="1200" b="1" i="0" kern="1200" dirty="0">
+                <a:solidFill>
+                  <a:schemeClr val="tx1"/>
+                </a:solidFill>
+                <a:effectLst/>
+                <a:latin typeface="+mn-lt"/>
+                <a:ea typeface="+mn-ea"/>
+                <a:cs typeface="+mn-cs"/>
+              </a:rPr>
+              <a:t>Plan</a:t>
+            </a:r>
+            <a:r>
+              <a:rPr lang="en-US" sz="1200" b="0" i="0" kern="1200" dirty="0">
+                <a:solidFill>
+                  <a:schemeClr val="tx1"/>
+                </a:solidFill>
+                <a:effectLst/>
+                <a:latin typeface="+mn-lt"/>
+                <a:ea typeface="+mn-ea"/>
+                <a:cs typeface="+mn-cs"/>
+              </a:rPr>
+              <a:t> — decide what the agent needs to answer the question (which features to explain, which knowledge-base topics to consult, whether a safeguard already applies).</a:t>
+            </a:r>
+          </a:p>
+          <a:p>
+            <a:r>
+              <a:rPr lang="en-US" sz="1200" b="1" i="0" kern="1200" dirty="0">
+                <a:solidFill>
+                  <a:schemeClr val="tx1"/>
+                </a:solidFill>
+                <a:effectLst/>
+                <a:latin typeface="+mn-lt"/>
+                <a:ea typeface="+mn-ea"/>
+                <a:cs typeface="+mn-cs"/>
+              </a:rPr>
+              <a:t>Retrieve</a:t>
+            </a:r>
+            <a:r>
+              <a:rPr lang="en-US" sz="1200" b="0" i="0" kern="1200" dirty="0">
+                <a:solidFill>
+                  <a:schemeClr val="tx1"/>
+                </a:solidFill>
+                <a:effectLst/>
+                <a:latin typeface="+mn-lt"/>
+                <a:ea typeface="+mn-ea"/>
+                <a:cs typeface="+mn-cs"/>
+              </a:rPr>
+              <a:t> — pull the top-k relevant passages from the vector store (</a:t>
+            </a:r>
+            <a:r>
+              <a:rPr lang="en-US" sz="1200" b="0" i="0" kern="1200" dirty="0" err="1">
+                <a:solidFill>
+                  <a:schemeClr val="tx1"/>
+                </a:solidFill>
+                <a:effectLst/>
+                <a:latin typeface="+mn-lt"/>
+                <a:ea typeface="+mn-ea"/>
+                <a:cs typeface="+mn-cs"/>
+              </a:rPr>
+              <a:t>chroma_db</a:t>
+            </a:r>
+            <a:r>
+              <a:rPr lang="en-US" sz="1200" b="0" i="0" kern="1200" dirty="0">
+                <a:solidFill>
+                  <a:schemeClr val="tx1"/>
+                </a:solidFill>
+                <a:effectLst/>
+                <a:latin typeface="+mn-lt"/>
+                <a:ea typeface="+mn-ea"/>
+                <a:cs typeface="+mn-cs"/>
+              </a:rPr>
+              <a:t>/) plus structured model outputs (risk score, top features, confidence).</a:t>
+            </a:r>
+          </a:p>
+          <a:p>
+            <a:r>
+              <a:rPr lang="en-US" sz="1200" b="1" i="0" kern="1200" dirty="0">
+                <a:solidFill>
+                  <a:schemeClr val="tx1"/>
+                </a:solidFill>
+                <a:effectLst/>
+                <a:latin typeface="+mn-lt"/>
+                <a:ea typeface="+mn-ea"/>
+                <a:cs typeface="+mn-cs"/>
+              </a:rPr>
+              <a:t>Evaluate</a:t>
+            </a:r>
+            <a:r>
+              <a:rPr lang="en-US" sz="1200" b="0" i="0" kern="1200" dirty="0">
+                <a:solidFill>
+                  <a:schemeClr val="tx1"/>
+                </a:solidFill>
+                <a:effectLst/>
+                <a:latin typeface="+mn-lt"/>
+                <a:ea typeface="+mn-ea"/>
+                <a:cs typeface="+mn-cs"/>
+              </a:rPr>
+              <a:t> — check the draft explanation against the required output schema, grounding (does every claim trace to a retrieved chunk?), and safeguard rules (</a:t>
+            </a:r>
+            <a:r>
+              <a:rPr lang="en-US" sz="1200" b="0" i="0" kern="1200" dirty="0" err="1">
+                <a:solidFill>
+                  <a:schemeClr val="tx1"/>
+                </a:solidFill>
+                <a:effectLst/>
+                <a:latin typeface="+mn-lt"/>
+                <a:ea typeface="+mn-ea"/>
+                <a:cs typeface="+mn-cs"/>
+              </a:rPr>
+              <a:t>src</a:t>
+            </a:r>
+            <a:r>
+              <a:rPr lang="en-US" sz="1200" b="0" i="0" kern="1200" dirty="0">
+                <a:solidFill>
+                  <a:schemeClr val="tx1"/>
+                </a:solidFill>
+                <a:effectLst/>
+                <a:latin typeface="+mn-lt"/>
+                <a:ea typeface="+mn-ea"/>
+                <a:cs typeface="+mn-cs"/>
+              </a:rPr>
+              <a:t>/safeguards.py).</a:t>
+            </a:r>
+          </a:p>
+          <a:p>
+            <a:r>
+              <a:rPr lang="en-US" sz="1200" b="1" i="0" kern="1200" dirty="0">
+                <a:solidFill>
+                  <a:schemeClr val="tx1"/>
+                </a:solidFill>
+                <a:effectLst/>
+                <a:latin typeface="+mn-lt"/>
+                <a:ea typeface="+mn-ea"/>
+                <a:cs typeface="+mn-cs"/>
+              </a:rPr>
+              <a:t>Revise</a:t>
+            </a:r>
+            <a:r>
+              <a:rPr lang="en-US" sz="1200" b="0" i="0" kern="1200" dirty="0">
+                <a:solidFill>
+                  <a:schemeClr val="tx1"/>
+                </a:solidFill>
+                <a:effectLst/>
+                <a:latin typeface="+mn-lt"/>
+                <a:ea typeface="+mn-ea"/>
+                <a:cs typeface="+mn-cs"/>
+              </a:rPr>
+              <a:t> — if evaluation fails (missing section, ungrounded claim, low confidence), regenerate with corrective instructions or fall back to a refusal/hedge.</a:t>
+            </a:r>
+          </a:p>
+          <a:p>
+            <a:r>
+              <a:rPr lang="en-US" sz="1200" b="0" i="0" kern="1200" dirty="0">
+                <a:solidFill>
+                  <a:schemeClr val="tx1"/>
+                </a:solidFill>
+                <a:effectLst/>
+                <a:latin typeface="+mn-lt"/>
+                <a:ea typeface="+mn-ea"/>
+                <a:cs typeface="+mn-cs"/>
+              </a:rPr>
+              <a:t>This loop lives in src/agent_orchestrator.py and is exercised by tests/test_agent_orchestrator.py.</a:t>
+            </a:r>
+          </a:p>
+          <a:p>
+            <a:r>
+              <a:rPr lang="en-US" sz="1200" i="1" dirty="0"/>
+              <a:t>Project 6 gave me the agent control-flow blueprint — a plan/retrieve/evaluate/revise loop with RAG grounding and</a:t>
+            </a:r>
+            <a:br>
+              <a:rPr lang="en-US" sz="1200" i="1" dirty="0"/>
+            </a:br>
+            <a:r>
+              <a:rPr lang="en-US" sz="1200" i="1" dirty="0"/>
+              <a:t>	an explicit refusal list — which is exactly what </a:t>
+            </a:r>
+            <a:r>
+              <a:rPr lang="en-US" sz="1200" i="1" dirty="0" err="1"/>
+              <a:t>src</a:t>
+            </a:r>
+            <a:r>
+              <a:rPr lang="en-US" sz="1200" i="1" dirty="0"/>
+              <a:t>/rag/ and agent_orchestrator.py implement, so the LLM never</a:t>
+            </a:r>
+            <a:br>
+              <a:rPr lang="en-US" sz="1200" i="1" dirty="0"/>
+            </a:br>
+            <a:r>
+              <a:rPr lang="en-US" sz="1200" i="1" dirty="0"/>
+              <a:t>	answers without retrieved evidence and never answers at all when a safeguard fires</a:t>
             </a:r>
             <a:endParaRPr lang="en-US" dirty="0"/>
           </a:p>
@@ -1169,8 +3234,383 @@
                 <a:ea typeface="+mn-ea"/>
                 <a:cs typeface="+mn-cs"/>
               </a:rPr>
-              <a:t> can drift; the refusal list can be paraphrased past; and the knowledge base is synthetic. None of those are surprises — they're documented up front."</a:t>
-            </a:r>
+              <a:t> can drift; the refusal list can be paraphrased past; and the knowledge base is synthetic. None of those are surprises — they're documented up front.“</a:t>
+            </a:r>
+          </a:p>
+          <a:p>
+            <a:r>
+              <a:rPr lang="en-US" sz="1200" b="1" i="0" kern="1200" dirty="0">
+                <a:solidFill>
+                  <a:schemeClr val="tx1"/>
+                </a:solidFill>
+                <a:effectLst/>
+                <a:latin typeface="+mn-lt"/>
+                <a:ea typeface="+mn-ea"/>
+                <a:cs typeface="+mn-cs"/>
+              </a:rPr>
+              <a:t>ROC-AUC</a:t>
+            </a:r>
+            <a:r>
+              <a:rPr lang="en-US" sz="1200" b="0" i="0" kern="1200" dirty="0">
+                <a:solidFill>
+                  <a:schemeClr val="tx1"/>
+                </a:solidFill>
+                <a:effectLst/>
+                <a:latin typeface="+mn-lt"/>
+                <a:ea typeface="+mn-ea"/>
+                <a:cs typeface="+mn-cs"/>
+              </a:rPr>
+              <a:t> = </a:t>
+            </a:r>
+            <a:r>
+              <a:rPr lang="en-US" sz="1200" b="1" i="0" kern="1200" dirty="0">
+                <a:solidFill>
+                  <a:schemeClr val="tx1"/>
+                </a:solidFill>
+                <a:effectLst/>
+                <a:latin typeface="+mn-lt"/>
+                <a:ea typeface="+mn-ea"/>
+                <a:cs typeface="+mn-cs"/>
+              </a:rPr>
+              <a:t>Area Under the Receiver Operating Characteristic Curve</a:t>
+            </a:r>
+          </a:p>
+          <a:p>
+            <a:endParaRPr lang="en-US" sz="1200" b="1" i="0" kern="1200" dirty="0">
+              <a:solidFill>
+                <a:schemeClr val="tx1"/>
+              </a:solidFill>
+              <a:effectLst/>
+              <a:latin typeface="+mn-lt"/>
+              <a:ea typeface="+mn-ea"/>
+              <a:cs typeface="+mn-cs"/>
+            </a:endParaRPr>
+          </a:p>
+          <a:p>
+            <a:r>
+              <a:rPr lang="en-US" sz="1200" b="1" i="0" kern="1200" dirty="0">
+                <a:solidFill>
+                  <a:schemeClr val="tx1"/>
+                </a:solidFill>
+                <a:effectLst/>
+                <a:latin typeface="+mn-lt"/>
+                <a:ea typeface="+mn-ea"/>
+                <a:cs typeface="+mn-cs"/>
+              </a:rPr>
+              <a:t>How to read the number</a:t>
+            </a:r>
+          </a:p>
+          <a:p>
+            <a:r>
+              <a:rPr lang="en-US" sz="1200" b="0" i="0" kern="1200" dirty="0" err="1">
+                <a:solidFill>
+                  <a:schemeClr val="tx1"/>
+                </a:solidFill>
+                <a:effectLst/>
+                <a:latin typeface="+mn-lt"/>
+                <a:ea typeface="+mn-ea"/>
+                <a:cs typeface="+mn-cs"/>
+              </a:rPr>
+              <a:t>AUCMeaning</a:t>
+            </a:r>
+            <a:endParaRPr lang="en-US" sz="1200" b="0" i="0" kern="1200" dirty="0">
+              <a:solidFill>
+                <a:schemeClr val="tx1"/>
+              </a:solidFill>
+              <a:effectLst/>
+              <a:latin typeface="+mn-lt"/>
+              <a:ea typeface="+mn-ea"/>
+              <a:cs typeface="+mn-cs"/>
+            </a:endParaRPr>
+          </a:p>
+          <a:p>
+            <a:r>
+              <a:rPr lang="en-US" sz="1200" b="1" i="0" kern="1200" dirty="0">
+                <a:solidFill>
+                  <a:schemeClr val="tx1"/>
+                </a:solidFill>
+                <a:effectLst/>
+                <a:latin typeface="+mn-lt"/>
+                <a:ea typeface="+mn-ea"/>
+                <a:cs typeface="+mn-cs"/>
+              </a:rPr>
+              <a:t>1.0        </a:t>
+            </a:r>
+            <a:r>
+              <a:rPr lang="en-US" sz="1200" b="0" i="0" kern="1200" dirty="0">
+                <a:solidFill>
+                  <a:schemeClr val="tx1"/>
+                </a:solidFill>
+                <a:effectLst/>
+                <a:latin typeface="+mn-lt"/>
+                <a:ea typeface="+mn-ea"/>
+                <a:cs typeface="+mn-cs"/>
+              </a:rPr>
+              <a:t>Perfect — model ranks every positive above every negative.</a:t>
+            </a:r>
+          </a:p>
+          <a:p>
+            <a:r>
+              <a:rPr lang="en-US" sz="1200" b="1" i="0" kern="1200" dirty="0">
+                <a:solidFill>
+                  <a:schemeClr val="tx1"/>
+                </a:solidFill>
+                <a:effectLst/>
+                <a:latin typeface="+mn-lt"/>
+                <a:ea typeface="+mn-ea"/>
+                <a:cs typeface="+mn-cs"/>
+              </a:rPr>
+              <a:t>0.9–1.0 </a:t>
+            </a:r>
+            <a:r>
+              <a:rPr lang="en-US" sz="1200" b="0" i="0" kern="1200" dirty="0">
+                <a:solidFill>
+                  <a:schemeClr val="tx1"/>
+                </a:solidFill>
+                <a:effectLst/>
+                <a:latin typeface="+mn-lt"/>
+                <a:ea typeface="+mn-ea"/>
+                <a:cs typeface="+mn-cs"/>
+              </a:rPr>
+              <a:t>Excellent separation.</a:t>
+            </a:r>
+          </a:p>
+          <a:p>
+            <a:r>
+              <a:rPr lang="en-US" sz="1200" b="1" i="0" kern="1200" dirty="0">
+                <a:solidFill>
+                  <a:schemeClr val="tx1"/>
+                </a:solidFill>
+                <a:effectLst/>
+                <a:latin typeface="+mn-lt"/>
+                <a:ea typeface="+mn-ea"/>
+                <a:cs typeface="+mn-cs"/>
+              </a:rPr>
+              <a:t>0.8–0.9 </a:t>
+            </a:r>
+            <a:r>
+              <a:rPr lang="en-US" sz="1200" b="0" i="0" kern="1200" dirty="0">
+                <a:solidFill>
+                  <a:schemeClr val="tx1"/>
+                </a:solidFill>
+                <a:effectLst/>
+                <a:latin typeface="+mn-lt"/>
+                <a:ea typeface="+mn-ea"/>
+                <a:cs typeface="+mn-cs"/>
+              </a:rPr>
+              <a:t>Good.</a:t>
+            </a:r>
+          </a:p>
+          <a:p>
+            <a:r>
+              <a:rPr lang="en-US" sz="1200" b="1" i="0" kern="1200" dirty="0">
+                <a:solidFill>
+                  <a:schemeClr val="tx1"/>
+                </a:solidFill>
+                <a:effectLst/>
+                <a:latin typeface="+mn-lt"/>
+                <a:ea typeface="+mn-ea"/>
+                <a:cs typeface="+mn-cs"/>
+              </a:rPr>
+              <a:t>0.7–0.8 </a:t>
+            </a:r>
+            <a:r>
+              <a:rPr lang="en-US" sz="1200" b="0" i="0" kern="1200" dirty="0">
+                <a:solidFill>
+                  <a:schemeClr val="tx1"/>
+                </a:solidFill>
+                <a:effectLst/>
+                <a:latin typeface="+mn-lt"/>
+                <a:ea typeface="+mn-ea"/>
+                <a:cs typeface="+mn-cs"/>
+              </a:rPr>
+              <a:t>Fair.</a:t>
+            </a:r>
+          </a:p>
+          <a:p>
+            <a:r>
+              <a:rPr lang="en-US" sz="1200" b="1" i="0" kern="1200" dirty="0">
+                <a:solidFill>
+                  <a:schemeClr val="tx1"/>
+                </a:solidFill>
+                <a:effectLst/>
+                <a:latin typeface="+mn-lt"/>
+                <a:ea typeface="+mn-ea"/>
+                <a:cs typeface="+mn-cs"/>
+              </a:rPr>
+              <a:t>0.5        </a:t>
+            </a:r>
+            <a:r>
+              <a:rPr lang="en-US" sz="1200" b="0" i="0" kern="1200" dirty="0">
+                <a:solidFill>
+                  <a:schemeClr val="tx1"/>
+                </a:solidFill>
+                <a:effectLst/>
+                <a:latin typeface="+mn-lt"/>
+                <a:ea typeface="+mn-ea"/>
+                <a:cs typeface="+mn-cs"/>
+              </a:rPr>
+              <a:t>No better than random coin-flip.</a:t>
+            </a:r>
+          </a:p>
+          <a:p>
+            <a:r>
+              <a:rPr lang="en-US" sz="1200" b="1" i="0" kern="1200" dirty="0">
+                <a:solidFill>
+                  <a:schemeClr val="tx1"/>
+                </a:solidFill>
+                <a:effectLst/>
+                <a:latin typeface="+mn-lt"/>
+                <a:ea typeface="+mn-ea"/>
+                <a:cs typeface="+mn-cs"/>
+              </a:rPr>
+              <a:t>&lt; 0.5     </a:t>
+            </a:r>
+            <a:r>
+              <a:rPr lang="en-US" sz="1200" b="0" i="0" kern="1200" dirty="0">
+                <a:solidFill>
+                  <a:schemeClr val="tx1"/>
+                </a:solidFill>
+                <a:effectLst/>
+                <a:latin typeface="+mn-lt"/>
+                <a:ea typeface="+mn-ea"/>
+                <a:cs typeface="+mn-cs"/>
+              </a:rPr>
+              <a:t>Worse than random (you could invert predictions and do better).</a:t>
+            </a:r>
+          </a:p>
+          <a:p>
+            <a:endParaRPr lang="en-US" sz="1200" b="0" i="0" kern="1200" dirty="0">
+              <a:solidFill>
+                <a:schemeClr val="tx1"/>
+              </a:solidFill>
+              <a:effectLst/>
+              <a:latin typeface="+mn-lt"/>
+              <a:ea typeface="+mn-ea"/>
+              <a:cs typeface="+mn-cs"/>
+            </a:endParaRPr>
+          </a:p>
+          <a:p>
+            <a:r>
+              <a:rPr lang="en-US" sz="1200" b="1" i="0" kern="1200" dirty="0">
+                <a:solidFill>
+                  <a:schemeClr val="tx1"/>
+                </a:solidFill>
+                <a:effectLst/>
+                <a:latin typeface="+mn-lt"/>
+                <a:ea typeface="+mn-ea"/>
+                <a:cs typeface="+mn-cs"/>
+              </a:rPr>
+              <a:t>AUC = the probability that the model assigns a higher risk score to a randomly chosen </a:t>
+            </a:r>
+            <a:r>
+              <a:rPr lang="en-US" sz="1200" b="1" i="1" kern="1200" dirty="0">
+                <a:solidFill>
+                  <a:schemeClr val="tx1"/>
+                </a:solidFill>
+                <a:effectLst/>
+                <a:latin typeface="+mn-lt"/>
+                <a:ea typeface="+mn-ea"/>
+                <a:cs typeface="+mn-cs"/>
+              </a:rPr>
+              <a:t>positive</a:t>
+            </a:r>
+            <a:r>
+              <a:rPr lang="en-US" sz="1200" b="1" i="0" kern="1200" dirty="0">
+                <a:solidFill>
+                  <a:schemeClr val="tx1"/>
+                </a:solidFill>
+                <a:effectLst/>
+                <a:latin typeface="+mn-lt"/>
+                <a:ea typeface="+mn-ea"/>
+                <a:cs typeface="+mn-cs"/>
+              </a:rPr>
+              <a:t> patient than to a randomly chosen </a:t>
+            </a:r>
+            <a:r>
+              <a:rPr lang="en-US" sz="1200" b="1" i="1" kern="1200" dirty="0">
+                <a:solidFill>
+                  <a:schemeClr val="tx1"/>
+                </a:solidFill>
+                <a:effectLst/>
+                <a:latin typeface="+mn-lt"/>
+                <a:ea typeface="+mn-ea"/>
+                <a:cs typeface="+mn-cs"/>
+              </a:rPr>
+              <a:t>negative</a:t>
+            </a:r>
+            <a:r>
+              <a:rPr lang="en-US" sz="1200" b="1" i="0" kern="1200" dirty="0">
+                <a:solidFill>
+                  <a:schemeClr val="tx1"/>
+                </a:solidFill>
+                <a:effectLst/>
+                <a:latin typeface="+mn-lt"/>
+                <a:ea typeface="+mn-ea"/>
+                <a:cs typeface="+mn-cs"/>
+              </a:rPr>
+              <a:t> patient.</a:t>
+            </a:r>
+            <a:endParaRPr lang="en-US" sz="1200" b="0" i="0" kern="1200" dirty="0">
+              <a:solidFill>
+                <a:schemeClr val="tx1"/>
+              </a:solidFill>
+              <a:effectLst/>
+              <a:latin typeface="+mn-lt"/>
+              <a:ea typeface="+mn-ea"/>
+              <a:cs typeface="+mn-cs"/>
+            </a:endParaRPr>
+          </a:p>
+          <a:p>
+            <a:r>
+              <a:rPr lang="en-US" sz="1200" b="0" i="0" kern="1200" dirty="0">
+                <a:solidFill>
+                  <a:schemeClr val="tx1"/>
+                </a:solidFill>
+                <a:effectLst/>
+                <a:latin typeface="+mn-lt"/>
+                <a:ea typeface="+mn-ea"/>
+                <a:cs typeface="+mn-cs"/>
+              </a:rPr>
+              <a:t>So your project's </a:t>
+            </a:r>
+            <a:r>
+              <a:rPr lang="en-US" sz="1200" b="1" i="0" kern="1200" dirty="0">
+                <a:solidFill>
+                  <a:schemeClr val="tx1"/>
+                </a:solidFill>
+                <a:effectLst/>
+                <a:latin typeface="+mn-lt"/>
+                <a:ea typeface="+mn-ea"/>
+                <a:cs typeface="+mn-cs"/>
+              </a:rPr>
+              <a:t>AUC ≈ 0.96</a:t>
+            </a:r>
+            <a:r>
+              <a:rPr lang="en-US" sz="1200" b="0" i="0" kern="1200" dirty="0">
+                <a:solidFill>
+                  <a:schemeClr val="tx1"/>
+                </a:solidFill>
+                <a:effectLst/>
+                <a:latin typeface="+mn-lt"/>
+                <a:ea typeface="+mn-ea"/>
+                <a:cs typeface="+mn-cs"/>
+              </a:rPr>
+              <a:t> (slide 10) means: pick any sick patient and any healthy patient at random — the model ranks the sick one higher about 96% of the time.</a:t>
+            </a:r>
+          </a:p>
+          <a:p>
+            <a:endParaRPr lang="en-US" sz="1200" b="0" i="0" kern="1200" dirty="0">
+              <a:solidFill>
+                <a:schemeClr val="tx1"/>
+              </a:solidFill>
+              <a:effectLst/>
+              <a:latin typeface="+mn-lt"/>
+              <a:ea typeface="+mn-ea"/>
+              <a:cs typeface="+mn-cs"/>
+            </a:endParaRPr>
+          </a:p>
+          <a:p>
             <a:endParaRPr lang="en-US" dirty="0"/>
           </a:p>
         </p:txBody>
@@ -1425,7 +3865,7 @@
           </a:p>
           <a:p>
             <a:r>
-              <a:rPr lang="en-US" sz="1200" b="0" i="0" kern="1200">
+              <a:rPr lang="en-US" sz="1200" b="0" i="0" kern="1200" dirty="0">
                 <a:solidFill>
                   <a:schemeClr val="tx1"/>
                 </a:solidFill>
@@ -1467,6 +3907,126 @@
     <p:extLst>
       <p:ext uri="{BB962C8B-B14F-4D97-AF65-F5344CB8AC3E}">
         <p14:creationId xmlns:p14="http://schemas.microsoft.com/office/powerpoint/2010/main" val="3464962107"/>
+      </p:ext>
+    </p:extLst>
+  </p:cSld>
+  <p:clrMapOvr>
+    <a:masterClrMapping/>
+  </p:clrMapOvr>
+</p:notes>
+</file>
+
+<file path=ppt/notesSlides/notesSlide9.xml><?xml version="1.0" encoding="utf-8"?>
+<p:notes xmlns:a="http://schemas.openxmlformats.org/drawingml/2006/main" xmlns:r="http://schemas.openxmlformats.org/officeDocument/2006/relationships" xmlns:p="http://schemas.openxmlformats.org/presentationml/2006/main">
+  <p:cSld>
+    <p:spTree>
+      <p:nvGrpSpPr>
+        <p:cNvPr id="1" name=""/>
+        <p:cNvGrpSpPr/>
+        <p:nvPr/>
+      </p:nvGrpSpPr>
+      <p:grpSpPr>
+        <a:xfrm>
+          <a:off x="0" y="0"/>
+          <a:ext cx="0" cy="0"/>
+          <a:chOff x="0" y="0"/>
+          <a:chExt cx="0" cy="0"/>
+        </a:xfrm>
+      </p:grpSpPr>
+      <p:sp>
+        <p:nvSpPr>
+          <p:cNvPr id="2" name="Slide Image Placeholder 1"/>
+          <p:cNvSpPr>
+            <a:spLocks noGrp="1" noRot="1" noChangeAspect="1"/>
+          </p:cNvSpPr>
+          <p:nvPr>
+            <p:ph type="sldImg"/>
+          </p:nvPr>
+        </p:nvSpPr>
+        <p:spPr/>
+      </p:sp>
+      <p:sp>
+        <p:nvSpPr>
+          <p:cNvPr id="3" name="Notes Placeholder 2"/>
+          <p:cNvSpPr>
+            <a:spLocks noGrp="1"/>
+          </p:cNvSpPr>
+          <p:nvPr>
+            <p:ph type="body" idx="1"/>
+          </p:nvPr>
+        </p:nvSpPr>
+        <p:spPr/>
+        <p:txBody>
+          <a:bodyPr/>
+          <a:lstStyle/>
+          <a:p>
+            <a:r>
+              <a:rPr lang="en-US" sz="1200" b="1" i="0" kern="1200" dirty="0">
+                <a:solidFill>
+                  <a:schemeClr val="tx1"/>
+                </a:solidFill>
+                <a:effectLst/>
+                <a:latin typeface="+mn-lt"/>
+                <a:ea typeface="+mn-ea"/>
+                <a:cs typeface="+mn-cs"/>
+              </a:rPr>
+              <a:t>ROC-AUC</a:t>
+            </a:r>
+            <a:r>
+              <a:rPr lang="en-US" sz="1200" b="0" i="0" kern="1200" dirty="0">
+                <a:solidFill>
+                  <a:schemeClr val="tx1"/>
+                </a:solidFill>
+                <a:effectLst/>
+                <a:latin typeface="+mn-lt"/>
+                <a:ea typeface="+mn-ea"/>
+                <a:cs typeface="+mn-cs"/>
+              </a:rPr>
+              <a:t> = </a:t>
+            </a:r>
+            <a:r>
+              <a:rPr lang="en-US" sz="1200" b="1" i="0" kern="1200" dirty="0">
+                <a:solidFill>
+                  <a:schemeClr val="tx1"/>
+                </a:solidFill>
+                <a:effectLst/>
+                <a:latin typeface="+mn-lt"/>
+                <a:ea typeface="+mn-ea"/>
+                <a:cs typeface="+mn-cs"/>
+              </a:rPr>
+              <a:t>Area Under the Receiver Operating Characteristic Curve</a:t>
+            </a:r>
+            <a:endParaRPr lang="en-US" dirty="0"/>
+          </a:p>
+        </p:txBody>
+      </p:sp>
+      <p:sp>
+        <p:nvSpPr>
+          <p:cNvPr id="4" name="Slide Number Placeholder 3"/>
+          <p:cNvSpPr>
+            <a:spLocks noGrp="1"/>
+          </p:cNvSpPr>
+          <p:nvPr>
+            <p:ph type="sldNum" sz="quarter" idx="5"/>
+          </p:nvPr>
+        </p:nvSpPr>
+        <p:spPr/>
+        <p:txBody>
+          <a:bodyPr/>
+          <a:lstStyle/>
+          <a:p>
+            <a:fld id="{3F2EEDCE-8FEB-4ED1-9D6A-852A65169B88}" type="slidenum">
+              <a:rPr lang="en-US" smtClean="0"/>
+              <a:t>13</a:t>
+            </a:fld>
+            <a:endParaRPr lang="en-US"/>
+          </a:p>
+        </p:txBody>
+      </p:sp>
+    </p:spTree>
+    <p:extLst>
+      <p:ext uri="{BB962C8B-B14F-4D97-AF65-F5344CB8AC3E}">
+        <p14:creationId xmlns:p14="http://schemas.microsoft.com/office/powerpoint/2010/main" val="2057633068"/>
       </p:ext>
     </p:extLst>
   </p:cSld>
@@ -4945,6 +7505,7 @@
               </a:defRPr>
             </a:pPr>
             <a:r>
+              <a:rPr dirty="0"/>
               <a:t>Five structural mitigations:</a:t>
             </a:r>
           </a:p>
@@ -4960,7 +7521,16 @@
               </a:defRPr>
             </a:pPr>
             <a:r>
-              <a:t>1. Refusal before LLM (src/safeguards.py).</a:t>
+              <a:rPr dirty="0"/>
+              <a:t>1. Refusal before LLM (</a:t>
+            </a:r>
+            <a:r>
+              <a:rPr dirty="0" err="1"/>
+              <a:t>src</a:t>
+            </a:r>
+            <a:r>
+              <a:rPr dirty="0"/>
+              <a:t>/safeguards.py).</a:t>
             </a:r>
           </a:p>
           <a:p>
@@ -4975,7 +7545,24 @@
               </a:defRPr>
             </a:pPr>
             <a:r>
-              <a:t>2. Citation discipline — every [S?] index verified (src/evaluation.py:rag_faithfulness).</a:t>
+              <a:rPr dirty="0"/>
+              <a:t>2. Citation discipline — every [S?] index verified (</a:t>
+            </a:r>
+            <a:r>
+              <a:rPr dirty="0" err="1"/>
+              <a:t>src</a:t>
+            </a:r>
+            <a:r>
+              <a:rPr dirty="0"/>
+              <a:t>/</a:t>
+            </a:r>
+            <a:r>
+              <a:rPr dirty="0" err="1"/>
+              <a:t>evaluation.py:rag_faithfulness</a:t>
+            </a:r>
+            <a:r>
+              <a:rPr dirty="0"/>
+              <a:t>).</a:t>
             </a:r>
           </a:p>
           <a:p>
@@ -4990,6 +7577,7 @@
               </a:defRPr>
             </a:pPr>
             <a:r>
+              <a:rPr dirty="0"/>
               <a:t>3. Mandatory disclaimer in every generated explanation.</a:t>
             </a:r>
           </a:p>
@@ -5005,6 +7593,7 @@
               </a:defRPr>
             </a:pPr>
             <a:r>
+              <a:rPr dirty="0"/>
               <a:t>4. Confidence flag surfaced to clinician (low / medium / high).</a:t>
             </a:r>
           </a:p>
@@ -5020,7 +7609,16 @@
               </a:defRPr>
             </a:pPr>
             <a:r>
-              <a:t>5. Full JSONL audit trail (outputs/run_log.jsonl).</a:t>
+              <a:rPr dirty="0"/>
+              <a:t>5. Full JSONL audit trail (outputs/</a:t>
+            </a:r>
+            <a:r>
+              <a:rPr dirty="0" err="1"/>
+              <a:t>run_log.jsonl</a:t>
+            </a:r>
+            <a:r>
+              <a:rPr dirty="0"/>
+              <a:t>).</a:t>
             </a:r>
           </a:p>
           <a:p>
@@ -5035,6 +7633,7 @@
               </a:defRPr>
             </a:pPr>
             <a:r>
+              <a:rPr dirty="0"/>
               <a:t>Mapped to:  NIST AI RMF (govern / map / measure / manage)  +  EU AI Act high-risk requirements (transparency, human oversight, accountability).</a:t>
             </a:r>
           </a:p>
@@ -5050,6 +7649,7 @@
               </a:defRPr>
             </a:pPr>
             <a:r>
+              <a:rPr dirty="0"/>
               <a:t>Honest limitations:</a:t>
             </a:r>
           </a:p>
@@ -5065,6 +7665,7 @@
               </a:defRPr>
             </a:pPr>
             <a:r>
+              <a:rPr dirty="0"/>
               <a:t>Tiny benchmark (n = 303, 30-year-old data).</a:t>
             </a:r>
           </a:p>
@@ -5080,6 +7681,7 @@
               </a:defRPr>
             </a:pPr>
             <a:r>
+              <a:rPr dirty="0"/>
               <a:t>Calibration smell on confident-wrong cases.</a:t>
             </a:r>
           </a:p>
@@ -5095,6 +7697,7 @@
               </a:defRPr>
             </a:pPr>
             <a:r>
+              <a:rPr dirty="0"/>
               <a:t>Substring refusal can be paraphrased past by an adversary.</a:t>
             </a:r>
           </a:p>
@@ -5110,6 +7713,7 @@
               </a:defRPr>
             </a:pPr>
             <a:r>
+              <a:rPr dirty="0"/>
               <a:t>Knowledge base is synthetic.</a:t>
             </a:r>
           </a:p>
@@ -5256,7 +7860,7 @@
         <p:spPr>
           <a:xfrm>
             <a:off x="548640" y="1097280"/>
-            <a:ext cx="11094415" cy="5029200"/>
+            <a:ext cx="11094415" cy="3600986"/>
           </a:xfrm>
           <a:prstGeom prst="rect">
             <a:avLst/>
@@ -5280,6 +7884,7 @@
               </a:defRPr>
             </a:pPr>
             <a:r>
+              <a:rPr dirty="0"/>
               <a:t>Pattern (small classical model + RAG + structurally-guarded LLM + evaluator-critic) is the same one being adopted in legal, financial advisory, insurance — same regulatory drivers.</a:t>
             </a:r>
           </a:p>
@@ -5295,7 +7900,16 @@
               </a:defRPr>
             </a:pPr>
             <a:r>
-              <a:t>Transferable lesson:  the architecture is the safety story, not the prompt.</a:t>
+              <a:rPr dirty="0"/>
+              <a:t>Transferable lesson:  </a:t>
+            </a:r>
+            <a:r>
+              <a:rPr lang="en-US" dirty="0"/>
+              <a:t>T</a:t>
+            </a:r>
+            <a:r>
+              <a:rPr dirty="0"/>
+              <a:t>he architecture is the safety story, not the prompt.</a:t>
             </a:r>
           </a:p>
           <a:p>
@@ -5310,6 +7924,7 @@
               </a:defRPr>
             </a:pPr>
             <a:r>
+              <a:rPr dirty="0"/>
               <a:t>Demonstrated skills:  pipeline engineering, eval discipline, RAG design, agent orchestration, responsible-AI reasoning, technical communication.</a:t>
             </a:r>
           </a:p>
@@ -5325,7 +7940,8 @@
               </a:defRPr>
             </a:pPr>
             <a:r>
-              <a:t>Future work, prioritised:</a:t>
+              <a:rPr dirty="0"/>
+              <a:t>Future work, prioritized:</a:t>
             </a:r>
           </a:p>
           <a:p>
@@ -5340,6 +7956,7 @@
               </a:defRPr>
             </a:pPr>
             <a:r>
+              <a:rPr dirty="0"/>
               <a:t>1. Calibration layer before reporting probabilities.</a:t>
             </a:r>
           </a:p>
@@ -5355,6 +7972,7 @@
               </a:defRPr>
             </a:pPr>
             <a:r>
+              <a:rPr dirty="0"/>
               <a:t>2. Real curated knowledge base.</a:t>
             </a:r>
           </a:p>
@@ -5370,6 +7988,7 @@
               </a:defRPr>
             </a:pPr>
             <a:r>
+              <a:rPr dirty="0"/>
               <a:t>3. Classifier-based input filter (replace substring list).</a:t>
             </a:r>
           </a:p>
@@ -5385,6 +8004,7 @@
               </a:defRPr>
             </a:pPr>
             <a:r>
+              <a:rPr dirty="0"/>
               <a:t>4. Counterfactual explanations.</a:t>
             </a:r>
           </a:p>
@@ -5400,6 +8020,7 @@
               </a:defRPr>
             </a:pPr>
             <a:r>
+              <a:rPr dirty="0"/>
               <a:t>5. Human-in-the-loop feedback channel.</a:t>
             </a:r>
           </a:p>
@@ -5570,6 +8191,7 @@
               </a:defRPr>
             </a:pPr>
             <a:r>
+              <a:rPr dirty="0"/>
               <a:t>Why two models if they tie on ROC-AUC?  →  per-row disagreement powers the confidence flag.</a:t>
             </a:r>
           </a:p>
@@ -5585,6 +8207,7 @@
               </a:defRPr>
             </a:pPr>
             <a:r>
+              <a:rPr dirty="0"/>
               <a:t>Why RAG instead of fine-tuning?  →  auditability and revisability.</a:t>
             </a:r>
           </a:p>
@@ -5600,6 +8223,7 @@
               </a:defRPr>
             </a:pPr>
             <a:r>
+              <a:rPr dirty="0"/>
               <a:t>How do you know the LLM isn't hallucinating citations?  →  src/evaluation.py verifies every [S?] index.</a:t>
             </a:r>
           </a:p>
@@ -5615,6 +8239,7 @@
               </a:defRPr>
             </a:pPr>
             <a:r>
+              <a:rPr dirty="0"/>
               <a:t>What stops prompt injection past the refusal list?  →  substring check runs BEFORE the LLM; production would use a classifier filter.</a:t>
             </a:r>
           </a:p>
@@ -5630,6 +8255,7 @@
               </a:defRPr>
             </a:pPr>
             <a:r>
+              <a:rPr dirty="0"/>
               <a:t>Is this clinically valid?  →  No. Educational artifact, n=303, mandatory disclaimer, documented limitations.</a:t>
             </a:r>
           </a:p>
@@ -5645,6 +8271,7 @@
               </a:defRPr>
             </a:pPr>
             <a:r>
+              <a:rPr dirty="0"/>
               <a:t>Hardest design decision?  →  structural mitigations over prompt-only — significantly more code, but the only one a regulator can audit.</a:t>
             </a:r>
           </a:p>
@@ -5660,6 +8287,7 @@
               </a:defRPr>
             </a:pPr>
             <a:r>
+              <a:rPr dirty="0"/>
               <a:t>What would you do differently?  →  add calibration layer + replace synthetic KB before any quantitative RAG-faithfulness claim leaves the educational context.</a:t>
             </a:r>
           </a:p>
@@ -6075,6 +8703,7 @@
               </a:defRPr>
             </a:pPr>
             <a:r>
+              <a:rPr dirty="0"/>
               <a:t>Cardiovascular disease: ~17.9 M deaths/year (WHO 2021) — leading cause of death globally.</a:t>
             </a:r>
           </a:p>
@@ -6090,6 +8719,7 @@
               </a:defRPr>
             </a:pPr>
             <a:r>
+              <a:rPr dirty="0"/>
               <a:t>Bottleneck at triage is clinician cognitive bandwidth, not raw knowledge.</a:t>
             </a:r>
           </a:p>
@@ -6105,6 +8735,7 @@
               </a:defRPr>
             </a:pPr>
             <a:r>
+              <a:rPr dirty="0"/>
               <a:t>Opportunity: structured, evidence-grounded summary a clinician accepts or rejects in seconds.</a:t>
             </a:r>
           </a:p>
@@ -6120,6 +8751,7 @@
               </a:defRPr>
             </a:pPr>
             <a:r>
+              <a:rPr dirty="0"/>
               <a:t>Non-goal: replacing clinical judgment.</a:t>
             </a:r>
           </a:p>
@@ -6135,6 +8767,7 @@
               </a:defRPr>
             </a:pPr>
             <a:r>
+              <a:rPr dirty="0"/>
               <a:t>Why AI fits:</a:t>
             </a:r>
           </a:p>
@@ -6150,6 +8783,7 @@
               </a:defRPr>
             </a:pPr>
             <a:r>
+              <a:rPr dirty="0"/>
               <a:t>Structured tabular signal (UCI Heart Disease).</a:t>
             </a:r>
           </a:p>
@@ -6165,6 +8799,7 @@
               </a:defRPr>
             </a:pPr>
             <a:r>
+              <a:rPr dirty="0"/>
               <a:t>Retrievable domain knowledge (feature dictionary, risk factors, triage workflow, model card).</a:t>
             </a:r>
           </a:p>
@@ -6180,7 +8815,16 @@
               </a:defRPr>
             </a:pPr>
             <a:r>
-              <a:t>Natural-language summarisation under structural constraints.</a:t>
+              <a:rPr dirty="0"/>
+              <a:t>Natural-language </a:t>
+            </a:r>
+            <a:r>
+              <a:rPr dirty="0" err="1"/>
+              <a:t>summarisation</a:t>
+            </a:r>
+            <a:r>
+              <a:rPr dirty="0"/>
+              <a:t> under structural constraints.</a:t>
             </a:r>
           </a:p>
         </p:txBody>
@@ -6350,6 +8994,7 @@
               </a:defRPr>
             </a:pPr>
             <a:r>
+              <a:rPr dirty="0"/>
               <a:t>Pipeline: Preprocessing → ML + DL → Ensemble + Confidence → Agent (RAG + Explainer + Evaluator) → Persisted Transcript.</a:t>
             </a:r>
           </a:p>
@@ -6365,7 +9010,16 @@
               </a:defRPr>
             </a:pPr>
             <a:r>
-              <a:t>Every block emits a JSON event into outputs/run_log.jsonl.</a:t>
+              <a:rPr dirty="0"/>
+              <a:t>Every block emits a JSON event into outputs/</a:t>
+            </a:r>
+            <a:r>
+              <a:rPr dirty="0" err="1"/>
+              <a:t>run_log.jsonl</a:t>
+            </a:r>
+            <a:r>
+              <a:rPr dirty="0"/>
+              <a:t>.</a:t>
             </a:r>
           </a:p>
           <a:p>
@@ -6380,6 +9034,7 @@
               </a:defRPr>
             </a:pPr>
             <a:r>
+              <a:rPr dirty="0"/>
               <a:t>No monolithic step — regulators can audit each stage independently.</a:t>
             </a:r>
           </a:p>
@@ -6395,6 +9050,7 @@
               </a:defRPr>
             </a:pPr>
             <a:r>
+              <a:rPr dirty="0"/>
               <a:t>Demo entry point: notebooks/05_integrated_pipeline.ipynb.</a:t>
             </a:r>
           </a:p>
@@ -6410,6 +9066,7 @@
               </a:defRPr>
             </a:pPr>
             <a:r>
+              <a:rPr dirty="0"/>
               <a:t>(Architecture diagram on the next slide.)</a:t>
             </a:r>
           </a:p>
@@ -6563,8 +9220,8 @@
         </p:blipFill>
         <p:spPr>
           <a:xfrm>
-            <a:off x="1066647" y="1097280"/>
-            <a:ext cx="10058400" cy="5120640"/>
+            <a:off x="4575941" y="914400"/>
+            <a:ext cx="6253493" cy="5983014"/>
           </a:xfrm>
           <a:prstGeom prst="rect">
             <a:avLst/>
@@ -6602,6 +9259,51 @@
             </a:pPr>
             <a:r>
               <a:t>Project 8 Defense  ·  Clinical-Triage Explainer  ·  Educational artifact, not for clinical use  ·  4/14</a:t>
+            </a:r>
+          </a:p>
+        </p:txBody>
+      </p:sp>
+      <p:sp>
+        <p:nvSpPr>
+          <p:cNvPr id="6" name="TextBox 5">
+            <a:extLst>
+              <a:ext uri="{FF2B5EF4-FFF2-40B4-BE49-F238E27FC236}">
+                <a16:creationId xmlns:a16="http://schemas.microsoft.com/office/drawing/2014/main" id="{CD0714D3-39E8-1E9C-8C29-A9B11ADD43BF}"/>
+              </a:ext>
+            </a:extLst>
+          </p:cNvPr>
+          <p:cNvSpPr txBox="1"/>
+          <p:nvPr/>
+        </p:nvSpPr>
+        <p:spPr>
+          <a:xfrm>
+            <a:off x="287542" y="1144998"/>
+            <a:ext cx="6138698" cy="646331"/>
+          </a:xfrm>
+          <a:prstGeom prst="rect">
+            <a:avLst/>
+          </a:prstGeom>
+          <a:noFill/>
+        </p:spPr>
+        <p:txBody>
+          <a:bodyPr wrap="square">
+            <a:spAutoFit/>
+          </a:bodyPr>
+          <a:lstStyle/>
+          <a:p>
+            <a:pPr>
+              <a:spcAft>
+                <a:spcPts val="600"/>
+              </a:spcAft>
+              <a:defRPr sz="1800" b="1">
+                <a:solidFill>
+                  <a:srgbClr val="0B2C4A"/>
+                </a:solidFill>
+              </a:defRPr>
+            </a:pPr>
+            <a:r>
+              <a:rPr lang="en-US" dirty="0"/>
+              <a:t>Pipeline: Preprocessing → ML + DL → Ensemble + Confidence → Agent (RAG + Explainer + Evaluator) → Persisted Transcript.</a:t>
             </a:r>
           </a:p>
         </p:txBody>
@@ -6711,8 +9413,8 @@
         </p:nvSpPr>
         <p:spPr>
           <a:xfrm>
-            <a:off x="548640" y="1097280"/>
-            <a:ext cx="11094415" cy="5029200"/>
+            <a:off x="457200" y="2036905"/>
+            <a:ext cx="11887200" cy="3062377"/>
           </a:xfrm>
           <a:prstGeom prst="rect">
             <a:avLst/>
@@ -6736,8 +9438,13 @@
               </a:defRPr>
             </a:pPr>
             <a:r>
+              <a:rPr dirty="0"/>
               <a:t>P2 — Statistical reasoning:  IDA discipline, chi-square + Cramer's V  →  notebooks/01_data_exploration.ipynb</a:t>
             </a:r>
+            <a:br>
+              <a:rPr lang="en-US" dirty="0"/>
+            </a:br>
+            <a:endParaRPr lang="en-US" dirty="0"/>
           </a:p>
           <a:p>
             <a:pPr>
@@ -6751,8 +9458,47 @@
               </a:defRPr>
             </a:pPr>
             <a:r>
-              <a:t>P3 — ML / RFM:  sklearn Pipeline, log1p skew handling  →  src/preprocessing.py, src/ml_model.py</a:t>
-            </a:r>
+              <a:rPr lang="en-US" dirty="0"/>
+              <a:t>P3 — ML / RFM:  </a:t>
+            </a:r>
+            <a:r>
+              <a:rPr lang="en-US" dirty="0" err="1"/>
+              <a:t>sklearn</a:t>
+            </a:r>
+            <a:r>
+              <a:rPr lang="en-US" dirty="0"/>
+              <a:t> Pipeline, log1p skew handling  →  </a:t>
+            </a:r>
+            <a:r>
+              <a:rPr lang="en-US" dirty="0" err="1"/>
+              <a:t>src</a:t>
+            </a:r>
+            <a:r>
+              <a:rPr lang="en-US" dirty="0"/>
+              <a:t>/preprocessing.py, src/ml_model.py</a:t>
+            </a:r>
+            <a:br>
+              <a:rPr lang="en-US" dirty="0"/>
+            </a:br>
+            <a:br>
+              <a:rPr lang="en-US" dirty="0"/>
+            </a:br>
+            <a:r>
+              <a:rPr dirty="0"/>
+              <a:t>P4 — Deep Learning:  dropout, disaggregated per-slice eval  →  </a:t>
+            </a:r>
+            <a:r>
+              <a:rPr dirty="0" err="1"/>
+              <a:t>src</a:t>
+            </a:r>
+            <a:r>
+              <a:rPr dirty="0"/>
+              <a:t>/dl_model.py, src/evaluation.py</a:t>
+            </a:r>
+            <a:br>
+              <a:rPr lang="en-US" dirty="0"/>
+            </a:br>
+            <a:endParaRPr lang="en-US" dirty="0"/>
           </a:p>
           <a:p>
             <a:pPr>
@@ -6766,8 +9512,13 @@
               </a:defRPr>
             </a:pPr>
             <a:r>
-              <a:t>P4 — Deep Learning:  dropout, disaggregated per-slice eval  →  src/dl_model.py, src/evaluation.py</a:t>
-            </a:r>
+              <a:rPr dirty="0"/>
+              <a:t>P5 — Generative AI:  structural mitigations for generative output  →  src/genai_explainer.py guardrails</a:t>
+            </a:r>
+            <a:br>
+              <a:rPr lang="en-US" dirty="0"/>
+            </a:br>
+            <a:endParaRPr lang="en-US" dirty="0"/>
           </a:p>
           <a:p>
             <a:pPr>
@@ -6781,53 +9532,33 @@
               </a:defRPr>
             </a:pPr>
             <a:r>
-              <a:t>P5 — Generative AI:  structural mitigations for generative output  →  src/genai_explainer.py guardrails</a:t>
-            </a:r>
-          </a:p>
-          <a:p>
-            <a:pPr>
-              <a:spcAft>
-                <a:spcPts val="600"/>
-              </a:spcAft>
-              <a:defRPr sz="1800" b="1">
-                <a:solidFill>
-                  <a:srgbClr val="0B2C4A"/>
-                </a:solidFill>
-              </a:defRPr>
-            </a:pPr>
-            <a:r>
-              <a:t>P6 — Agentic AI:  Plan→Retrieve→Evaluate→Revise loop, RAG, refusal list  →  src/rag/, src/agent_orchestrator.py</a:t>
-            </a:r>
-          </a:p>
-          <a:p>
-            <a:pPr>
-              <a:spcAft>
-                <a:spcPts val="600"/>
-              </a:spcAft>
-              <a:defRPr sz="1800" b="1">
-                <a:solidFill>
-                  <a:srgbClr val="0B2C4A"/>
-                </a:solidFill>
-              </a:defRPr>
-            </a:pPr>
-            <a:r>
-              <a:t>Why combined: no single prior project covers a regulated end-to-end workflow.</a:t>
-            </a:r>
-          </a:p>
-          <a:p>
-            <a:pPr>
-              <a:spcAft>
-                <a:spcPts val="600"/>
-              </a:spcAft>
-              <a:defRPr sz="1800" b="1">
-                <a:solidFill>
-                  <a:srgbClr val="0B2C4A"/>
-                </a:solidFill>
-              </a:defRPr>
-            </a:pPr>
-            <a:r>
-              <a:t>Integration improvement: structural safety (refusal-before-LLM, evaluator-critic, audit trail) only emerges when the agent loop sits on top of two architecturally different learners.</a:t>
-            </a:r>
+              <a:rPr dirty="0"/>
+              <a:t>P6 — Agentic AI:  </a:t>
+            </a:r>
+            <a:r>
+              <a:rPr dirty="0" err="1"/>
+              <a:t>Plan→Retrieve→Evaluate→Revise</a:t>
+            </a:r>
+            <a:r>
+              <a:rPr dirty="0"/>
+              <a:t> loop, RAG, refusal list  →  </a:t>
+            </a:r>
+            <a:r>
+              <a:rPr dirty="0" err="1"/>
+              <a:t>src</a:t>
+            </a:r>
+            <a:r>
+              <a:rPr dirty="0"/>
+              <a:t>/rag/, src/agent_orchestrator.py</a:t>
+            </a:r>
+            <a:br>
+              <a:rPr lang="en-US" dirty="0"/>
+            </a:br>
+            <a:r>
+              <a:rPr lang="en-US" sz="1600" dirty="0"/>
+              <a:t>	</a:t>
+            </a:r>
+            <a:endParaRPr sz="1600" dirty="0"/>
           </a:p>
         </p:txBody>
       </p:sp>

--- a/defense doc/Defense_Deck.pptx
+++ b/defense doc/Defense_Deck.pptx
@@ -221,7 +221,7 @@
           <a:p>
             <a:fld id="{69738B64-6FBD-4769-A673-270CEAA06466}" type="datetimeFigureOut">
               <a:rPr lang="en-US" smtClean="0"/>
-              <a:t>5/18/2026</a:t>
+              <a:t>5/25/2026</a:t>
             </a:fld>
             <a:endParaRPr lang="en-US"/>
           </a:p>
@@ -4215,7 +4215,7 @@
           <a:p>
             <a:fld id="{5BCAD085-E8A6-8845-BD4E-CB4CCA059FC4}" type="datetimeFigureOut">
               <a:rPr lang="en-US" smtClean="0"/>
-              <a:t>5/18/2026</a:t>
+              <a:t>5/25/2026</a:t>
             </a:fld>
             <a:endParaRPr lang="en-US"/>
           </a:p>
@@ -4383,7 +4383,7 @@
           <a:p>
             <a:fld id="{5BCAD085-E8A6-8845-BD4E-CB4CCA059FC4}" type="datetimeFigureOut">
               <a:rPr lang="en-US" smtClean="0"/>
-              <a:t>5/18/2026</a:t>
+              <a:t>5/25/2026</a:t>
             </a:fld>
             <a:endParaRPr lang="en-US"/>
           </a:p>
@@ -4561,7 +4561,7 @@
           <a:p>
             <a:fld id="{5BCAD085-E8A6-8845-BD4E-CB4CCA059FC4}" type="datetimeFigureOut">
               <a:rPr lang="en-US" smtClean="0"/>
-              <a:t>5/18/2026</a:t>
+              <a:t>5/25/2026</a:t>
             </a:fld>
             <a:endParaRPr lang="en-US"/>
           </a:p>
@@ -4729,7 +4729,7 @@
           <a:p>
             <a:fld id="{5BCAD085-E8A6-8845-BD4E-CB4CCA059FC4}" type="datetimeFigureOut">
               <a:rPr lang="en-US" smtClean="0"/>
-              <a:t>5/18/2026</a:t>
+              <a:t>5/25/2026</a:t>
             </a:fld>
             <a:endParaRPr lang="en-US"/>
           </a:p>
@@ -4974,7 +4974,7 @@
           <a:p>
             <a:fld id="{5BCAD085-E8A6-8845-BD4E-CB4CCA059FC4}" type="datetimeFigureOut">
               <a:rPr lang="en-US" smtClean="0"/>
-              <a:t>5/18/2026</a:t>
+              <a:t>5/25/2026</a:t>
             </a:fld>
             <a:endParaRPr lang="en-US"/>
           </a:p>
@@ -5259,7 +5259,7 @@
           <a:p>
             <a:fld id="{5BCAD085-E8A6-8845-BD4E-CB4CCA059FC4}" type="datetimeFigureOut">
               <a:rPr lang="en-US" smtClean="0"/>
-              <a:t>5/18/2026</a:t>
+              <a:t>5/25/2026</a:t>
             </a:fld>
             <a:endParaRPr lang="en-US"/>
           </a:p>
@@ -5678,7 +5678,7 @@
           <a:p>
             <a:fld id="{5BCAD085-E8A6-8845-BD4E-CB4CCA059FC4}" type="datetimeFigureOut">
               <a:rPr lang="en-US" smtClean="0"/>
-              <a:t>5/18/2026</a:t>
+              <a:t>5/25/2026</a:t>
             </a:fld>
             <a:endParaRPr lang="en-US"/>
           </a:p>
@@ -5795,7 +5795,7 @@
           <a:p>
             <a:fld id="{5BCAD085-E8A6-8845-BD4E-CB4CCA059FC4}" type="datetimeFigureOut">
               <a:rPr lang="en-US" smtClean="0"/>
-              <a:t>5/18/2026</a:t>
+              <a:t>5/25/2026</a:t>
             </a:fld>
             <a:endParaRPr lang="en-US"/>
           </a:p>
@@ -5890,7 +5890,7 @@
           <a:p>
             <a:fld id="{5BCAD085-E8A6-8845-BD4E-CB4CCA059FC4}" type="datetimeFigureOut">
               <a:rPr lang="en-US" smtClean="0"/>
-              <a:t>5/18/2026</a:t>
+              <a:t>5/25/2026</a:t>
             </a:fld>
             <a:endParaRPr lang="en-US"/>
           </a:p>
@@ -6165,7 +6165,7 @@
           <a:p>
             <a:fld id="{5BCAD085-E8A6-8845-BD4E-CB4CCA059FC4}" type="datetimeFigureOut">
               <a:rPr lang="en-US" smtClean="0"/>
-              <a:t>5/18/2026</a:t>
+              <a:t>5/25/2026</a:t>
             </a:fld>
             <a:endParaRPr lang="en-US"/>
           </a:p>
@@ -6417,7 +6417,7 @@
           <a:p>
             <a:fld id="{5BCAD085-E8A6-8845-BD4E-CB4CCA059FC4}" type="datetimeFigureOut">
               <a:rPr lang="en-US" smtClean="0"/>
-              <a:t>5/18/2026</a:t>
+              <a:t>5/25/2026</a:t>
             </a:fld>
             <a:endParaRPr lang="en-US"/>
           </a:p>
@@ -6628,7 +6628,7 @@
           <a:p>
             <a:fld id="{5BCAD085-E8A6-8845-BD4E-CB4CCA059FC4}" type="datetimeFigureOut">
               <a:rPr lang="en-US" smtClean="0"/>
-              <a:t>5/18/2026</a:t>
+              <a:t>5/25/2026</a:t>
             </a:fld>
             <a:endParaRPr lang="en-US"/>
           </a:p>
@@ -7251,7 +7251,7 @@
         <p:spPr>
           <a:xfrm>
             <a:off x="548640" y="1097280"/>
-            <a:ext cx="11094415" cy="5029200"/>
+            <a:ext cx="11094415" cy="2339102"/>
           </a:xfrm>
           <a:prstGeom prst="rect">
             <a:avLst/>
@@ -7264,10 +7264,12 @@
           </a:bodyPr>
           <a:lstStyle/>
           <a:p>
-            <a:pPr>
+            <a:pPr marL="285750" indent="-285750">
               <a:spcAft>
                 <a:spcPts val="600"/>
               </a:spcAft>
+              <a:buFont typeface="Arial" panose="020B0604020202020204" pitchFamily="34" charset="0"/>
+              <a:buChar char="•"/>
               <a:defRPr sz="1800" b="1">
                 <a:solidFill>
                   <a:srgbClr val="0B2C4A"/>
@@ -7275,14 +7277,17 @@
               </a:defRPr>
             </a:pPr>
             <a:r>
+              <a:rPr dirty="0"/>
               <a:t>ROC-AUC ≈ 0.96 for both ML and DL.  Brier ≈ 0.087.  Test n = 61.</a:t>
             </a:r>
           </a:p>
           <a:p>
-            <a:pPr>
+            <a:pPr marL="285750" indent="-285750">
               <a:spcAft>
                 <a:spcPts val="600"/>
               </a:spcAft>
+              <a:buFont typeface="Arial" panose="020B0604020202020204" pitchFamily="34" charset="0"/>
+              <a:buChar char="•"/>
               <a:defRPr sz="1800" b="1">
                 <a:solidFill>
                   <a:srgbClr val="0B2C4A"/>
@@ -7290,14 +7295,25 @@
               </a:defRPr>
             </a:pPr>
             <a:r>
-              <a:t>95 % bootstrap CIs reported alongside a LogisticRegression baseline → bands overlap → results are honest, not oversold.</a:t>
-            </a:r>
-          </a:p>
-          <a:p>
-            <a:pPr>
+              <a:rPr dirty="0"/>
+              <a:t>95 % bootstrap CIs reported alongside a </a:t>
+            </a:r>
+            <a:r>
+              <a:rPr dirty="0" err="1"/>
+              <a:t>LogisticRegression</a:t>
+            </a:r>
+            <a:r>
+              <a:rPr dirty="0"/>
+              <a:t> baseline → bands overlap → results are honest, not oversold.</a:t>
+            </a:r>
+          </a:p>
+          <a:p>
+            <a:pPr marL="285750" indent="-285750">
               <a:spcAft>
                 <a:spcPts val="600"/>
               </a:spcAft>
+              <a:buFont typeface="Arial" panose="020B0604020202020204" pitchFamily="34" charset="0"/>
+              <a:buChar char="•"/>
               <a:defRPr sz="1800" b="1">
                 <a:solidFill>
                   <a:srgbClr val="0B2C4A"/>
@@ -7305,14 +7321,17 @@
               </a:defRPr>
             </a:pPr>
             <a:r>
+              <a:rPr dirty="0"/>
               <a:t>Per-sex slice gap appears in BOTH models → data-driven, not model-driven; disclosed in the retrieved model card.</a:t>
             </a:r>
           </a:p>
           <a:p>
-            <a:pPr>
+            <a:pPr marL="285750" indent="-285750">
               <a:spcAft>
                 <a:spcPts val="600"/>
               </a:spcAft>
+              <a:buFont typeface="Arial" panose="020B0604020202020204" pitchFamily="34" charset="0"/>
+              <a:buChar char="•"/>
               <a:defRPr sz="1800" b="1">
                 <a:solidFill>
                   <a:srgbClr val="0B2C4A"/>
@@ -7320,14 +7339,17 @@
               </a:defRPr>
             </a:pPr>
             <a:r>
+              <a:rPr dirty="0"/>
               <a:t>Top-5 highest-confidence wrongs are largely shared between ML and DL → another data signal.</a:t>
             </a:r>
           </a:p>
           <a:p>
-            <a:pPr>
+            <a:pPr marL="285750" indent="-285750">
               <a:spcAft>
                 <a:spcPts val="600"/>
               </a:spcAft>
+              <a:buFont typeface="Arial" panose="020B0604020202020204" pitchFamily="34" charset="0"/>
+              <a:buChar char="•"/>
               <a:defRPr sz="1800" b="1">
                 <a:solidFill>
                   <a:srgbClr val="0B2C4A"/>
@@ -7335,7 +7357,8 @@
               </a:defRPr>
             </a:pPr>
             <a:r>
-              <a:t>RAG faithfulness across 3 live runs: zero invalid citations, 36–44 % explanation/evidence token overlap.</a:t>
+              <a:rPr dirty="0"/>
+              <a:t>RAG faithfulness across 3 live runs: zero invalid citations, 37–45 % explanation/evidence token overlap.</a:t>
             </a:r>
           </a:p>
         </p:txBody>
@@ -7481,7 +7504,7 @@
         <p:spPr>
           <a:xfrm>
             <a:off x="548640" y="1097280"/>
-            <a:ext cx="11094415" cy="5029200"/>
+            <a:ext cx="11094415" cy="4262705"/>
           </a:xfrm>
           <a:prstGeom prst="rect">
             <a:avLst/>
@@ -7494,10 +7517,12 @@
           </a:bodyPr>
           <a:lstStyle/>
           <a:p>
-            <a:pPr>
+            <a:pPr marL="285750" indent="-285750">
               <a:spcAft>
                 <a:spcPts val="600"/>
               </a:spcAft>
+              <a:buFont typeface="Arial" panose="020B0604020202020204" pitchFamily="34" charset="0"/>
+              <a:buChar char="•"/>
               <a:defRPr sz="1800" b="1">
                 <a:solidFill>
                   <a:srgbClr val="0B2C4A"/>
@@ -7622,10 +7647,12 @@
             </a:r>
           </a:p>
           <a:p>
-            <a:pPr>
+            <a:pPr marL="285750" indent="-285750">
               <a:spcAft>
                 <a:spcPts val="600"/>
               </a:spcAft>
+              <a:buFont typeface="Arial" panose="020B0604020202020204" pitchFamily="34" charset="0"/>
+              <a:buChar char="•"/>
               <a:defRPr sz="1800" b="1">
                 <a:solidFill>
                   <a:srgbClr val="0B2C4A"/>
@@ -7638,10 +7665,12 @@
             </a:r>
           </a:p>
           <a:p>
-            <a:pPr>
+            <a:pPr marL="285750" indent="-285750">
               <a:spcAft>
                 <a:spcPts val="600"/>
               </a:spcAft>
+              <a:buFont typeface="Arial" panose="020B0604020202020204" pitchFamily="34" charset="0"/>
+              <a:buChar char="•"/>
               <a:defRPr sz="1800" b="1">
                 <a:solidFill>
                   <a:srgbClr val="0B2C4A"/>
@@ -7654,10 +7683,12 @@
             </a:r>
           </a:p>
           <a:p>
-            <a:pPr lvl="1">
+            <a:pPr marL="742950" lvl="1" indent="-285750">
               <a:spcAft>
                 <a:spcPts val="600"/>
               </a:spcAft>
+              <a:buFont typeface="Arial" panose="020B0604020202020204" pitchFamily="34" charset="0"/>
+              <a:buChar char="•"/>
               <a:defRPr sz="1600" b="0">
                 <a:solidFill>
                   <a:srgbClr val="555555"/>
@@ -7670,10 +7701,12 @@
             </a:r>
           </a:p>
           <a:p>
-            <a:pPr lvl="1">
+            <a:pPr marL="742950" lvl="1" indent="-285750">
               <a:spcAft>
                 <a:spcPts val="600"/>
               </a:spcAft>
+              <a:buFont typeface="Arial" panose="020B0604020202020204" pitchFamily="34" charset="0"/>
+              <a:buChar char="•"/>
               <a:defRPr sz="1600" b="0">
                 <a:solidFill>
                   <a:srgbClr val="555555"/>
@@ -7686,10 +7719,12 @@
             </a:r>
           </a:p>
           <a:p>
-            <a:pPr lvl="1">
+            <a:pPr marL="742950" lvl="1" indent="-285750">
               <a:spcAft>
                 <a:spcPts val="600"/>
               </a:spcAft>
+              <a:buFont typeface="Arial" panose="020B0604020202020204" pitchFamily="34" charset="0"/>
+              <a:buChar char="•"/>
               <a:defRPr sz="1600" b="0">
                 <a:solidFill>
                   <a:srgbClr val="555555"/>
@@ -7702,10 +7737,12 @@
             </a:r>
           </a:p>
           <a:p>
-            <a:pPr lvl="1">
+            <a:pPr marL="742950" lvl="1" indent="-285750">
               <a:spcAft>
                 <a:spcPts val="600"/>
               </a:spcAft>
+              <a:buFont typeface="Arial" panose="020B0604020202020204" pitchFamily="34" charset="0"/>
+              <a:buChar char="•"/>
               <a:defRPr sz="1600" b="0">
                 <a:solidFill>
                   <a:srgbClr val="555555"/>
@@ -7873,10 +7910,12 @@
           </a:bodyPr>
           <a:lstStyle/>
           <a:p>
-            <a:pPr>
+            <a:pPr marL="285750" indent="-285750">
               <a:spcAft>
                 <a:spcPts val="600"/>
               </a:spcAft>
+              <a:buFont typeface="Arial" panose="020B0604020202020204" pitchFamily="34" charset="0"/>
+              <a:buChar char="•"/>
               <a:defRPr sz="1800" b="1">
                 <a:solidFill>
                   <a:srgbClr val="0B2C4A"/>
@@ -7889,10 +7928,12 @@
             </a:r>
           </a:p>
           <a:p>
-            <a:pPr>
+            <a:pPr marL="285750" indent="-285750">
               <a:spcAft>
                 <a:spcPts val="600"/>
               </a:spcAft>
+              <a:buFont typeface="Arial" panose="020B0604020202020204" pitchFamily="34" charset="0"/>
+              <a:buChar char="•"/>
               <a:defRPr sz="1800" b="1">
                 <a:solidFill>
                   <a:srgbClr val="0B2C4A"/>
@@ -7913,10 +7954,12 @@
             </a:r>
           </a:p>
           <a:p>
-            <a:pPr>
+            <a:pPr marL="285750" indent="-285750">
               <a:spcAft>
                 <a:spcPts val="600"/>
               </a:spcAft>
+              <a:buFont typeface="Arial" panose="020B0604020202020204" pitchFamily="34" charset="0"/>
+              <a:buChar char="•"/>
               <a:defRPr sz="1800" b="1">
                 <a:solidFill>
                   <a:srgbClr val="0B2C4A"/>
@@ -7929,10 +7972,12 @@
             </a:r>
           </a:p>
           <a:p>
-            <a:pPr>
+            <a:pPr marL="285750" indent="-285750">
               <a:spcAft>
                 <a:spcPts val="600"/>
               </a:spcAft>
+              <a:buFont typeface="Arial" panose="020B0604020202020204" pitchFamily="34" charset="0"/>
+              <a:buChar char="•"/>
               <a:defRPr sz="1800" b="1">
                 <a:solidFill>
                   <a:srgbClr val="0B2C4A"/>
@@ -8167,7 +8212,7 @@
         <p:spPr>
           <a:xfrm>
             <a:off x="548640" y="1097280"/>
-            <a:ext cx="11094415" cy="5029200"/>
+            <a:ext cx="11094415" cy="3323987"/>
           </a:xfrm>
           <a:prstGeom prst="rect">
             <a:avLst/>
@@ -8180,10 +8225,12 @@
           </a:bodyPr>
           <a:lstStyle/>
           <a:p>
-            <a:pPr>
+            <a:pPr marL="285750" indent="-285750">
               <a:spcAft>
                 <a:spcPts val="600"/>
               </a:spcAft>
+              <a:buFont typeface="Arial" panose="020B0604020202020204" pitchFamily="34" charset="0"/>
+              <a:buChar char="•"/>
               <a:defRPr sz="1800" b="1">
                 <a:solidFill>
                   <a:srgbClr val="0B2C4A"/>
@@ -8196,10 +8243,12 @@
             </a:r>
           </a:p>
           <a:p>
-            <a:pPr>
+            <a:pPr marL="285750" indent="-285750">
               <a:spcAft>
                 <a:spcPts val="600"/>
               </a:spcAft>
+              <a:buFont typeface="Arial" panose="020B0604020202020204" pitchFamily="34" charset="0"/>
+              <a:buChar char="•"/>
               <a:defRPr sz="1800" b="1">
                 <a:solidFill>
                   <a:srgbClr val="0B2C4A"/>
@@ -8212,10 +8261,12 @@
             </a:r>
           </a:p>
           <a:p>
-            <a:pPr>
+            <a:pPr marL="285750" indent="-285750">
               <a:spcAft>
                 <a:spcPts val="600"/>
               </a:spcAft>
+              <a:buFont typeface="Arial" panose="020B0604020202020204" pitchFamily="34" charset="0"/>
+              <a:buChar char="•"/>
               <a:defRPr sz="1800" b="1">
                 <a:solidFill>
                   <a:srgbClr val="0B2C4A"/>
@@ -8228,10 +8279,12 @@
             </a:r>
           </a:p>
           <a:p>
-            <a:pPr>
+            <a:pPr marL="285750" indent="-285750">
               <a:spcAft>
                 <a:spcPts val="600"/>
               </a:spcAft>
+              <a:buFont typeface="Arial" panose="020B0604020202020204" pitchFamily="34" charset="0"/>
+              <a:buChar char="•"/>
               <a:defRPr sz="1800" b="1">
                 <a:solidFill>
                   <a:srgbClr val="0B2C4A"/>
@@ -8244,10 +8297,12 @@
             </a:r>
           </a:p>
           <a:p>
-            <a:pPr>
+            <a:pPr marL="285750" indent="-285750">
               <a:spcAft>
                 <a:spcPts val="600"/>
               </a:spcAft>
+              <a:buFont typeface="Arial" panose="020B0604020202020204" pitchFamily="34" charset="0"/>
+              <a:buChar char="•"/>
               <a:defRPr sz="1800" b="1">
                 <a:solidFill>
                   <a:srgbClr val="0B2C4A"/>
@@ -8260,10 +8315,12 @@
             </a:r>
           </a:p>
           <a:p>
-            <a:pPr>
+            <a:pPr marL="285750" indent="-285750">
               <a:spcAft>
                 <a:spcPts val="600"/>
               </a:spcAft>
+              <a:buFont typeface="Arial" panose="020B0604020202020204" pitchFamily="34" charset="0"/>
+              <a:buChar char="•"/>
               <a:defRPr sz="1800" b="1">
                 <a:solidFill>
                   <a:srgbClr val="0B2C4A"/>
@@ -8276,10 +8333,12 @@
             </a:r>
           </a:p>
           <a:p>
-            <a:pPr>
+            <a:pPr marL="285750" indent="-285750">
               <a:spcAft>
                 <a:spcPts val="600"/>
               </a:spcAft>
+              <a:buFont typeface="Arial" panose="020B0604020202020204" pitchFamily="34" charset="0"/>
+              <a:buChar char="•"/>
               <a:defRPr sz="1800" b="1">
                 <a:solidFill>
                   <a:srgbClr val="0B2C4A"/>
@@ -8382,26 +8441,12 @@
             <a:noFill/>
           </a:ln>
         </p:spPr>
-        <p:style>
-          <a:lnRef idx="1">
-            <a:schemeClr val="accent1"/>
-          </a:lnRef>
-          <a:fillRef idx="3">
-            <a:schemeClr val="accent1"/>
-          </a:fillRef>
-          <a:effectRef idx="2">
-            <a:schemeClr val="accent1"/>
-          </a:effectRef>
-          <a:fontRef idx="minor">
-            <a:schemeClr val="lt1"/>
-          </a:fontRef>
-        </p:style>
         <p:txBody>
           <a:bodyPr lIns="457200" tIns="109728" rIns="274320" rtlCol="0" anchor="ctr"/>
           <a:lstStyle/>
           <a:p>
             <a:pPr algn="ctr">
-              <a:defRPr sz="2800" b="1">
+              <a:defRPr sz="3600" b="1">
                 <a:solidFill>
                   <a:srgbClr val="FFFFFF"/>
                 </a:solidFill>
@@ -8409,18 +8454,6 @@
             </a:pPr>
             <a:r>
               <a:t>Thank you — Questions?</a:t>
-            </a:r>
-          </a:p>
-          <a:p>
-            <a:pPr>
-              <a:defRPr sz="1200">
-                <a:solidFill>
-                  <a:srgbClr val="CFE2F3"/>
-                </a:solidFill>
-              </a:defRPr>
-            </a:pPr>
-            <a:r>
-              <a:t>Companion artifacts in this folder</a:t>
             </a:r>
           </a:p>
         </p:txBody>
@@ -8433,8 +8466,8 @@
         </p:nvSpPr>
         <p:spPr>
           <a:xfrm>
-            <a:off x="548640" y="1097280"/>
-            <a:ext cx="11094415" cy="5029200"/>
+            <a:off x="548640" y="3056316"/>
+            <a:ext cx="11094415" cy="687368"/>
           </a:xfrm>
           <a:prstGeom prst="rect">
             <a:avLst/>
@@ -8442,97 +8475,44 @@
           <a:noFill/>
         </p:spPr>
         <p:txBody>
-          <a:bodyPr wrap="square">
+          <a:bodyPr wrap="square" anchor="ctr">
             <a:spAutoFit/>
           </a:bodyPr>
           <a:lstStyle/>
           <a:p>
-            <a:pPr>
+            <a:pPr algn="ctr">
               <a:spcAft>
-                <a:spcPts val="600"/>
+                <a:spcPts val="800"/>
               </a:spcAft>
-              <a:defRPr sz="1800" b="1">
+              <a:defRPr sz="1800">
                 <a:solidFill>
                   <a:srgbClr val="0B2C4A"/>
                 </a:solidFill>
               </a:defRPr>
             </a:pPr>
             <a:r>
-              <a:t>Rehearsal_Script.md — single canonical script.</a:t>
-            </a:r>
-          </a:p>
-          <a:p>
-            <a:pPr>
-              <a:spcAft>
-                <a:spcPts val="600"/>
-              </a:spcAft>
-              <a:defRPr sz="1800" b="1">
-                <a:solidFill>
-                  <a:srgbClr val="0B2C4A"/>
-                </a:solidFill>
-              </a:defRPr>
-            </a:pPr>
-            <a:r>
-              <a:t>Reflective_Synthesis_Paper.pdf — the written defense.</a:t>
-            </a:r>
-          </a:p>
-          <a:p>
-            <a:pPr>
-              <a:spcAft>
-                <a:spcPts val="600"/>
-              </a:spcAft>
-              <a:defRPr sz="1800" b="1">
-                <a:solidFill>
-                  <a:srgbClr val="0B2C4A"/>
-                </a:solidFill>
-              </a:defRPr>
-            </a:pPr>
-            <a:r>
-              <a:t>integration_map.md — prior-project lineage table.</a:t>
-            </a:r>
-          </a:p>
-          <a:p>
-            <a:pPr>
-              <a:spcAft>
-                <a:spcPts val="600"/>
-              </a:spcAft>
-              <a:defRPr sz="1800" b="1">
-                <a:solidFill>
-                  <a:srgbClr val="0B2C4A"/>
-                </a:solidFill>
-              </a:defRPr>
-            </a:pPr>
-            <a:r>
-              <a:t>transcripts/demo1, demo2, demo3 — fallback evidence if a live demo fails.</a:t>
-            </a:r>
-          </a:p>
-          <a:p>
-            <a:pPr>
-              <a:spcAft>
-                <a:spcPts val="600"/>
-              </a:spcAft>
-              <a:defRPr sz="1800" b="1">
-                <a:solidFill>
-                  <a:srgbClr val="0B2C4A"/>
-                </a:solidFill>
-              </a:defRPr>
-            </a:pPr>
-            <a:r>
-              <a:t>architecture.png — system diagram.</a:t>
-            </a:r>
-          </a:p>
-          <a:p>
-            <a:pPr>
-              <a:spcAft>
-                <a:spcPts val="600"/>
-              </a:spcAft>
-              <a:defRPr sz="1800" b="1">
-                <a:solidFill>
-                  <a:srgbClr val="0B2C4A"/>
-                </a:solidFill>
-              </a:defRPr>
-            </a:pPr>
-            <a:r>
+              <a:rPr dirty="0"/>
+              <a:t>Companion artifacts: Reflective_Synthesis_Paper.pdf  </a:t>
+            </a:r>
+            <a:r>
+              <a:rPr lang="en-US" dirty="0"/>
+              <a:t>·</a:t>
+            </a:r>
+            <a:r>
+              <a:rPr dirty="0"/>
+              <a:t>  architecture.png</a:t>
+            </a:r>
+          </a:p>
+          <a:p>
+            <a:pPr algn="ctr">
+              <a:defRPr sz="1400" i="1">
+                <a:solidFill>
+                  <a:srgbClr val="555555"/>
+                </a:solidFill>
+              </a:defRPr>
+            </a:pPr>
+            <a:r>
+              <a:rPr dirty="0"/>
               <a:t>Educational artifact only. Not for clinical use.</a:t>
             </a:r>
           </a:p>
@@ -8679,7 +8659,7 @@
         <p:spPr>
           <a:xfrm>
             <a:off x="548640" y="1097280"/>
-            <a:ext cx="11094415" cy="5029200"/>
+            <a:ext cx="11094415" cy="2754600"/>
           </a:xfrm>
           <a:prstGeom prst="rect">
             <a:avLst/>
@@ -8692,10 +8672,12 @@
           </a:bodyPr>
           <a:lstStyle/>
           <a:p>
-            <a:pPr>
+            <a:pPr marL="285750" indent="-285750">
               <a:spcAft>
                 <a:spcPts val="600"/>
               </a:spcAft>
+              <a:buFont typeface="Arial" panose="020B0604020202020204" pitchFamily="34" charset="0"/>
+              <a:buChar char="•"/>
               <a:defRPr sz="1800" b="1">
                 <a:solidFill>
                   <a:srgbClr val="0B2C4A"/>
@@ -8708,10 +8690,12 @@
             </a:r>
           </a:p>
           <a:p>
-            <a:pPr>
+            <a:pPr marL="285750" indent="-285750">
               <a:spcAft>
                 <a:spcPts val="600"/>
               </a:spcAft>
+              <a:buFont typeface="Arial" panose="020B0604020202020204" pitchFamily="34" charset="0"/>
+              <a:buChar char="•"/>
               <a:defRPr sz="1800" b="1">
                 <a:solidFill>
                   <a:srgbClr val="0B2C4A"/>
@@ -8724,10 +8708,12 @@
             </a:r>
           </a:p>
           <a:p>
-            <a:pPr>
+            <a:pPr marL="285750" indent="-285750">
               <a:spcAft>
                 <a:spcPts val="600"/>
               </a:spcAft>
+              <a:buFont typeface="Arial" panose="020B0604020202020204" pitchFamily="34" charset="0"/>
+              <a:buChar char="•"/>
               <a:defRPr sz="1800" b="1">
                 <a:solidFill>
                   <a:srgbClr val="0B2C4A"/>
@@ -8740,10 +8726,12 @@
             </a:r>
           </a:p>
           <a:p>
-            <a:pPr>
+            <a:pPr marL="285750" indent="-285750">
               <a:spcAft>
                 <a:spcPts val="600"/>
               </a:spcAft>
+              <a:buFont typeface="Arial" panose="020B0604020202020204" pitchFamily="34" charset="0"/>
+              <a:buChar char="•"/>
               <a:defRPr sz="1800" b="1">
                 <a:solidFill>
                   <a:srgbClr val="0B2C4A"/>
@@ -8756,10 +8744,12 @@
             </a:r>
           </a:p>
           <a:p>
-            <a:pPr>
+            <a:pPr marL="285750" indent="-285750">
               <a:spcAft>
                 <a:spcPts val="600"/>
               </a:spcAft>
+              <a:buFont typeface="Arial" panose="020B0604020202020204" pitchFamily="34" charset="0"/>
+              <a:buChar char="•"/>
               <a:defRPr sz="1800" b="1">
                 <a:solidFill>
                   <a:srgbClr val="0B2C4A"/>
@@ -8970,7 +8960,7 @@
         <p:spPr>
           <a:xfrm>
             <a:off x="548640" y="1097280"/>
-            <a:ext cx="11094415" cy="5029200"/>
+            <a:ext cx="11094415" cy="2062103"/>
           </a:xfrm>
           <a:prstGeom prst="rect">
             <a:avLst/>
@@ -8983,10 +8973,12 @@
           </a:bodyPr>
           <a:lstStyle/>
           <a:p>
-            <a:pPr>
+            <a:pPr marL="285750" indent="-285750">
               <a:spcAft>
                 <a:spcPts val="600"/>
               </a:spcAft>
+              <a:buFont typeface="Arial" panose="020B0604020202020204" pitchFamily="34" charset="0"/>
+              <a:buChar char="•"/>
               <a:defRPr sz="1800" b="1">
                 <a:solidFill>
                   <a:srgbClr val="0B2C4A"/>
@@ -8999,10 +8991,12 @@
             </a:r>
           </a:p>
           <a:p>
-            <a:pPr>
+            <a:pPr marL="285750" indent="-285750">
               <a:spcAft>
                 <a:spcPts val="600"/>
               </a:spcAft>
+              <a:buFont typeface="Arial" panose="020B0604020202020204" pitchFamily="34" charset="0"/>
+              <a:buChar char="•"/>
               <a:defRPr sz="1800" b="1">
                 <a:solidFill>
                   <a:srgbClr val="0B2C4A"/>
@@ -9023,10 +9017,12 @@
             </a:r>
           </a:p>
           <a:p>
-            <a:pPr>
+            <a:pPr marL="285750" indent="-285750">
               <a:spcAft>
                 <a:spcPts val="600"/>
               </a:spcAft>
+              <a:buFont typeface="Arial" panose="020B0604020202020204" pitchFamily="34" charset="0"/>
+              <a:buChar char="•"/>
               <a:defRPr sz="1800" b="1">
                 <a:solidFill>
                   <a:srgbClr val="0B2C4A"/>
@@ -9039,10 +9035,12 @@
             </a:r>
           </a:p>
           <a:p>
-            <a:pPr>
+            <a:pPr marL="285750" indent="-285750">
               <a:spcAft>
                 <a:spcPts val="600"/>
               </a:spcAft>
+              <a:buFont typeface="Arial" panose="020B0604020202020204" pitchFamily="34" charset="0"/>
+              <a:buChar char="•"/>
               <a:defRPr sz="1800" b="1">
                 <a:solidFill>
                   <a:srgbClr val="0B2C4A"/>
@@ -9055,10 +9053,12 @@
             </a:r>
           </a:p>
           <a:p>
-            <a:pPr>
+            <a:pPr marL="285750" indent="-285750">
               <a:spcAft>
                 <a:spcPts val="600"/>
               </a:spcAft>
+              <a:buFont typeface="Arial" panose="020B0604020202020204" pitchFamily="34" charset="0"/>
+              <a:buChar char="•"/>
               <a:defRPr sz="1800" b="1">
                 <a:solidFill>
                   <a:srgbClr val="0B2C4A"/>
@@ -9703,7 +9703,7 @@
         <p:spPr>
           <a:xfrm>
             <a:off x="548640" y="1097280"/>
-            <a:ext cx="11094415" cy="5029200"/>
+            <a:ext cx="11094415" cy="3370153"/>
           </a:xfrm>
           <a:prstGeom prst="rect">
             <a:avLst/>
@@ -9716,10 +9716,12 @@
           </a:bodyPr>
           <a:lstStyle/>
           <a:p>
-            <a:pPr>
+            <a:pPr marL="285750" indent="-285750">
               <a:spcAft>
                 <a:spcPts val="600"/>
               </a:spcAft>
+              <a:buFont typeface="Arial" panose="020B0604020202020204" pitchFamily="34" charset="0"/>
+              <a:buChar char="•"/>
               <a:defRPr sz="1800" b="1">
                 <a:solidFill>
                   <a:srgbClr val="0B2C4A"/>
@@ -9727,14 +9729,17 @@
               </a:defRPr>
             </a:pPr>
             <a:r>
+              <a:rPr dirty="0"/>
               <a:t>Two models (ML + DL) instead of one:</a:t>
             </a:r>
           </a:p>
           <a:p>
-            <a:pPr lvl="1">
+            <a:pPr marL="742950" lvl="1" indent="-285750">
               <a:spcAft>
                 <a:spcPts val="600"/>
               </a:spcAft>
+              <a:buFont typeface="Arial" panose="020B0604020202020204" pitchFamily="34" charset="0"/>
+              <a:buChar char="•"/>
               <a:defRPr sz="1600" b="0">
                 <a:solidFill>
                   <a:srgbClr val="555555"/>
@@ -9742,14 +9747,17 @@
               </a:defRPr>
             </a:pPr>
             <a:r>
+              <a:rPr dirty="0"/>
               <a:t>Headline ROC-AUC tie hides per-row disagreement → disagreement powers the low-confidence flag.</a:t>
             </a:r>
           </a:p>
           <a:p>
-            <a:pPr lvl="1">
+            <a:pPr marL="742950" lvl="1" indent="-285750">
               <a:spcAft>
                 <a:spcPts val="600"/>
               </a:spcAft>
+              <a:buFont typeface="Arial" panose="020B0604020202020204" pitchFamily="34" charset="0"/>
+              <a:buChar char="•"/>
               <a:defRPr sz="1600" b="0">
                 <a:solidFill>
                   <a:srgbClr val="555555"/>
@@ -9757,14 +9765,17 @@
               </a:defRPr>
             </a:pPr>
             <a:r>
+              <a:rPr dirty="0"/>
               <a:t>Cost: 2× training + inference. Benefit: structural confidence signal.</a:t>
             </a:r>
           </a:p>
           <a:p>
-            <a:pPr>
+            <a:pPr marL="285750" indent="-285750">
               <a:spcAft>
                 <a:spcPts val="600"/>
               </a:spcAft>
+              <a:buFont typeface="Arial" panose="020B0604020202020204" pitchFamily="34" charset="0"/>
+              <a:buChar char="•"/>
               <a:defRPr sz="1800" b="1">
                 <a:solidFill>
                   <a:srgbClr val="0B2C4A"/>
@@ -9772,14 +9783,17 @@
               </a:defRPr>
             </a:pPr>
             <a:r>
+              <a:rPr dirty="0"/>
               <a:t>RAG instead of fine-tuning:</a:t>
             </a:r>
           </a:p>
           <a:p>
-            <a:pPr lvl="1">
+            <a:pPr marL="742950" lvl="1" indent="-285750">
               <a:spcAft>
                 <a:spcPts val="600"/>
               </a:spcAft>
+              <a:buFont typeface="Arial" panose="020B0604020202020204" pitchFamily="34" charset="0"/>
+              <a:buChar char="•"/>
               <a:defRPr sz="1600" b="0">
                 <a:solidFill>
                   <a:srgbClr val="555555"/>
@@ -9787,14 +9801,17 @@
               </a:defRPr>
             </a:pPr>
             <a:r>
+              <a:rPr dirty="0"/>
               <a:t>Auditable, editable, revisable. Clinicians can patch a markdown file; fine-tuned weights cannot be cited.</a:t>
             </a:r>
           </a:p>
           <a:p>
-            <a:pPr lvl="1">
+            <a:pPr marL="742950" lvl="1" indent="-285750">
               <a:spcAft>
                 <a:spcPts val="600"/>
               </a:spcAft>
+              <a:buFont typeface="Arial" panose="020B0604020202020204" pitchFamily="34" charset="0"/>
+              <a:buChar char="•"/>
               <a:defRPr sz="1600" b="0">
                 <a:solidFill>
                   <a:srgbClr val="555555"/>
@@ -9802,14 +9819,17 @@
               </a:defRPr>
             </a:pPr>
             <a:r>
+              <a:rPr dirty="0"/>
               <a:t>Cost: retrieval latency + KB curation burden.</a:t>
             </a:r>
           </a:p>
           <a:p>
-            <a:pPr>
+            <a:pPr marL="285750" indent="-285750">
               <a:spcAft>
                 <a:spcPts val="600"/>
               </a:spcAft>
+              <a:buFont typeface="Arial" panose="020B0604020202020204" pitchFamily="34" charset="0"/>
+              <a:buChar char="•"/>
               <a:defRPr sz="1800" b="1">
                 <a:solidFill>
                   <a:srgbClr val="0B2C4A"/>
@@ -9817,14 +9837,17 @@
               </a:defRPr>
             </a:pPr>
             <a:r>
+              <a:rPr dirty="0"/>
               <a:t>Structural mitigations instead of prompt-only safety:</a:t>
             </a:r>
           </a:p>
           <a:p>
-            <a:pPr lvl="1">
+            <a:pPr marL="742950" lvl="1" indent="-285750">
               <a:spcAft>
                 <a:spcPts val="600"/>
               </a:spcAft>
+              <a:buFont typeface="Arial" panose="020B0604020202020204" pitchFamily="34" charset="0"/>
+              <a:buChar char="•"/>
               <a:defRPr sz="1600" b="0">
                 <a:solidFill>
                   <a:srgbClr val="555555"/>
@@ -9832,14 +9855,17 @@
               </a:defRPr>
             </a:pPr>
             <a:r>
+              <a:rPr dirty="0"/>
               <a:t>Refusal check before LLM, citation index verification, runtime revision cap.</a:t>
             </a:r>
           </a:p>
           <a:p>
-            <a:pPr lvl="1">
+            <a:pPr marL="742950" lvl="1" indent="-285750">
               <a:spcAft>
                 <a:spcPts val="600"/>
               </a:spcAft>
+              <a:buFont typeface="Arial" panose="020B0604020202020204" pitchFamily="34" charset="0"/>
+              <a:buChar char="•"/>
               <a:defRPr sz="1600" b="0">
                 <a:solidFill>
                   <a:srgbClr val="555555"/>
@@ -9847,14 +9873,17 @@
               </a:defRPr>
             </a:pPr>
             <a:r>
+              <a:rPr dirty="0"/>
               <a:t>Cost: more code surface. Benefit: survives adversarial inputs, is regulator-auditable.</a:t>
             </a:r>
           </a:p>
           <a:p>
-            <a:pPr>
+            <a:pPr marL="285750" indent="-285750">
               <a:spcAft>
                 <a:spcPts val="600"/>
               </a:spcAft>
+              <a:buFont typeface="Arial" panose="020B0604020202020204" pitchFamily="34" charset="0"/>
+              <a:buChar char="•"/>
               <a:defRPr sz="1800" b="1">
                 <a:solidFill>
                   <a:srgbClr val="0B2C4A"/>
@@ -9862,6 +9891,7 @@
               </a:defRPr>
             </a:pPr>
             <a:r>
+              <a:rPr dirty="0"/>
               <a:t>Bootstrap CIs + LR baseline added to evaluation → bands overlap with gradient boosting → not overselling.</a:t>
             </a:r>
           </a:p>
@@ -9982,7 +10012,7 @@
               </a:defRPr>
             </a:pPr>
             <a:r>
-              <a:t>Demo 1 — Happy Path</a:t>
+              <a:t>Demo 1 — High Risk, Self-Corrected</a:t>
             </a:r>
           </a:p>
           <a:p>
@@ -10008,7 +10038,7 @@
         <p:spPr>
           <a:xfrm>
             <a:off x="548640" y="1097280"/>
-            <a:ext cx="11094415" cy="5029200"/>
+            <a:ext cx="11094415" cy="2862322"/>
           </a:xfrm>
           <a:prstGeom prst="rect">
             <a:avLst/>
@@ -10021,78 +10051,125 @@
           </a:bodyPr>
           <a:lstStyle/>
           <a:p>
-            <a:pPr>
+            <a:pPr marL="285750" indent="-285750">
               <a:spcAft>
                 <a:spcPts val="600"/>
               </a:spcAft>
-              <a:defRPr sz="1800" b="1">
+              <a:buFont typeface="Arial" panose="020B0604020202020204" pitchFamily="34" charset="0"/>
+              <a:buChar char="•"/>
+              <a:defRPr sz="1600" b="1">
                 <a:solidFill>
                   <a:srgbClr val="0B2C4A"/>
                 </a:solidFill>
               </a:defRPr>
             </a:pPr>
             <a:r>
-              <a:t>High-risk patient, model agreement, evaluator passes after one bounded revision.</a:t>
-            </a:r>
-          </a:p>
-          <a:p>
-            <a:pPr>
+              <a:rPr dirty="0"/>
+              <a:t>High-risk patient (ensemble 0.800, tier = high); </a:t>
+            </a:r>
+            <a:r>
+              <a:rPr dirty="0" err="1"/>
+              <a:t>ml_prob</a:t>
+            </a:r>
+            <a:r>
+              <a:rPr dirty="0"/>
+              <a:t> 0.990 vs </a:t>
+            </a:r>
+            <a:r>
+              <a:rPr dirty="0" err="1"/>
+              <a:t>dl_prob</a:t>
+            </a:r>
+            <a:r>
+              <a:rPr dirty="0"/>
+              <a:t> 0.610 → |Δ| = 0.38 → confidence flag = LOW, human review recommended.</a:t>
+            </a:r>
+          </a:p>
+          <a:p>
+            <a:pPr marL="285750" indent="-285750">
               <a:spcAft>
                 <a:spcPts val="600"/>
               </a:spcAft>
-              <a:defRPr sz="1800" b="1">
+              <a:buFont typeface="Arial" panose="020B0604020202020204" pitchFamily="34" charset="0"/>
+              <a:buChar char="•"/>
+              <a:defRPr sz="1600" b="1">
                 <a:solidFill>
                   <a:srgbClr val="0B2C4A"/>
                 </a:solidFill>
               </a:defRPr>
             </a:pPr>
             <a:r>
-              <a:t>Explanation grounded in retrieved evidence chunks with [S?] citations.</a:t>
-            </a:r>
-          </a:p>
-          <a:p>
-            <a:pPr>
+              <a:rPr dirty="0"/>
+              <a:t>First draft contained an unsupported claim about peak exercise capacity (</a:t>
+            </a:r>
+            <a:r>
+              <a:rPr dirty="0" err="1"/>
+              <a:t>thalach</a:t>
+            </a:r>
+            <a:r>
+              <a:rPr dirty="0"/>
+              <a:t>) being above the age-predicted maximum — not grounded in any retrieved chunk.</a:t>
+            </a:r>
+          </a:p>
+          <a:p>
+            <a:pPr marL="285750" indent="-285750">
               <a:spcAft>
                 <a:spcPts val="600"/>
               </a:spcAft>
-              <a:defRPr sz="1800" b="1">
+              <a:buFont typeface="Arial" panose="020B0604020202020204" pitchFamily="34" charset="0"/>
+              <a:buChar char="•"/>
+              <a:defRPr sz="1600" b="1">
                 <a:solidFill>
                   <a:srgbClr val="0B2C4A"/>
                 </a:solidFill>
               </a:defRPr>
             </a:pPr>
             <a:r>
-              <a:t>Mandatory disclaimer present in final output.</a:t>
-            </a:r>
-          </a:p>
-          <a:p>
-            <a:pPr>
+              <a:rPr dirty="0"/>
+              <a:t>Evaluator (gpt-4o) caught it, scored 7/10, listed 3 issues, and issued revision instructions; explainer (gpt-4o-mini) produced a hedged, grounded rewrite in one bounded revision.</a:t>
+            </a:r>
+          </a:p>
+          <a:p>
+            <a:pPr marL="285750" indent="-285750">
               <a:spcAft>
                 <a:spcPts val="600"/>
               </a:spcAft>
-              <a:defRPr sz="1800" b="1">
+              <a:buFont typeface="Arial" panose="020B0604020202020204" pitchFamily="34" charset="0"/>
+              <a:buChar char="•"/>
+              <a:defRPr sz="1600" b="1">
                 <a:solidFill>
                   <a:srgbClr val="0B2C4A"/>
                 </a:solidFill>
               </a:defRPr>
             </a:pPr>
             <a:r>
-              <a:t>Evaluator runs on a different LLM snapshot (gpt-4o) than the explainer (gpt-4o-mini) — not rubber-stamping itself.</a:t>
-            </a:r>
-          </a:p>
-          <a:p>
-            <a:pPr>
+              <a:rPr dirty="0"/>
+              <a:t>Final explanation grounded in [S?] citations, mandatory disclaimer present, all events logged: request → score → </a:t>
+            </a:r>
+            <a:r>
+              <a:rPr dirty="0" err="1"/>
+              <a:t>rag_search</a:t>
+            </a:r>
+            <a:r>
+              <a:rPr dirty="0"/>
+              <a:t> → draft → evaluation → revision.</a:t>
+            </a:r>
+          </a:p>
+          <a:p>
+            <a:pPr marL="285750" indent="-285750">
               <a:spcAft>
                 <a:spcPts val="600"/>
               </a:spcAft>
-              <a:defRPr sz="1800" b="1">
+              <a:buFont typeface="Arial" panose="020B0604020202020204" pitchFamily="34" charset="0"/>
+              <a:buChar char="•"/>
+              <a:defRPr sz="1600" b="1">
                 <a:solidFill>
                   <a:srgbClr val="0B2C4A"/>
                 </a:solidFill>
               </a:defRPr>
             </a:pPr>
             <a:r>
-              <a:t>All five events logged: request → score → rag_search → draft → evaluation.</a:t>
+              <a:rPr dirty="0"/>
+              <a:t>Defense point: evaluator is a different LLM than the explainer — it is not rubber-stamping itself, and the revision cap prevents infinite loops.</a:t>
             </a:r>
           </a:p>
         </p:txBody>
@@ -10212,7 +10289,7 @@
               </a:defRPr>
             </a:pPr>
             <a:r>
-              <a:t>Demo 2 — Low Confidence</a:t>
+              <a:t>Demo 2 — Borderline Tier, Format Discipline</a:t>
             </a:r>
           </a:p>
           <a:p>
@@ -10238,7 +10315,7 @@
         <p:spPr>
           <a:xfrm>
             <a:off x="548640" y="1097280"/>
-            <a:ext cx="11094415" cy="5029200"/>
+            <a:ext cx="11094415" cy="2369880"/>
           </a:xfrm>
           <a:prstGeom prst="rect">
             <a:avLst/>
@@ -10251,78 +10328,109 @@
           </a:bodyPr>
           <a:lstStyle/>
           <a:p>
-            <a:pPr>
+            <a:pPr marL="285750" indent="-285750">
               <a:spcAft>
                 <a:spcPts val="600"/>
               </a:spcAft>
-              <a:defRPr sz="1800" b="1">
+              <a:buFont typeface="Arial" panose="020B0604020202020204" pitchFamily="34" charset="0"/>
+              <a:buChar char="•"/>
+              <a:defRPr sz="1600" b="1">
                 <a:solidFill>
                   <a:srgbClr val="0B2C4A"/>
                 </a:solidFill>
               </a:defRPr>
             </a:pPr>
             <a:r>
-              <a:t>ML probability ≈ 0.97  vs  DL probability ≈ 0.62  →  |Δ| &gt; 0.20.</a:t>
-            </a:r>
-          </a:p>
-          <a:p>
-            <a:pPr>
+              <a:rPr dirty="0"/>
+              <a:t>Borderline patient: </a:t>
+            </a:r>
+            <a:r>
+              <a:rPr dirty="0" err="1"/>
+              <a:t>ml_prob</a:t>
+            </a:r>
+            <a:r>
+              <a:rPr dirty="0"/>
+              <a:t> 0.825 vs </a:t>
+            </a:r>
+            <a:r>
+              <a:rPr dirty="0" err="1"/>
+              <a:t>dl_prob</a:t>
+            </a:r>
+            <a:r>
+              <a:rPr dirty="0"/>
+              <a:t> 0.336 → |Δ| = 0.49 → ensemble 0.581, tier = moderate, confidence = LOW.</a:t>
+            </a:r>
+          </a:p>
+          <a:p>
+            <a:pPr marL="285750" indent="-285750">
               <a:spcAft>
                 <a:spcPts val="600"/>
               </a:spcAft>
-              <a:defRPr sz="1800" b="1">
+              <a:buFont typeface="Arial" panose="020B0604020202020204" pitchFamily="34" charset="0"/>
+              <a:buChar char="•"/>
+              <a:defRPr sz="1600" b="1">
                 <a:solidFill>
                   <a:srgbClr val="0B2C4A"/>
                 </a:solidFill>
               </a:defRPr>
             </a:pPr>
             <a:r>
-              <a:t>Ensemble agreement gate flips confidence flag to LOW.</a:t>
-            </a:r>
-          </a:p>
-          <a:p>
-            <a:pPr>
+              <a:rPr dirty="0"/>
+              <a:t>System refuses to commit to a tier-as-decision; final text says 'unable to commit to a tier as a decision; human review recommended'.</a:t>
+            </a:r>
+          </a:p>
+          <a:p>
+            <a:pPr marL="285750" indent="-285750">
               <a:spcAft>
                 <a:spcPts val="600"/>
               </a:spcAft>
-              <a:defRPr sz="1800" b="1">
+              <a:buFont typeface="Arial" panose="020B0604020202020204" pitchFamily="34" charset="0"/>
+              <a:buChar char="•"/>
+              <a:defRPr sz="1600" b="1">
                 <a:solidFill>
                   <a:srgbClr val="0B2C4A"/>
                 </a:solidFill>
               </a:defRPr>
             </a:pPr>
             <a:r>
-              <a:t>First draft fails the evaluator on a real issue (unsupported claim about peak exercise capacity).</a:t>
-            </a:r>
-          </a:p>
-          <a:p>
-            <a:pPr>
+              <a:rPr dirty="0"/>
+              <a:t>First draft failed evaluator on format discipline, not clinical content: missing inline citations for some claims, and model scores not quoted verbatim.</a:t>
+            </a:r>
+          </a:p>
+          <a:p>
+            <a:pPr marL="285750" indent="-285750">
               <a:spcAft>
                 <a:spcPts val="600"/>
               </a:spcAft>
-              <a:defRPr sz="1800" b="1">
+              <a:buFont typeface="Arial" panose="020B0604020202020204" pitchFamily="34" charset="0"/>
+              <a:buChar char="•"/>
+              <a:defRPr sz="1600" b="1">
                 <a:solidFill>
                   <a:srgbClr val="0B2C4A"/>
                 </a:solidFill>
               </a:defRPr>
             </a:pPr>
             <a:r>
-              <a:t>One bounded revision (cap = 1) fixes it — system does not loop indefinitely.</a:t>
-            </a:r>
-          </a:p>
-          <a:p>
-            <a:pPr>
+              <a:rPr dirty="0"/>
+              <a:t>One bounded revision (cap = 1) fixes the format issues — the system does not loop indefinitely.</a:t>
+            </a:r>
+          </a:p>
+          <a:p>
+            <a:pPr marL="285750" indent="-285750">
               <a:spcAft>
                 <a:spcPts val="600"/>
               </a:spcAft>
-              <a:defRPr sz="1800" b="1">
+              <a:buFont typeface="Arial" panose="020B0604020202020204" pitchFamily="34" charset="0"/>
+              <a:buChar char="•"/>
+              <a:defRPr sz="1600" b="1">
                 <a:solidFill>
                   <a:srgbClr val="0B2C4A"/>
                 </a:solidFill>
               </a:defRPr>
             </a:pPr>
             <a:r>
-              <a:t>Key point: every safety check lives in code, not in the prompt.</a:t>
+              <a:rPr dirty="0"/>
+              <a:t>Key point: every safety check (disagreement gate, citation check, verbatim-score rule, revision cap) lives in code, not in the prompt.</a:t>
             </a:r>
           </a:p>
         </p:txBody>
@@ -10468,7 +10576,7 @@
         <p:spPr>
           <a:xfrm>
             <a:off x="548640" y="1097280"/>
-            <a:ext cx="11094415" cy="5029200"/>
+            <a:ext cx="11094415" cy="1785104"/>
           </a:xfrm>
           <a:prstGeom prst="rect">
             <a:avLst/>
@@ -10481,10 +10589,12 @@
           </a:bodyPr>
           <a:lstStyle/>
           <a:p>
-            <a:pPr>
+            <a:pPr marL="285750" indent="-285750">
               <a:spcAft>
                 <a:spcPts val="600"/>
               </a:spcAft>
+              <a:buFont typeface="Arial" panose="020B0604020202020204" pitchFamily="34" charset="0"/>
+              <a:buChar char="•"/>
               <a:defRPr sz="1800" b="1">
                 <a:solidFill>
                   <a:srgbClr val="0B2C4A"/>
@@ -10492,14 +10602,17 @@
               </a:defRPr>
             </a:pPr>
             <a:r>
+              <a:rPr dirty="0"/>
               <a:t>Request contains a banned phrase (e.g. 'prescribe', 'dosage').</a:t>
             </a:r>
           </a:p>
           <a:p>
-            <a:pPr>
+            <a:pPr marL="285750" indent="-285750">
               <a:spcAft>
                 <a:spcPts val="600"/>
               </a:spcAft>
+              <a:buFont typeface="Arial" panose="020B0604020202020204" pitchFamily="34" charset="0"/>
+              <a:buChar char="•"/>
               <a:defRPr sz="1800" b="1">
                 <a:solidFill>
                   <a:srgbClr val="0B2C4A"/>
@@ -10507,14 +10620,17 @@
               </a:defRPr>
             </a:pPr>
             <a:r>
+              <a:rPr dirty="0"/>
               <a:t>Transcript shows refused = True and exactly two events: request, refusal.</a:t>
             </a:r>
           </a:p>
           <a:p>
-            <a:pPr>
+            <a:pPr marL="285750" indent="-285750">
               <a:spcAft>
                 <a:spcPts val="600"/>
               </a:spcAft>
+              <a:buFont typeface="Arial" panose="020B0604020202020204" pitchFamily="34" charset="0"/>
+              <a:buChar char="•"/>
               <a:defRPr sz="1800" b="1">
                 <a:solidFill>
                   <a:srgbClr val="0B2C4A"/>
@@ -10522,14 +10638,17 @@
               </a:defRPr>
             </a:pPr>
             <a:r>
+              <a:rPr dirty="0"/>
               <a:t>No LLM call is made — the substring check in src/safeguards.py runs first.</a:t>
             </a:r>
           </a:p>
           <a:p>
-            <a:pPr>
+            <a:pPr marL="285750" indent="-285750">
               <a:spcAft>
                 <a:spcPts val="600"/>
               </a:spcAft>
+              <a:buFont typeface="Arial" panose="020B0604020202020204" pitchFamily="34" charset="0"/>
+              <a:buChar char="•"/>
               <a:defRPr sz="1800" b="1">
                 <a:solidFill>
                   <a:srgbClr val="0B2C4A"/>
@@ -10537,14 +10656,17 @@
               </a:defRPr>
             </a:pPr>
             <a:r>
+              <a:rPr dirty="0"/>
               <a:t>Property: the system cannot be talked out of refusing, because the LLM never sees the request.</a:t>
             </a:r>
           </a:p>
           <a:p>
-            <a:pPr>
+            <a:pPr marL="285750" indent="-285750">
               <a:spcAft>
                 <a:spcPts val="600"/>
               </a:spcAft>
+              <a:buFont typeface="Arial" panose="020B0604020202020204" pitchFamily="34" charset="0"/>
+              <a:buChar char="•"/>
               <a:defRPr sz="1800" b="1">
                 <a:solidFill>
                   <a:srgbClr val="0B2C4A"/>
@@ -10552,6 +10674,7 @@
               </a:defRPr>
             </a:pPr>
             <a:r>
+              <a:rPr dirty="0"/>
               <a:t>This is what makes the safety story auditable.</a:t>
             </a:r>
           </a:p>

--- a/defense doc/Defense_Deck.pptx
+++ b/defense doc/Defense_Deck.pptx
@@ -221,7 +221,7 @@
           <a:p>
             <a:fld id="{69738B64-6FBD-4769-A673-270CEAA06466}" type="datetimeFigureOut">
               <a:rPr lang="en-US" smtClean="0"/>
-              <a:t>5/25/2026</a:t>
+              <a:t>5/31/2026</a:t>
             </a:fld>
             <a:endParaRPr lang="en-US"/>
           </a:p>
@@ -4215,7 +4215,7 @@
           <a:p>
             <a:fld id="{5BCAD085-E8A6-8845-BD4E-CB4CCA059FC4}" type="datetimeFigureOut">
               <a:rPr lang="en-US" smtClean="0"/>
-              <a:t>5/25/2026</a:t>
+              <a:t>5/31/2026</a:t>
             </a:fld>
             <a:endParaRPr lang="en-US"/>
           </a:p>
@@ -4383,7 +4383,7 @@
           <a:p>
             <a:fld id="{5BCAD085-E8A6-8845-BD4E-CB4CCA059FC4}" type="datetimeFigureOut">
               <a:rPr lang="en-US" smtClean="0"/>
-              <a:t>5/25/2026</a:t>
+              <a:t>5/31/2026</a:t>
             </a:fld>
             <a:endParaRPr lang="en-US"/>
           </a:p>
@@ -4561,7 +4561,7 @@
           <a:p>
             <a:fld id="{5BCAD085-E8A6-8845-BD4E-CB4CCA059FC4}" type="datetimeFigureOut">
               <a:rPr lang="en-US" smtClean="0"/>
-              <a:t>5/25/2026</a:t>
+              <a:t>5/31/2026</a:t>
             </a:fld>
             <a:endParaRPr lang="en-US"/>
           </a:p>
@@ -4729,7 +4729,7 @@
           <a:p>
             <a:fld id="{5BCAD085-E8A6-8845-BD4E-CB4CCA059FC4}" type="datetimeFigureOut">
               <a:rPr lang="en-US" smtClean="0"/>
-              <a:t>5/25/2026</a:t>
+              <a:t>5/31/2026</a:t>
             </a:fld>
             <a:endParaRPr lang="en-US"/>
           </a:p>
@@ -4974,7 +4974,7 @@
           <a:p>
             <a:fld id="{5BCAD085-E8A6-8845-BD4E-CB4CCA059FC4}" type="datetimeFigureOut">
               <a:rPr lang="en-US" smtClean="0"/>
-              <a:t>5/25/2026</a:t>
+              <a:t>5/31/2026</a:t>
             </a:fld>
             <a:endParaRPr lang="en-US"/>
           </a:p>
@@ -5259,7 +5259,7 @@
           <a:p>
             <a:fld id="{5BCAD085-E8A6-8845-BD4E-CB4CCA059FC4}" type="datetimeFigureOut">
               <a:rPr lang="en-US" smtClean="0"/>
-              <a:t>5/25/2026</a:t>
+              <a:t>5/31/2026</a:t>
             </a:fld>
             <a:endParaRPr lang="en-US"/>
           </a:p>
@@ -5678,7 +5678,7 @@
           <a:p>
             <a:fld id="{5BCAD085-E8A6-8845-BD4E-CB4CCA059FC4}" type="datetimeFigureOut">
               <a:rPr lang="en-US" smtClean="0"/>
-              <a:t>5/25/2026</a:t>
+              <a:t>5/31/2026</a:t>
             </a:fld>
             <a:endParaRPr lang="en-US"/>
           </a:p>
@@ -5795,7 +5795,7 @@
           <a:p>
             <a:fld id="{5BCAD085-E8A6-8845-BD4E-CB4CCA059FC4}" type="datetimeFigureOut">
               <a:rPr lang="en-US" smtClean="0"/>
-              <a:t>5/25/2026</a:t>
+              <a:t>5/31/2026</a:t>
             </a:fld>
             <a:endParaRPr lang="en-US"/>
           </a:p>
@@ -5890,7 +5890,7 @@
           <a:p>
             <a:fld id="{5BCAD085-E8A6-8845-BD4E-CB4CCA059FC4}" type="datetimeFigureOut">
               <a:rPr lang="en-US" smtClean="0"/>
-              <a:t>5/25/2026</a:t>
+              <a:t>5/31/2026</a:t>
             </a:fld>
             <a:endParaRPr lang="en-US"/>
           </a:p>
@@ -6165,7 +6165,7 @@
           <a:p>
             <a:fld id="{5BCAD085-E8A6-8845-BD4E-CB4CCA059FC4}" type="datetimeFigureOut">
               <a:rPr lang="en-US" smtClean="0"/>
-              <a:t>5/25/2026</a:t>
+              <a:t>5/31/2026</a:t>
             </a:fld>
             <a:endParaRPr lang="en-US"/>
           </a:p>
@@ -6417,7 +6417,7 @@
           <a:p>
             <a:fld id="{5BCAD085-E8A6-8845-BD4E-CB4CCA059FC4}" type="datetimeFigureOut">
               <a:rPr lang="en-US" smtClean="0"/>
-              <a:t>5/25/2026</a:t>
+              <a:t>5/31/2026</a:t>
             </a:fld>
             <a:endParaRPr lang="en-US"/>
           </a:p>
@@ -6628,7 +6628,7 @@
           <a:p>
             <a:fld id="{5BCAD085-E8A6-8845-BD4E-CB4CCA059FC4}" type="datetimeFigureOut">
               <a:rPr lang="en-US" smtClean="0"/>
-              <a:t>5/25/2026</a:t>
+              <a:t>5/31/2026</a:t>
             </a:fld>
             <a:endParaRPr lang="en-US"/>
           </a:p>
@@ -7020,7 +7020,7 @@
         <p:spPr>
           <a:xfrm>
             <a:off x="731520" y="1828800"/>
-            <a:ext cx="10698480" cy="1828800"/>
+            <a:ext cx="10698480" cy="2308324"/>
           </a:xfrm>
           <a:prstGeom prst="rect">
             <a:avLst/>
@@ -7041,6 +7041,7 @@
               </a:defRPr>
             </a:pPr>
             <a:r>
+              <a:rPr dirty="0"/>
               <a:t>Clinical-Triage Explainer for Cardiovascular Risk</a:t>
             </a:r>
           </a:p>
@@ -7053,11 +7054,13 @@
               </a:defRPr>
             </a:pPr>
             <a:r>
-              <a:t>An integrated, auditable AI system — Project 7 → Project 8 defense</a:t>
-            </a:r>
-          </a:p>
-          <a:p>
-            <a:r>
+              <a:rPr dirty="0"/>
+              <a:t>An integrated, auditable AI system Project 8 defense</a:t>
+            </a:r>
+          </a:p>
+          <a:p>
+            <a:r>
+              <a:rPr dirty="0"/>
               <a:t> </a:t>
             </a:r>
           </a:p>
@@ -7070,6 +7073,7 @@
               </a:defRPr>
             </a:pPr>
             <a:r>
+              <a:rPr dirty="0"/>
               <a:t>Educational artifact only.  Not for clinical use.</a:t>
             </a:r>
           </a:p>
@@ -8806,15 +8810,7 @@
             </a:pPr>
             <a:r>
               <a:rPr dirty="0"/>
-              <a:t>Natural-language </a:t>
-            </a:r>
-            <a:r>
-              <a:rPr dirty="0" err="1"/>
-              <a:t>summarisation</a:t>
-            </a:r>
-            <a:r>
-              <a:rPr dirty="0"/>
-              <a:t> under structural constraints.</a:t>
+              <a:t>Natural-language summarization under structural constraints.</a:t>
             </a:r>
           </a:p>
         </p:txBody>

--- a/defense doc/Defense_Deck.pptx
+++ b/defense doc/Defense_Deck.pptx
@@ -3006,8 +3006,247 @@
                 <a:ea typeface="+mn-ea"/>
                 <a:cs typeface="+mn-cs"/>
               </a:rPr>
-              <a:t> the LLM — a prompt policy can be jailbroken; a hardcoded check before the model never gets a chance to be talked out of it. Tradeoffs I accept: substring refusal misses paraphrases, the evaluator is itself an LLM, and the KB is tiny."</a:t>
-            </a:r>
+              <a:t> the LLM — a prompt policy can be jailbroken; a hardcoded check before the model never gets a chance to be talked out of it. Tradeoffs I accept: substring refusal misses paraphrases, the evaluator is itself an LLM, and the KB is tiny.“</a:t>
+            </a:r>
+            <a:br>
+              <a:rPr lang="en-US" sz="1200" b="0" i="0" kern="1200" dirty="0">
+                <a:solidFill>
+                  <a:schemeClr val="tx1"/>
+                </a:solidFill>
+                <a:effectLst/>
+                <a:latin typeface="+mn-lt"/>
+                <a:ea typeface="+mn-ea"/>
+                <a:cs typeface="+mn-cs"/>
+              </a:rPr>
+            </a:br>
+            <a:endParaRPr lang="en-US" sz="1200" b="0" i="0" kern="1200" dirty="0">
+              <a:solidFill>
+                <a:schemeClr val="tx1"/>
+              </a:solidFill>
+              <a:effectLst/>
+              <a:latin typeface="+mn-lt"/>
+              <a:ea typeface="+mn-ea"/>
+              <a:cs typeface="+mn-cs"/>
+            </a:endParaRPr>
+          </a:p>
+          <a:p>
+            <a:r>
+              <a:rPr lang="en-US" sz="1200" b="0" i="0" kern="1200" dirty="0">
+                <a:solidFill>
+                  <a:schemeClr val="tx1"/>
+                </a:solidFill>
+                <a:effectLst/>
+                <a:latin typeface="+mn-lt"/>
+                <a:ea typeface="+mn-ea"/>
+                <a:cs typeface="+mn-cs"/>
+              </a:rPr>
+              <a:t>ROC-AUC stands for Receiver Operating Characteristic – Area Under the Curve.</a:t>
+            </a:r>
+            <a:br>
+              <a:rPr lang="en-US" sz="1200" b="0" i="0" kern="1200" dirty="0">
+                <a:solidFill>
+                  <a:schemeClr val="tx1"/>
+                </a:solidFill>
+                <a:effectLst/>
+                <a:latin typeface="+mn-lt"/>
+                <a:ea typeface="+mn-ea"/>
+                <a:cs typeface="+mn-cs"/>
+              </a:rPr>
+            </a:br>
+            <a:r>
+              <a:rPr lang="en-US" sz="1200" b="0" i="0" kern="1200" dirty="0">
+                <a:solidFill>
+                  <a:schemeClr val="tx1"/>
+                </a:solidFill>
+                <a:effectLst/>
+                <a:latin typeface="+mn-lt"/>
+                <a:ea typeface="+mn-ea"/>
+                <a:cs typeface="+mn-cs"/>
+              </a:rPr>
+              <a:t>ROC curve shows how a classifier performs across all thresholds by plotting:</a:t>
+            </a:r>
+          </a:p>
+          <a:p>
+            <a:pPr lvl="1"/>
+            <a:r>
+              <a:rPr lang="en-US" sz="1200" b="0" i="0" kern="1200" dirty="0">
+                <a:solidFill>
+                  <a:schemeClr val="tx1"/>
+                </a:solidFill>
+                <a:effectLst/>
+                <a:latin typeface="+mn-lt"/>
+                <a:ea typeface="+mn-ea"/>
+                <a:cs typeface="+mn-cs"/>
+              </a:rPr>
+              <a:t>True Positive Rate (sensitivity/recall) on the y-axis</a:t>
+            </a:r>
+          </a:p>
+          <a:p>
+            <a:pPr lvl="1"/>
+            <a:r>
+              <a:rPr lang="en-US" sz="1200" b="0" i="0" kern="1200" dirty="0">
+                <a:solidFill>
+                  <a:schemeClr val="tx1"/>
+                </a:solidFill>
+                <a:effectLst/>
+                <a:latin typeface="+mn-lt"/>
+                <a:ea typeface="+mn-ea"/>
+                <a:cs typeface="+mn-cs"/>
+              </a:rPr>
+              <a:t>False Positive Rate on the x-axis</a:t>
+            </a:r>
+          </a:p>
+          <a:p>
+            <a:r>
+              <a:rPr lang="en-US" sz="1200" b="0" i="0" kern="1200" dirty="0">
+                <a:solidFill>
+                  <a:schemeClr val="tx1"/>
+                </a:solidFill>
+                <a:effectLst/>
+                <a:latin typeface="+mn-lt"/>
+                <a:ea typeface="+mn-ea"/>
+                <a:cs typeface="+mn-cs"/>
+              </a:rPr>
+              <a:t>AUC is the area under that ROC curve, giving one summary score of separability.</a:t>
+            </a:r>
+          </a:p>
+          <a:p>
+            <a:r>
+              <a:rPr lang="en-US" sz="1200" b="0" i="0" kern="1200" dirty="0">
+                <a:solidFill>
+                  <a:schemeClr val="tx1"/>
+                </a:solidFill>
+                <a:effectLst/>
+                <a:latin typeface="+mn-lt"/>
+                <a:ea typeface="+mn-ea"/>
+                <a:cs typeface="+mn-cs"/>
+              </a:rPr>
+              <a:t>How to interpret AUC:</a:t>
+            </a:r>
+          </a:p>
+          <a:p>
+            <a:r>
+              <a:rPr lang="en-US" sz="1200" b="0" i="0" kern="1200" dirty="0">
+                <a:solidFill>
+                  <a:schemeClr val="tx1"/>
+                </a:solidFill>
+                <a:effectLst/>
+                <a:latin typeface="+mn-lt"/>
+                <a:ea typeface="+mn-ea"/>
+                <a:cs typeface="+mn-cs"/>
+              </a:rPr>
+              <a:t>0.5 means no discrimination (about random guessing).</a:t>
+            </a:r>
+          </a:p>
+          <a:p>
+            <a:r>
+              <a:rPr lang="en-US" sz="1200" b="0" i="0" kern="1200" dirty="0">
+                <a:solidFill>
+                  <a:schemeClr val="tx1"/>
+                </a:solidFill>
+                <a:effectLst/>
+                <a:latin typeface="+mn-lt"/>
+                <a:ea typeface="+mn-ea"/>
+                <a:cs typeface="+mn-cs"/>
+              </a:rPr>
+              <a:t>1.0 means perfect discrimination.</a:t>
+            </a:r>
+          </a:p>
+          <a:p>
+            <a:r>
+              <a:rPr lang="en-US" sz="1200" b="0" i="0" kern="1200" dirty="0">
+                <a:solidFill>
+                  <a:schemeClr val="tx1"/>
+                </a:solidFill>
+                <a:effectLst/>
+                <a:latin typeface="+mn-lt"/>
+                <a:ea typeface="+mn-ea"/>
+                <a:cs typeface="+mn-cs"/>
+              </a:rPr>
+              <a:t>Higher is better: the model is better at ranking positives above negatives.</a:t>
+            </a:r>
+          </a:p>
+          <a:p>
+            <a:endParaRPr lang="en-US" dirty="0"/>
+          </a:p>
+          <a:p>
+            <a:endParaRPr lang="en-US" dirty="0"/>
+          </a:p>
+          <a:p>
+            <a:r>
+              <a:rPr lang="en-US" sz="1200" b="0" i="0" kern="1200" dirty="0">
+                <a:solidFill>
+                  <a:schemeClr val="tx1"/>
+                </a:solidFill>
+                <a:effectLst/>
+                <a:latin typeface="+mn-lt"/>
+                <a:ea typeface="+mn-ea"/>
+                <a:cs typeface="+mn-cs"/>
+              </a:rPr>
+              <a:t>Bootstrap CIs = Bootstrap Confidence Intervals</a:t>
+            </a:r>
+            <a:br>
+              <a:rPr lang="en-US" sz="1200" b="0" i="0" kern="1200" dirty="0">
+                <a:solidFill>
+                  <a:schemeClr val="tx1"/>
+                </a:solidFill>
+                <a:effectLst/>
+                <a:latin typeface="+mn-lt"/>
+                <a:ea typeface="+mn-ea"/>
+                <a:cs typeface="+mn-cs"/>
+              </a:rPr>
+            </a:br>
+            <a:r>
+              <a:rPr lang="en-US" sz="1200" b="0" i="0" kern="1200" dirty="0">
+                <a:solidFill>
+                  <a:schemeClr val="tx1"/>
+                </a:solidFill>
+                <a:effectLst/>
+                <a:latin typeface="+mn-lt"/>
+                <a:ea typeface="+mn-ea"/>
+                <a:cs typeface="+mn-cs"/>
+              </a:rPr>
+              <a:t>This means the evaluation now reports uncertainty ranges (for metrics like accuracy, F1, ROC-AUC, etc.) using bootstrapping, not just single-point scores.</a:t>
+            </a:r>
+          </a:p>
+          <a:p>
+            <a:r>
+              <a:rPr lang="en-US" sz="1200" b="0" i="0" kern="1200" dirty="0">
+                <a:solidFill>
+                  <a:schemeClr val="tx1"/>
+                </a:solidFill>
+                <a:effectLst/>
+                <a:latin typeface="+mn-lt"/>
+                <a:ea typeface="+mn-ea"/>
+                <a:cs typeface="+mn-cs"/>
+              </a:rPr>
+              <a:t>LR baseline = Logistic Regression baseline</a:t>
+            </a:r>
+            <a:br>
+              <a:rPr lang="en-US" sz="1200" b="0" i="0" kern="1200" dirty="0">
+                <a:solidFill>
+                  <a:schemeClr val="tx1"/>
+                </a:solidFill>
+                <a:effectLst/>
+                <a:latin typeface="+mn-lt"/>
+                <a:ea typeface="+mn-ea"/>
+                <a:cs typeface="+mn-cs"/>
+              </a:rPr>
+            </a:br>
+            <a:r>
+              <a:rPr lang="en-US" sz="1200" b="0" i="0" kern="1200" dirty="0">
+                <a:solidFill>
+                  <a:schemeClr val="tx1"/>
+                </a:solidFill>
+                <a:effectLst/>
+                <a:latin typeface="+mn-lt"/>
+                <a:ea typeface="+mn-ea"/>
+                <a:cs typeface="+mn-cs"/>
+              </a:rPr>
+              <a:t>This means a Logistic Regression model was added as a simple reference model to compare against your main/advanced models.</a:t>
+            </a:r>
+          </a:p>
+          <a:p>
             <a:endParaRPr lang="en-US" dirty="0"/>
           </a:p>
         </p:txBody>
@@ -3161,460 +3400,2099 @@
         </p:nvSpPr>
         <p:spPr/>
       </p:sp>
-      <p:sp>
-        <p:nvSpPr>
-          <p:cNvPr id="3" name="Notes Placeholder 2"/>
-          <p:cNvSpPr>
-            <a:spLocks noGrp="1"/>
-          </p:cNvSpPr>
-          <p:nvPr>
-            <p:ph type="body" idx="1"/>
-          </p:nvPr>
-        </p:nvSpPr>
-        <p:spPr/>
-        <p:txBody>
-          <a:bodyPr/>
-          <a:lstStyle/>
-          <a:p>
-            <a:r>
-              <a:rPr lang="en-US" sz="1200" b="0" i="0" kern="1200" dirty="0">
-                <a:solidFill>
-                  <a:schemeClr val="tx1"/>
-                </a:solidFill>
-                <a:effectLst/>
-                <a:latin typeface="+mn-lt"/>
-                <a:ea typeface="+mn-ea"/>
-                <a:cs typeface="+mn-cs"/>
-              </a:rPr>
-              <a:t>"Headline numbers: ROC-AUC around 0.96, Brier around 0.087. But I'm reporting 95% bootstrap CIs alongside a plain logistic-regression baseline, and the bands overlap — so I am </a:t>
-            </a:r>
-            <a:r>
-              <a:rPr lang="en-US" sz="1200" b="0" i="1" kern="1200" dirty="0">
-                <a:solidFill>
-                  <a:schemeClr val="tx1"/>
-                </a:solidFill>
-                <a:effectLst/>
-                <a:latin typeface="+mn-lt"/>
-                <a:ea typeface="+mn-ea"/>
-                <a:cs typeface="+mn-cs"/>
-              </a:rPr>
-              <a:t>not</a:t>
-            </a:r>
-            <a:r>
-              <a:rPr lang="en-US" sz="1200" b="0" i="0" kern="1200" dirty="0">
-                <a:solidFill>
-                  <a:schemeClr val="tx1"/>
-                </a:solidFill>
-                <a:effectLst/>
-                <a:latin typeface="+mn-lt"/>
-                <a:ea typeface="+mn-ea"/>
-                <a:cs typeface="+mn-cs"/>
-              </a:rPr>
-              <a:t> overselling the gradient-boosting model. Honest limitations I name in the paper: the dataset is 303 rows, thirty years old, skewed male; calibration is fine on average but both models are most confident exactly when wrong on a handful of rows; the LLM is closed-weights so its </a:t>
-            </a:r>
-            <a:r>
-              <a:rPr lang="en-US" sz="1200" b="0" i="0" kern="1200" dirty="0" err="1">
-                <a:solidFill>
-                  <a:schemeClr val="tx1"/>
-                </a:solidFill>
-                <a:effectLst/>
-                <a:latin typeface="+mn-lt"/>
-                <a:ea typeface="+mn-ea"/>
-                <a:cs typeface="+mn-cs"/>
-              </a:rPr>
-              <a:t>behaviour</a:t>
-            </a:r>
-            <a:r>
-              <a:rPr lang="en-US" sz="1200" b="0" i="0" kern="1200" dirty="0">
-                <a:solidFill>
-                  <a:schemeClr val="tx1"/>
-                </a:solidFill>
-                <a:effectLst/>
-                <a:latin typeface="+mn-lt"/>
-                <a:ea typeface="+mn-ea"/>
-                <a:cs typeface="+mn-cs"/>
-              </a:rPr>
-              <a:t> can drift; the refusal list can be paraphrased past; and the knowledge base is synthetic. None of those are surprises — they're documented up front.“</a:t>
-            </a:r>
-          </a:p>
-          <a:p>
-            <a:r>
-              <a:rPr lang="en-US" sz="1200" b="1" i="0" kern="1200" dirty="0">
-                <a:solidFill>
-                  <a:schemeClr val="tx1"/>
-                </a:solidFill>
-                <a:effectLst/>
-                <a:latin typeface="+mn-lt"/>
-                <a:ea typeface="+mn-ea"/>
-                <a:cs typeface="+mn-cs"/>
-              </a:rPr>
-              <a:t>ROC-AUC</a:t>
-            </a:r>
-            <a:r>
-              <a:rPr lang="en-US" sz="1200" b="0" i="0" kern="1200" dirty="0">
-                <a:solidFill>
-                  <a:schemeClr val="tx1"/>
-                </a:solidFill>
-                <a:effectLst/>
-                <a:latin typeface="+mn-lt"/>
-                <a:ea typeface="+mn-ea"/>
-                <a:cs typeface="+mn-cs"/>
-              </a:rPr>
-              <a:t> = </a:t>
-            </a:r>
-            <a:r>
-              <a:rPr lang="en-US" sz="1200" b="1" i="0" kern="1200" dirty="0">
-                <a:solidFill>
-                  <a:schemeClr val="tx1"/>
-                </a:solidFill>
-                <a:effectLst/>
-                <a:latin typeface="+mn-lt"/>
-                <a:ea typeface="+mn-ea"/>
-                <a:cs typeface="+mn-cs"/>
-              </a:rPr>
-              <a:t>Area Under the Receiver Operating Characteristic Curve</a:t>
-            </a:r>
-          </a:p>
-          <a:p>
-            <a:endParaRPr lang="en-US" sz="1200" b="1" i="0" kern="1200" dirty="0">
-              <a:solidFill>
-                <a:schemeClr val="tx1"/>
-              </a:solidFill>
-              <a:effectLst/>
-              <a:latin typeface="+mn-lt"/>
-              <a:ea typeface="+mn-ea"/>
-              <a:cs typeface="+mn-cs"/>
-            </a:endParaRPr>
-          </a:p>
-          <a:p>
-            <a:r>
-              <a:rPr lang="en-US" sz="1200" b="1" i="0" kern="1200" dirty="0">
-                <a:solidFill>
-                  <a:schemeClr val="tx1"/>
-                </a:solidFill>
-                <a:effectLst/>
-                <a:latin typeface="+mn-lt"/>
-                <a:ea typeface="+mn-ea"/>
-                <a:cs typeface="+mn-cs"/>
-              </a:rPr>
-              <a:t>How to read the number</a:t>
-            </a:r>
-          </a:p>
-          <a:p>
-            <a:r>
-              <a:rPr lang="en-US" sz="1200" b="0" i="0" kern="1200" dirty="0" err="1">
-                <a:solidFill>
-                  <a:schemeClr val="tx1"/>
-                </a:solidFill>
-                <a:effectLst/>
-                <a:latin typeface="+mn-lt"/>
-                <a:ea typeface="+mn-ea"/>
-                <a:cs typeface="+mn-cs"/>
-              </a:rPr>
-              <a:t>AUCMeaning</a:t>
-            </a:r>
-            <a:endParaRPr lang="en-US" sz="1200" b="0" i="0" kern="1200" dirty="0">
-              <a:solidFill>
-                <a:schemeClr val="tx1"/>
-              </a:solidFill>
-              <a:effectLst/>
-              <a:latin typeface="+mn-lt"/>
-              <a:ea typeface="+mn-ea"/>
-              <a:cs typeface="+mn-cs"/>
-            </a:endParaRPr>
-          </a:p>
-          <a:p>
-            <a:r>
-              <a:rPr lang="en-US" sz="1200" b="1" i="0" kern="1200" dirty="0">
-                <a:solidFill>
-                  <a:schemeClr val="tx1"/>
-                </a:solidFill>
-                <a:effectLst/>
-                <a:latin typeface="+mn-lt"/>
-                <a:ea typeface="+mn-ea"/>
-                <a:cs typeface="+mn-cs"/>
-              </a:rPr>
-              <a:t>1.0        </a:t>
-            </a:r>
-            <a:r>
-              <a:rPr lang="en-US" sz="1200" b="0" i="0" kern="1200" dirty="0">
-                <a:solidFill>
-                  <a:schemeClr val="tx1"/>
-                </a:solidFill>
-                <a:effectLst/>
-                <a:latin typeface="+mn-lt"/>
-                <a:ea typeface="+mn-ea"/>
-                <a:cs typeface="+mn-cs"/>
-              </a:rPr>
-              <a:t>Perfect — model ranks every positive above every negative.</a:t>
-            </a:r>
-          </a:p>
-          <a:p>
-            <a:r>
-              <a:rPr lang="en-US" sz="1200" b="1" i="0" kern="1200" dirty="0">
-                <a:solidFill>
-                  <a:schemeClr val="tx1"/>
-                </a:solidFill>
-                <a:effectLst/>
-                <a:latin typeface="+mn-lt"/>
-                <a:ea typeface="+mn-ea"/>
-                <a:cs typeface="+mn-cs"/>
-              </a:rPr>
-              <a:t>0.9–1.0 </a:t>
-            </a:r>
-            <a:r>
-              <a:rPr lang="en-US" sz="1200" b="0" i="0" kern="1200" dirty="0">
-                <a:solidFill>
-                  <a:schemeClr val="tx1"/>
-                </a:solidFill>
-                <a:effectLst/>
-                <a:latin typeface="+mn-lt"/>
-                <a:ea typeface="+mn-ea"/>
-                <a:cs typeface="+mn-cs"/>
-              </a:rPr>
-              <a:t>Excellent separation.</a:t>
-            </a:r>
-          </a:p>
-          <a:p>
-            <a:r>
-              <a:rPr lang="en-US" sz="1200" b="1" i="0" kern="1200" dirty="0">
-                <a:solidFill>
-                  <a:schemeClr val="tx1"/>
-                </a:solidFill>
-                <a:effectLst/>
-                <a:latin typeface="+mn-lt"/>
-                <a:ea typeface="+mn-ea"/>
-                <a:cs typeface="+mn-cs"/>
-              </a:rPr>
-              <a:t>0.8–0.9 </a:t>
-            </a:r>
-            <a:r>
-              <a:rPr lang="en-US" sz="1200" b="0" i="0" kern="1200" dirty="0">
-                <a:solidFill>
-                  <a:schemeClr val="tx1"/>
-                </a:solidFill>
-                <a:effectLst/>
-                <a:latin typeface="+mn-lt"/>
-                <a:ea typeface="+mn-ea"/>
-                <a:cs typeface="+mn-cs"/>
-              </a:rPr>
-              <a:t>Good.</a:t>
-            </a:r>
-          </a:p>
-          <a:p>
-            <a:r>
-              <a:rPr lang="en-US" sz="1200" b="1" i="0" kern="1200" dirty="0">
-                <a:solidFill>
-                  <a:schemeClr val="tx1"/>
-                </a:solidFill>
-                <a:effectLst/>
-                <a:latin typeface="+mn-lt"/>
-                <a:ea typeface="+mn-ea"/>
-                <a:cs typeface="+mn-cs"/>
-              </a:rPr>
-              <a:t>0.7–0.8 </a:t>
-            </a:r>
-            <a:r>
-              <a:rPr lang="en-US" sz="1200" b="0" i="0" kern="1200" dirty="0">
-                <a:solidFill>
-                  <a:schemeClr val="tx1"/>
-                </a:solidFill>
-                <a:effectLst/>
-                <a:latin typeface="+mn-lt"/>
-                <a:ea typeface="+mn-ea"/>
-                <a:cs typeface="+mn-cs"/>
-              </a:rPr>
-              <a:t>Fair.</a:t>
-            </a:r>
-          </a:p>
-          <a:p>
-            <a:r>
-              <a:rPr lang="en-US" sz="1200" b="1" i="0" kern="1200" dirty="0">
-                <a:solidFill>
-                  <a:schemeClr val="tx1"/>
-                </a:solidFill>
-                <a:effectLst/>
-                <a:latin typeface="+mn-lt"/>
-                <a:ea typeface="+mn-ea"/>
-                <a:cs typeface="+mn-cs"/>
-              </a:rPr>
-              <a:t>0.5        </a:t>
-            </a:r>
-            <a:r>
-              <a:rPr lang="en-US" sz="1200" b="0" i="0" kern="1200" dirty="0">
-                <a:solidFill>
-                  <a:schemeClr val="tx1"/>
-                </a:solidFill>
-                <a:effectLst/>
-                <a:latin typeface="+mn-lt"/>
-                <a:ea typeface="+mn-ea"/>
-                <a:cs typeface="+mn-cs"/>
-              </a:rPr>
-              <a:t>No better than random coin-flip.</a:t>
-            </a:r>
-          </a:p>
-          <a:p>
-            <a:r>
-              <a:rPr lang="en-US" sz="1200" b="1" i="0" kern="1200" dirty="0">
-                <a:solidFill>
-                  <a:schemeClr val="tx1"/>
-                </a:solidFill>
-                <a:effectLst/>
-                <a:latin typeface="+mn-lt"/>
-                <a:ea typeface="+mn-ea"/>
-                <a:cs typeface="+mn-cs"/>
-              </a:rPr>
-              <a:t>&lt; 0.5     </a:t>
-            </a:r>
-            <a:r>
-              <a:rPr lang="en-US" sz="1200" b="0" i="0" kern="1200" dirty="0">
-                <a:solidFill>
-                  <a:schemeClr val="tx1"/>
-                </a:solidFill>
-                <a:effectLst/>
-                <a:latin typeface="+mn-lt"/>
-                <a:ea typeface="+mn-ea"/>
-                <a:cs typeface="+mn-cs"/>
-              </a:rPr>
-              <a:t>Worse than random (you could invert predictions and do better).</a:t>
-            </a:r>
-          </a:p>
-          <a:p>
-            <a:endParaRPr lang="en-US" sz="1200" b="0" i="0" kern="1200" dirty="0">
-              <a:solidFill>
-                <a:schemeClr val="tx1"/>
-              </a:solidFill>
-              <a:effectLst/>
-              <a:latin typeface="+mn-lt"/>
-              <a:ea typeface="+mn-ea"/>
-              <a:cs typeface="+mn-cs"/>
-            </a:endParaRPr>
-          </a:p>
-          <a:p>
-            <a:r>
-              <a:rPr lang="en-US" sz="1200" b="1" i="0" kern="1200" dirty="0">
-                <a:solidFill>
-                  <a:schemeClr val="tx1"/>
-                </a:solidFill>
-                <a:effectLst/>
-                <a:latin typeface="+mn-lt"/>
-                <a:ea typeface="+mn-ea"/>
-                <a:cs typeface="+mn-cs"/>
-              </a:rPr>
-              <a:t>AUC = the probability that the model assigns a higher risk score to a randomly chosen </a:t>
-            </a:r>
-            <a:r>
-              <a:rPr lang="en-US" sz="1200" b="1" i="1" kern="1200" dirty="0">
-                <a:solidFill>
-                  <a:schemeClr val="tx1"/>
-                </a:solidFill>
-                <a:effectLst/>
-                <a:latin typeface="+mn-lt"/>
-                <a:ea typeface="+mn-ea"/>
-                <a:cs typeface="+mn-cs"/>
-              </a:rPr>
-              <a:t>positive</a:t>
-            </a:r>
-            <a:r>
-              <a:rPr lang="en-US" sz="1200" b="1" i="0" kern="1200" dirty="0">
-                <a:solidFill>
-                  <a:schemeClr val="tx1"/>
-                </a:solidFill>
-                <a:effectLst/>
-                <a:latin typeface="+mn-lt"/>
-                <a:ea typeface="+mn-ea"/>
-                <a:cs typeface="+mn-cs"/>
-              </a:rPr>
-              <a:t> patient than to a randomly chosen </a:t>
-            </a:r>
-            <a:r>
-              <a:rPr lang="en-US" sz="1200" b="1" i="1" kern="1200" dirty="0">
-                <a:solidFill>
-                  <a:schemeClr val="tx1"/>
-                </a:solidFill>
-                <a:effectLst/>
-                <a:latin typeface="+mn-lt"/>
-                <a:ea typeface="+mn-ea"/>
-                <a:cs typeface="+mn-cs"/>
-              </a:rPr>
-              <a:t>negative</a:t>
-            </a:r>
-            <a:r>
-              <a:rPr lang="en-US" sz="1200" b="1" i="0" kern="1200" dirty="0">
-                <a:solidFill>
-                  <a:schemeClr val="tx1"/>
-                </a:solidFill>
-                <a:effectLst/>
-                <a:latin typeface="+mn-lt"/>
-                <a:ea typeface="+mn-ea"/>
-                <a:cs typeface="+mn-cs"/>
-              </a:rPr>
-              <a:t> patient.</a:t>
-            </a:r>
-            <a:endParaRPr lang="en-US" sz="1200" b="0" i="0" kern="1200" dirty="0">
-              <a:solidFill>
-                <a:schemeClr val="tx1"/>
-              </a:solidFill>
-              <a:effectLst/>
-              <a:latin typeface="+mn-lt"/>
-              <a:ea typeface="+mn-ea"/>
-              <a:cs typeface="+mn-cs"/>
-            </a:endParaRPr>
-          </a:p>
-          <a:p>
-            <a:r>
-              <a:rPr lang="en-US" sz="1200" b="0" i="0" kern="1200" dirty="0">
-                <a:solidFill>
-                  <a:schemeClr val="tx1"/>
-                </a:solidFill>
-                <a:effectLst/>
-                <a:latin typeface="+mn-lt"/>
-                <a:ea typeface="+mn-ea"/>
-                <a:cs typeface="+mn-cs"/>
-              </a:rPr>
-              <a:t>So your project's </a:t>
-            </a:r>
-            <a:r>
-              <a:rPr lang="en-US" sz="1200" b="1" i="0" kern="1200" dirty="0">
-                <a:solidFill>
-                  <a:schemeClr val="tx1"/>
-                </a:solidFill>
-                <a:effectLst/>
-                <a:latin typeface="+mn-lt"/>
-                <a:ea typeface="+mn-ea"/>
-                <a:cs typeface="+mn-cs"/>
-              </a:rPr>
-              <a:t>AUC ≈ 0.96</a:t>
-            </a:r>
-            <a:r>
-              <a:rPr lang="en-US" sz="1200" b="0" i="0" kern="1200" dirty="0">
-                <a:solidFill>
-                  <a:schemeClr val="tx1"/>
-                </a:solidFill>
-                <a:effectLst/>
-                <a:latin typeface="+mn-lt"/>
-                <a:ea typeface="+mn-ea"/>
-                <a:cs typeface="+mn-cs"/>
-              </a:rPr>
-              <a:t> (slide 10) means: pick any sick patient and any healthy patient at random — the model ranks the sick one higher about 96% of the time.</a:t>
-            </a:r>
-          </a:p>
-          <a:p>
-            <a:endParaRPr lang="en-US" sz="1200" b="0" i="0" kern="1200" dirty="0">
-              <a:solidFill>
-                <a:schemeClr val="tx1"/>
-              </a:solidFill>
-              <a:effectLst/>
-              <a:latin typeface="+mn-lt"/>
-              <a:ea typeface="+mn-ea"/>
-              <a:cs typeface="+mn-cs"/>
-            </a:endParaRPr>
-          </a:p>
-          <a:p>
-            <a:endParaRPr lang="en-US" dirty="0"/>
-          </a:p>
-        </p:txBody>
-      </p:sp>
+      <mc:AlternateContent xmlns:mc="http://schemas.openxmlformats.org/markup-compatibility/2006">
+        <mc:Choice xmlns:a14="http://schemas.microsoft.com/office/drawing/2010/main" Requires="a14">
+          <p:sp>
+            <p:nvSpPr>
+              <p:cNvPr id="3" name="Notes Placeholder 2"/>
+              <p:cNvSpPr>
+                <a:spLocks noGrp="1"/>
+              </p:cNvSpPr>
+              <p:nvPr>
+                <p:ph type="body" idx="1"/>
+              </p:nvPr>
+            </p:nvSpPr>
+            <p:spPr/>
+            <p:txBody>
+              <a:bodyPr/>
+              <a:lstStyle/>
+              <a:p>
+                <a:r>
+                  <a:rPr lang="en-US" sz="1200" b="0" i="0" kern="1200" dirty="0">
+                    <a:solidFill>
+                      <a:schemeClr val="tx1"/>
+                    </a:solidFill>
+                    <a:effectLst/>
+                    <a:latin typeface="+mn-lt"/>
+                    <a:ea typeface="+mn-ea"/>
+                    <a:cs typeface="+mn-cs"/>
+                  </a:rPr>
+                  <a:t>"Headline numbers: ROC-AUC around 0.96, Brier around 0.087. But I'm reporting 95% bootstrap CIs alongside a plain logistic-regression baseline, and the bands overlap — so I am </a:t>
+                </a:r>
+                <a:r>
+                  <a:rPr lang="en-US" sz="1200" b="0" i="1" kern="1200" dirty="0">
+                    <a:solidFill>
+                      <a:schemeClr val="tx1"/>
+                    </a:solidFill>
+                    <a:effectLst/>
+                    <a:latin typeface="+mn-lt"/>
+                    <a:ea typeface="+mn-ea"/>
+                    <a:cs typeface="+mn-cs"/>
+                  </a:rPr>
+                  <a:t>not</a:t>
+                </a:r>
+                <a:r>
+                  <a:rPr lang="en-US" sz="1200" b="0" i="0" kern="1200" dirty="0">
+                    <a:solidFill>
+                      <a:schemeClr val="tx1"/>
+                    </a:solidFill>
+                    <a:effectLst/>
+                    <a:latin typeface="+mn-lt"/>
+                    <a:ea typeface="+mn-ea"/>
+                    <a:cs typeface="+mn-cs"/>
+                  </a:rPr>
+                  <a:t> overselling the gradient-boosting model. Honest limitations I name in the paper: the dataset is 303 rows, thirty years old, skewed male; calibration is fine on average but both models are most confident exactly when wrong on a handful of rows; the LLM is closed-weights so its </a:t>
+                </a:r>
+                <a:r>
+                  <a:rPr lang="en-US" sz="1200" b="0" i="0" kern="1200" dirty="0" err="1">
+                    <a:solidFill>
+                      <a:schemeClr val="tx1"/>
+                    </a:solidFill>
+                    <a:effectLst/>
+                    <a:latin typeface="+mn-lt"/>
+                    <a:ea typeface="+mn-ea"/>
+                    <a:cs typeface="+mn-cs"/>
+                  </a:rPr>
+                  <a:t>behaviour</a:t>
+                </a:r>
+                <a:r>
+                  <a:rPr lang="en-US" sz="1200" b="0" i="0" kern="1200" dirty="0">
+                    <a:solidFill>
+                      <a:schemeClr val="tx1"/>
+                    </a:solidFill>
+                    <a:effectLst/>
+                    <a:latin typeface="+mn-lt"/>
+                    <a:ea typeface="+mn-ea"/>
+                    <a:cs typeface="+mn-cs"/>
+                  </a:rPr>
+                  <a:t> can drift; the refusal list can be paraphrased past; and the knowledge base is synthetic. None of those are surprises — they're documented up front.“</a:t>
+                </a:r>
+              </a:p>
+              <a:p>
+                <a:r>
+                  <a:rPr lang="en-US" sz="1200" b="1" i="0" kern="1200" dirty="0">
+                    <a:solidFill>
+                      <a:schemeClr val="tx1"/>
+                    </a:solidFill>
+                    <a:effectLst/>
+                    <a:latin typeface="+mn-lt"/>
+                    <a:ea typeface="+mn-ea"/>
+                    <a:cs typeface="+mn-cs"/>
+                  </a:rPr>
+                  <a:t>ROC-AUC</a:t>
+                </a:r>
+                <a:r>
+                  <a:rPr lang="en-US" sz="1200" b="0" i="0" kern="1200" dirty="0">
+                    <a:solidFill>
+                      <a:schemeClr val="tx1"/>
+                    </a:solidFill>
+                    <a:effectLst/>
+                    <a:latin typeface="+mn-lt"/>
+                    <a:ea typeface="+mn-ea"/>
+                    <a:cs typeface="+mn-cs"/>
+                  </a:rPr>
+                  <a:t> = </a:t>
+                </a:r>
+                <a:r>
+                  <a:rPr lang="en-US" sz="1200" b="1" i="0" kern="1200" dirty="0">
+                    <a:solidFill>
+                      <a:schemeClr val="tx1"/>
+                    </a:solidFill>
+                    <a:effectLst/>
+                    <a:latin typeface="+mn-lt"/>
+                    <a:ea typeface="+mn-ea"/>
+                    <a:cs typeface="+mn-cs"/>
+                  </a:rPr>
+                  <a:t>Area Under the Receiver Operating Characteristic Curve</a:t>
+                </a:r>
+              </a:p>
+              <a:p>
+                <a:endParaRPr lang="en-US" sz="1200" b="1" i="0" kern="1200" dirty="0">
+                  <a:solidFill>
+                    <a:schemeClr val="tx1"/>
+                  </a:solidFill>
+                  <a:effectLst/>
+                  <a:latin typeface="+mn-lt"/>
+                  <a:ea typeface="+mn-ea"/>
+                  <a:cs typeface="+mn-cs"/>
+                </a:endParaRPr>
+              </a:p>
+              <a:p>
+                <a:r>
+                  <a:rPr lang="en-US" sz="1200" b="1" i="0" kern="1200" dirty="0">
+                    <a:solidFill>
+                      <a:schemeClr val="tx1"/>
+                    </a:solidFill>
+                    <a:effectLst/>
+                    <a:latin typeface="+mn-lt"/>
+                    <a:ea typeface="+mn-ea"/>
+                    <a:cs typeface="+mn-cs"/>
+                  </a:rPr>
+                  <a:t>How to read the number</a:t>
+                </a:r>
+              </a:p>
+              <a:p>
+                <a:r>
+                  <a:rPr lang="en-US" sz="1200" b="0" i="0" kern="1200" dirty="0" err="1">
+                    <a:solidFill>
+                      <a:schemeClr val="tx1"/>
+                    </a:solidFill>
+                    <a:effectLst/>
+                    <a:latin typeface="+mn-lt"/>
+                    <a:ea typeface="+mn-ea"/>
+                    <a:cs typeface="+mn-cs"/>
+                  </a:rPr>
+                  <a:t>AUCMeaning</a:t>
+                </a:r>
+                <a:endParaRPr lang="en-US" sz="1200" b="0" i="0" kern="1200" dirty="0">
+                  <a:solidFill>
+                    <a:schemeClr val="tx1"/>
+                  </a:solidFill>
+                  <a:effectLst/>
+                  <a:latin typeface="+mn-lt"/>
+                  <a:ea typeface="+mn-ea"/>
+                  <a:cs typeface="+mn-cs"/>
+                </a:endParaRPr>
+              </a:p>
+              <a:p>
+                <a:r>
+                  <a:rPr lang="en-US" sz="1200" b="1" i="0" kern="1200" dirty="0">
+                    <a:solidFill>
+                      <a:schemeClr val="tx1"/>
+                    </a:solidFill>
+                    <a:effectLst/>
+                    <a:latin typeface="+mn-lt"/>
+                    <a:ea typeface="+mn-ea"/>
+                    <a:cs typeface="+mn-cs"/>
+                  </a:rPr>
+                  <a:t>1.0        </a:t>
+                </a:r>
+                <a:r>
+                  <a:rPr lang="en-US" sz="1200" b="0" i="0" kern="1200" dirty="0">
+                    <a:solidFill>
+                      <a:schemeClr val="tx1"/>
+                    </a:solidFill>
+                    <a:effectLst/>
+                    <a:latin typeface="+mn-lt"/>
+                    <a:ea typeface="+mn-ea"/>
+                    <a:cs typeface="+mn-cs"/>
+                  </a:rPr>
+                  <a:t>Perfect — model ranks every positive above every negative.</a:t>
+                </a:r>
+              </a:p>
+              <a:p>
+                <a:r>
+                  <a:rPr lang="en-US" sz="1200" b="1" i="0" kern="1200" dirty="0">
+                    <a:solidFill>
+                      <a:schemeClr val="tx1"/>
+                    </a:solidFill>
+                    <a:effectLst/>
+                    <a:latin typeface="+mn-lt"/>
+                    <a:ea typeface="+mn-ea"/>
+                    <a:cs typeface="+mn-cs"/>
+                  </a:rPr>
+                  <a:t>0.9–1.0 </a:t>
+                </a:r>
+                <a:r>
+                  <a:rPr lang="en-US" sz="1200" b="0" i="0" kern="1200" dirty="0">
+                    <a:solidFill>
+                      <a:schemeClr val="tx1"/>
+                    </a:solidFill>
+                    <a:effectLst/>
+                    <a:latin typeface="+mn-lt"/>
+                    <a:ea typeface="+mn-ea"/>
+                    <a:cs typeface="+mn-cs"/>
+                  </a:rPr>
+                  <a:t>Excellent separation.</a:t>
+                </a:r>
+              </a:p>
+              <a:p>
+                <a:r>
+                  <a:rPr lang="en-US" sz="1200" b="1" i="0" kern="1200" dirty="0">
+                    <a:solidFill>
+                      <a:schemeClr val="tx1"/>
+                    </a:solidFill>
+                    <a:effectLst/>
+                    <a:latin typeface="+mn-lt"/>
+                    <a:ea typeface="+mn-ea"/>
+                    <a:cs typeface="+mn-cs"/>
+                  </a:rPr>
+                  <a:t>0.8–0.9 </a:t>
+                </a:r>
+                <a:r>
+                  <a:rPr lang="en-US" sz="1200" b="0" i="0" kern="1200" dirty="0">
+                    <a:solidFill>
+                      <a:schemeClr val="tx1"/>
+                    </a:solidFill>
+                    <a:effectLst/>
+                    <a:latin typeface="+mn-lt"/>
+                    <a:ea typeface="+mn-ea"/>
+                    <a:cs typeface="+mn-cs"/>
+                  </a:rPr>
+                  <a:t>Good.</a:t>
+                </a:r>
+              </a:p>
+              <a:p>
+                <a:r>
+                  <a:rPr lang="en-US" sz="1200" b="1" i="0" kern="1200" dirty="0">
+                    <a:solidFill>
+                      <a:schemeClr val="tx1"/>
+                    </a:solidFill>
+                    <a:effectLst/>
+                    <a:latin typeface="+mn-lt"/>
+                    <a:ea typeface="+mn-ea"/>
+                    <a:cs typeface="+mn-cs"/>
+                  </a:rPr>
+                  <a:t>0.7–0.8 </a:t>
+                </a:r>
+                <a:r>
+                  <a:rPr lang="en-US" sz="1200" b="0" i="0" kern="1200" dirty="0">
+                    <a:solidFill>
+                      <a:schemeClr val="tx1"/>
+                    </a:solidFill>
+                    <a:effectLst/>
+                    <a:latin typeface="+mn-lt"/>
+                    <a:ea typeface="+mn-ea"/>
+                    <a:cs typeface="+mn-cs"/>
+                  </a:rPr>
+                  <a:t>Fair.</a:t>
+                </a:r>
+              </a:p>
+              <a:p>
+                <a:r>
+                  <a:rPr lang="en-US" sz="1200" b="1" i="0" kern="1200" dirty="0">
+                    <a:solidFill>
+                      <a:schemeClr val="tx1"/>
+                    </a:solidFill>
+                    <a:effectLst/>
+                    <a:latin typeface="+mn-lt"/>
+                    <a:ea typeface="+mn-ea"/>
+                    <a:cs typeface="+mn-cs"/>
+                  </a:rPr>
+                  <a:t>0.5        </a:t>
+                </a:r>
+                <a:r>
+                  <a:rPr lang="en-US" sz="1200" b="0" i="0" kern="1200" dirty="0">
+                    <a:solidFill>
+                      <a:schemeClr val="tx1"/>
+                    </a:solidFill>
+                    <a:effectLst/>
+                    <a:latin typeface="+mn-lt"/>
+                    <a:ea typeface="+mn-ea"/>
+                    <a:cs typeface="+mn-cs"/>
+                  </a:rPr>
+                  <a:t>No better than random coin-flip.</a:t>
+                </a:r>
+              </a:p>
+              <a:p>
+                <a:r>
+                  <a:rPr lang="en-US" sz="1200" b="1" i="0" kern="1200" dirty="0">
+                    <a:solidFill>
+                      <a:schemeClr val="tx1"/>
+                    </a:solidFill>
+                    <a:effectLst/>
+                    <a:latin typeface="+mn-lt"/>
+                    <a:ea typeface="+mn-ea"/>
+                    <a:cs typeface="+mn-cs"/>
+                  </a:rPr>
+                  <a:t>&lt; 0.5     </a:t>
+                </a:r>
+                <a:r>
+                  <a:rPr lang="en-US" sz="1200" b="0" i="0" kern="1200" dirty="0">
+                    <a:solidFill>
+                      <a:schemeClr val="tx1"/>
+                    </a:solidFill>
+                    <a:effectLst/>
+                    <a:latin typeface="+mn-lt"/>
+                    <a:ea typeface="+mn-ea"/>
+                    <a:cs typeface="+mn-cs"/>
+                  </a:rPr>
+                  <a:t>Worse than random (you could invert predictions and do better).</a:t>
+                </a:r>
+              </a:p>
+              <a:p>
+                <a:endParaRPr lang="en-US" sz="1200" b="0" i="0" kern="1200" dirty="0">
+                  <a:solidFill>
+                    <a:schemeClr val="tx1"/>
+                  </a:solidFill>
+                  <a:effectLst/>
+                  <a:latin typeface="+mn-lt"/>
+                  <a:ea typeface="+mn-ea"/>
+                  <a:cs typeface="+mn-cs"/>
+                </a:endParaRPr>
+              </a:p>
+              <a:p>
+                <a:r>
+                  <a:rPr lang="en-US" sz="1200" b="1" i="0" kern="1200" dirty="0">
+                    <a:solidFill>
+                      <a:schemeClr val="tx1"/>
+                    </a:solidFill>
+                    <a:effectLst/>
+                    <a:latin typeface="+mn-lt"/>
+                    <a:ea typeface="+mn-ea"/>
+                    <a:cs typeface="+mn-cs"/>
+                  </a:rPr>
+                  <a:t>AUC = the probability that the model assigns a higher risk score to a randomly chosen </a:t>
+                </a:r>
+                <a:r>
+                  <a:rPr lang="en-US" sz="1200" b="1" i="1" kern="1200" dirty="0">
+                    <a:solidFill>
+                      <a:schemeClr val="tx1"/>
+                    </a:solidFill>
+                    <a:effectLst/>
+                    <a:latin typeface="+mn-lt"/>
+                    <a:ea typeface="+mn-ea"/>
+                    <a:cs typeface="+mn-cs"/>
+                  </a:rPr>
+                  <a:t>positive</a:t>
+                </a:r>
+                <a:r>
+                  <a:rPr lang="en-US" sz="1200" b="1" i="0" kern="1200" dirty="0">
+                    <a:solidFill>
+                      <a:schemeClr val="tx1"/>
+                    </a:solidFill>
+                    <a:effectLst/>
+                    <a:latin typeface="+mn-lt"/>
+                    <a:ea typeface="+mn-ea"/>
+                    <a:cs typeface="+mn-cs"/>
+                  </a:rPr>
+                  <a:t> patient than to a randomly chosen </a:t>
+                </a:r>
+                <a:r>
+                  <a:rPr lang="en-US" sz="1200" b="1" i="1" kern="1200" dirty="0">
+                    <a:solidFill>
+                      <a:schemeClr val="tx1"/>
+                    </a:solidFill>
+                    <a:effectLst/>
+                    <a:latin typeface="+mn-lt"/>
+                    <a:ea typeface="+mn-ea"/>
+                    <a:cs typeface="+mn-cs"/>
+                  </a:rPr>
+                  <a:t>negative</a:t>
+                </a:r>
+                <a:r>
+                  <a:rPr lang="en-US" sz="1200" b="1" i="0" kern="1200" dirty="0">
+                    <a:solidFill>
+                      <a:schemeClr val="tx1"/>
+                    </a:solidFill>
+                    <a:effectLst/>
+                    <a:latin typeface="+mn-lt"/>
+                    <a:ea typeface="+mn-ea"/>
+                    <a:cs typeface="+mn-cs"/>
+                  </a:rPr>
+                  <a:t> patient.</a:t>
+                </a:r>
+                <a:endParaRPr lang="en-US" sz="1200" b="0" i="0" kern="1200" dirty="0">
+                  <a:solidFill>
+                    <a:schemeClr val="tx1"/>
+                  </a:solidFill>
+                  <a:effectLst/>
+                  <a:latin typeface="+mn-lt"/>
+                  <a:ea typeface="+mn-ea"/>
+                  <a:cs typeface="+mn-cs"/>
+                </a:endParaRPr>
+              </a:p>
+              <a:p>
+                <a:r>
+                  <a:rPr lang="en-US" sz="1200" b="0" i="0" kern="1200" dirty="0">
+                    <a:solidFill>
+                      <a:schemeClr val="tx1"/>
+                    </a:solidFill>
+                    <a:effectLst/>
+                    <a:latin typeface="+mn-lt"/>
+                    <a:ea typeface="+mn-ea"/>
+                    <a:cs typeface="+mn-cs"/>
+                  </a:rPr>
+                  <a:t>So your project's </a:t>
+                </a:r>
+                <a:r>
+                  <a:rPr lang="en-US" sz="1200" b="1" i="0" kern="1200" dirty="0">
+                    <a:solidFill>
+                      <a:schemeClr val="tx1"/>
+                    </a:solidFill>
+                    <a:effectLst/>
+                    <a:latin typeface="+mn-lt"/>
+                    <a:ea typeface="+mn-ea"/>
+                    <a:cs typeface="+mn-cs"/>
+                  </a:rPr>
+                  <a:t>AUC ≈ 0.96</a:t>
+                </a:r>
+                <a:r>
+                  <a:rPr lang="en-US" sz="1200" b="0" i="0" kern="1200" dirty="0">
+                    <a:solidFill>
+                      <a:schemeClr val="tx1"/>
+                    </a:solidFill>
+                    <a:effectLst/>
+                    <a:latin typeface="+mn-lt"/>
+                    <a:ea typeface="+mn-ea"/>
+                    <a:cs typeface="+mn-cs"/>
+                  </a:rPr>
+                  <a:t> (slide 10) means: pick any sick patient and any healthy patient at random — the model ranks the sick one higher about 96% of the time.</a:t>
+                </a:r>
+              </a:p>
+              <a:p>
+                <a:endParaRPr lang="en-US" sz="1200" b="0" i="0" kern="1200" dirty="0">
+                  <a:solidFill>
+                    <a:schemeClr val="tx1"/>
+                  </a:solidFill>
+                  <a:effectLst/>
+                  <a:latin typeface="+mn-lt"/>
+                  <a:ea typeface="+mn-ea"/>
+                  <a:cs typeface="+mn-cs"/>
+                </a:endParaRPr>
+              </a:p>
+              <a:p>
+                <a:r>
+                  <a:rPr lang="en-US" sz="1200" b="1" i="0" kern="1200" dirty="0">
+                    <a:solidFill>
+                      <a:schemeClr val="tx1"/>
+                    </a:solidFill>
+                    <a:effectLst/>
+                    <a:latin typeface="+mn-lt"/>
+                    <a:ea typeface="+mn-ea"/>
+                    <a:cs typeface="+mn-cs"/>
+                  </a:rPr>
+                  <a:t>Brier score is a metric for probabilistic predictions in binary classification.</a:t>
+                </a:r>
+              </a:p>
+              <a:p>
+                <a:endParaRPr lang="en-US" sz="1200" b="0" i="0" kern="1200" dirty="0">
+                  <a:solidFill>
+                    <a:schemeClr val="tx1"/>
+                  </a:solidFill>
+                  <a:effectLst/>
+                  <a:latin typeface="+mn-lt"/>
+                  <a:ea typeface="+mn-ea"/>
+                  <a:cs typeface="+mn-cs"/>
+                </a:endParaRPr>
+              </a:p>
+              <a:p>
+                <a:r>
+                  <a:rPr lang="en-US" sz="1200" b="0" i="0" kern="1200" dirty="0">
+                    <a:solidFill>
+                      <a:schemeClr val="tx1"/>
+                    </a:solidFill>
+                    <a:effectLst/>
+                    <a:latin typeface="+mn-lt"/>
+                    <a:ea typeface="+mn-ea"/>
+                    <a:cs typeface="+mn-cs"/>
+                  </a:rPr>
+                  <a:t>It measures the mean squared error between predicted probability and actual outcome.</a:t>
+                </a:r>
+              </a:p>
+              <a:p>
+                <a:r>
+                  <a:rPr lang="en-US" sz="1200" b="0" i="0" kern="1200" dirty="0">
+                    <a:solidFill>
+                      <a:schemeClr val="tx1"/>
+                    </a:solidFill>
+                    <a:effectLst/>
+                    <a:latin typeface="+mn-lt"/>
+                    <a:ea typeface="+mn-ea"/>
+                    <a:cs typeface="+mn-cs"/>
+                  </a:rPr>
+                  <a:t>Formula:</a:t>
+                </a:r>
+                <a:br>
+                  <a:rPr lang="en-US" sz="1200" b="0" i="0" kern="1200" dirty="0">
+                    <a:solidFill>
+                      <a:schemeClr val="tx1"/>
+                    </a:solidFill>
+                    <a:effectLst/>
+                    <a:latin typeface="+mn-lt"/>
+                    <a:ea typeface="+mn-ea"/>
+                    <a:cs typeface="+mn-cs"/>
+                  </a:rPr>
+                </a:br>
+                <a:endParaRPr lang="en-US" sz="1200" b="0" i="0" kern="1200" dirty="0">
+                  <a:solidFill>
+                    <a:schemeClr val="tx1"/>
+                  </a:solidFill>
+                  <a:effectLst/>
+                  <a:latin typeface="+mn-lt"/>
+                  <a:ea typeface="+mn-ea"/>
+                  <a:cs typeface="+mn-cs"/>
+                </a:endParaRPr>
+              </a:p>
+              <a:p>
+                <a14:m>
+                  <m:oMathPara xmlns:m="http://schemas.openxmlformats.org/officeDocument/2006/math">
+                    <m:oMathParaPr>
+                      <m:jc m:val="centerGroup"/>
+                    </m:oMathParaPr>
+                    <m:oMath xmlns:m="http://schemas.openxmlformats.org/officeDocument/2006/math">
+                      <m:r>
+                        <m:rPr>
+                          <m:nor/>
+                        </m:rPr>
+                        <a:rPr lang="en-US" b="0"/>
+                        <m:t>Brier</m:t>
+                      </m:r>
+                      <m:r>
+                        <a:rPr lang="en-US" sz="1200" b="0" i="0" kern="1200">
+                          <a:solidFill>
+                            <a:schemeClr val="tx1"/>
+                          </a:solidFill>
+                          <a:latin typeface="+mn-lt"/>
+                          <a:ea typeface="+mn-ea"/>
+                          <a:cs typeface="+mn-cs"/>
+                        </a:rPr>
+                        <m:t>=</m:t>
+                      </m:r>
+                      <m:f>
+                        <m:fPr>
+                          <m:ctrlPr>
+                            <a:rPr lang="ar-AE" sz="1200" b="0" i="1" kern="1200">
+                              <a:solidFill>
+                                <a:schemeClr val="tx1"/>
+                              </a:solidFill>
+                              <a:latin typeface="+mn-lt"/>
+                              <a:ea typeface="+mn-ea"/>
+                              <a:cs typeface="+mn-cs"/>
+                            </a:rPr>
+                          </m:ctrlPr>
+                        </m:fPr>
+                        <m:num>
+                          <m:r>
+                            <a:rPr lang="ar-AE" sz="1200" b="0" i="0" kern="1200">
+                              <a:solidFill>
+                                <a:schemeClr val="tx1"/>
+                              </a:solidFill>
+                              <a:latin typeface="+mn-lt"/>
+                              <a:ea typeface="+mn-ea"/>
+                              <a:cs typeface="+mn-cs"/>
+                            </a:rPr>
+                            <m:t>1</m:t>
+                          </m:r>
+                        </m:num>
+                        <m:den>
+                          <m:r>
+                            <a:rPr lang="ar-AE" sz="1200" b="0" i="1" kern="1200">
+                              <a:solidFill>
+                                <a:schemeClr val="tx1"/>
+                              </a:solidFill>
+                              <a:latin typeface="+mn-lt"/>
+                              <a:ea typeface="+mn-ea"/>
+                              <a:cs typeface="+mn-cs"/>
+                            </a:rPr>
+                            <m:t>𝑁</m:t>
+                          </m:r>
+                        </m:den>
+                      </m:f>
+                      <m:nary>
+                        <m:naryPr>
+                          <m:chr m:val="∑"/>
+                          <m:grow m:val="on"/>
+                          <m:ctrlPr>
+                            <a:rPr lang="ar-AE" sz="1200" b="0" i="1" kern="1200">
+                              <a:solidFill>
+                                <a:schemeClr val="tx1"/>
+                              </a:solidFill>
+                              <a:latin typeface="+mn-lt"/>
+                              <a:ea typeface="+mn-ea"/>
+                              <a:cs typeface="+mn-cs"/>
+                            </a:rPr>
+                          </m:ctrlPr>
+                        </m:naryPr>
+                        <m:sub>
+                          <m:r>
+                            <a:rPr lang="ar-AE" sz="1200" b="0" i="1" kern="1200">
+                              <a:solidFill>
+                                <a:schemeClr val="tx1"/>
+                              </a:solidFill>
+                              <a:latin typeface="+mn-lt"/>
+                              <a:ea typeface="+mn-ea"/>
+                              <a:cs typeface="+mn-cs"/>
+                            </a:rPr>
+                            <m:t>𝑖</m:t>
+                          </m:r>
+                          <m:r>
+                            <a:rPr lang="ar-AE" sz="1200" b="0" i="0" kern="1200">
+                              <a:solidFill>
+                                <a:schemeClr val="tx1"/>
+                              </a:solidFill>
+                              <a:latin typeface="+mn-lt"/>
+                              <a:ea typeface="+mn-ea"/>
+                              <a:cs typeface="+mn-cs"/>
+                            </a:rPr>
+                            <m:t>=</m:t>
+                          </m:r>
+                          <m:r>
+                            <a:rPr lang="ar-AE" sz="1200" b="0" i="0" kern="1200">
+                              <a:solidFill>
+                                <a:schemeClr val="tx1"/>
+                              </a:solidFill>
+                              <a:latin typeface="+mn-lt"/>
+                              <a:ea typeface="+mn-ea"/>
+                              <a:cs typeface="+mn-cs"/>
+                            </a:rPr>
+                            <m:t>1</m:t>
+                          </m:r>
+                        </m:sub>
+                        <m:sup>
+                          <m:r>
+                            <a:rPr lang="ar-AE" sz="1200" b="0" i="1" kern="1200">
+                              <a:solidFill>
+                                <a:schemeClr val="tx1"/>
+                              </a:solidFill>
+                              <a:latin typeface="+mn-lt"/>
+                              <a:ea typeface="+mn-ea"/>
+                              <a:cs typeface="+mn-cs"/>
+                            </a:rPr>
+                            <m:t>𝑁</m:t>
+                          </m:r>
+                        </m:sup>
+                        <m:e>
+                          <m:r>
+                            <a:rPr lang="ar-AE" sz="1200" b="0" i="0" kern="1200">
+                              <a:solidFill>
+                                <a:schemeClr val="tx1"/>
+                              </a:solidFill>
+                              <a:latin typeface="+mn-lt"/>
+                              <a:ea typeface="+mn-ea"/>
+                              <a:cs typeface="+mn-cs"/>
+                            </a:rPr>
+                            <m:t>(</m:t>
+                          </m:r>
+                        </m:e>
+                      </m:nary>
+                      <m:d>
+                        <m:dPr>
+                          <m:begChr m:val=""/>
+                          <m:endChr m:val=""/>
+                          <m:ctrlPr>
+                            <a:rPr lang="ar-AE" sz="1200" b="0" i="1" kern="1200">
+                              <a:solidFill>
+                                <a:schemeClr val="tx1"/>
+                              </a:solidFill>
+                              <a:latin typeface="+mn-lt"/>
+                              <a:ea typeface="+mn-ea"/>
+                              <a:cs typeface="+mn-cs"/>
+                            </a:rPr>
+                          </m:ctrlPr>
+                        </m:dPr>
+                        <m:e>
+                          <m:sSub>
+                            <m:sSubPr>
+                              <m:ctrlPr>
+                                <a:rPr lang="ar-AE" sz="1200" b="0" i="1" kern="1200">
+                                  <a:solidFill>
+                                    <a:schemeClr val="tx1"/>
+                                  </a:solidFill>
+                                  <a:latin typeface="+mn-lt"/>
+                                  <a:ea typeface="+mn-ea"/>
+                                  <a:cs typeface="+mn-cs"/>
+                                </a:rPr>
+                              </m:ctrlPr>
+                            </m:sSubPr>
+                            <m:e>
+                              <m:r>
+                                <a:rPr lang="ar-AE" sz="1200" b="0" i="1" kern="1200">
+                                  <a:solidFill>
+                                    <a:schemeClr val="tx1"/>
+                                  </a:solidFill>
+                                  <a:latin typeface="+mn-lt"/>
+                                  <a:ea typeface="+mn-ea"/>
+                                  <a:cs typeface="+mn-cs"/>
+                                </a:rPr>
+                                <m:t>𝑝</m:t>
+                              </m:r>
+                            </m:e>
+                            <m:sub>
+                              <m:r>
+                                <a:rPr lang="ar-AE" sz="1200" b="0" i="1" kern="1200">
+                                  <a:solidFill>
+                                    <a:schemeClr val="tx1"/>
+                                  </a:solidFill>
+                                  <a:latin typeface="+mn-lt"/>
+                                  <a:ea typeface="+mn-ea"/>
+                                  <a:cs typeface="+mn-cs"/>
+                                </a:rPr>
+                                <m:t>𝑖</m:t>
+                              </m:r>
+                            </m:sub>
+                          </m:sSub>
+                          <m:r>
+                            <a:rPr lang="ar-AE" sz="1200" b="0" i="0" kern="1200">
+                              <a:solidFill>
+                                <a:schemeClr val="tx1"/>
+                              </a:solidFill>
+                              <a:latin typeface="+mn-lt"/>
+                              <a:ea typeface="+mn-ea"/>
+                              <a:cs typeface="+mn-cs"/>
+                            </a:rPr>
+                            <m:t>−</m:t>
+                          </m:r>
+                          <m:sSub>
+                            <m:sSubPr>
+                              <m:ctrlPr>
+                                <a:rPr lang="ar-AE" sz="1200" b="0" i="1" kern="1200">
+                                  <a:solidFill>
+                                    <a:schemeClr val="tx1"/>
+                                  </a:solidFill>
+                                  <a:latin typeface="+mn-lt"/>
+                                  <a:ea typeface="+mn-ea"/>
+                                  <a:cs typeface="+mn-cs"/>
+                                </a:rPr>
+                              </m:ctrlPr>
+                            </m:sSubPr>
+                            <m:e>
+                              <m:r>
+                                <a:rPr lang="ar-AE" sz="1200" b="0" i="1" kern="1200">
+                                  <a:solidFill>
+                                    <a:schemeClr val="tx1"/>
+                                  </a:solidFill>
+                                  <a:latin typeface="+mn-lt"/>
+                                  <a:ea typeface="+mn-ea"/>
+                                  <a:cs typeface="+mn-cs"/>
+                                </a:rPr>
+                                <m:t>𝑦</m:t>
+                              </m:r>
+                            </m:e>
+                            <m:sub>
+                              <m:r>
+                                <a:rPr lang="ar-AE" sz="1200" b="0" i="1" kern="1200">
+                                  <a:solidFill>
+                                    <a:schemeClr val="tx1"/>
+                                  </a:solidFill>
+                                  <a:latin typeface="+mn-lt"/>
+                                  <a:ea typeface="+mn-ea"/>
+                                  <a:cs typeface="+mn-cs"/>
+                                </a:rPr>
+                                <m:t>𝑖</m:t>
+                              </m:r>
+                            </m:sub>
+                          </m:sSub>
+                          <m:sSup>
+                            <m:sSupPr>
+                              <m:ctrlPr>
+                                <a:rPr lang="ar-AE" sz="1200" b="0" i="1" kern="1200">
+                                  <a:solidFill>
+                                    <a:schemeClr val="tx1"/>
+                                  </a:solidFill>
+                                  <a:latin typeface="+mn-lt"/>
+                                  <a:ea typeface="+mn-ea"/>
+                                  <a:cs typeface="+mn-cs"/>
+                                </a:rPr>
+                              </m:ctrlPr>
+                            </m:sSupPr>
+                            <m:e>
+                              <m:d>
+                                <m:dPr>
+                                  <m:begChr m:val=""/>
+                                  <m:endChr m:val=""/>
+                                  <m:ctrlPr>
+                                    <a:rPr lang="ar-AE" sz="1200" b="0" i="1" kern="1200">
+                                      <a:solidFill>
+                                        <a:schemeClr val="tx1"/>
+                                      </a:solidFill>
+                                      <a:latin typeface="+mn-lt"/>
+                                      <a:ea typeface="+mn-ea"/>
+                                      <a:cs typeface="+mn-cs"/>
+                                    </a:rPr>
+                                  </m:ctrlPr>
+                                </m:dPr>
+                                <m:e>
+                                  <m:r>
+                                    <a:rPr lang="ar-AE" sz="1200" b="0" i="0" kern="1200">
+                                      <a:solidFill>
+                                        <a:schemeClr val="tx1"/>
+                                      </a:solidFill>
+                                      <a:latin typeface="+mn-lt"/>
+                                      <a:ea typeface="+mn-ea"/>
+                                      <a:cs typeface="+mn-cs"/>
+                                    </a:rPr>
+                                    <m:t>)</m:t>
+                                  </m:r>
+                                </m:e>
+                              </m:d>
+                            </m:e>
+                            <m:sup>
+                              <m:r>
+                                <a:rPr lang="ar-AE" sz="1200" b="0" i="0" kern="1200">
+                                  <a:solidFill>
+                                    <a:schemeClr val="tx1"/>
+                                  </a:solidFill>
+                                  <a:latin typeface="+mn-lt"/>
+                                  <a:ea typeface="+mn-ea"/>
+                                  <a:cs typeface="+mn-cs"/>
+                                </a:rPr>
+                                <m:t>2</m:t>
+                              </m:r>
+                            </m:sup>
+                          </m:sSup>
+                        </m:e>
+                      </m:d>
+                    </m:oMath>
+                  </m:oMathPara>
+                </a14:m>
+                <a:endParaRPr lang="ar-AE" sz="1200" b="0" i="0" kern="1200" dirty="0">
+                  <a:solidFill>
+                    <a:schemeClr val="tx1"/>
+                  </a:solidFill>
+                  <a:effectLst/>
+                  <a:latin typeface="+mn-lt"/>
+                  <a:ea typeface="+mn-ea"/>
+                  <a:cs typeface="+mn-cs"/>
+                </a:endParaRPr>
+              </a:p>
+              <a:p>
+                <a:br>
+                  <a:rPr lang="ar-AE" sz="1200" b="0" i="0" kern="1200" dirty="0">
+                    <a:solidFill>
+                      <a:schemeClr val="tx1"/>
+                    </a:solidFill>
+                    <a:effectLst/>
+                    <a:latin typeface="+mn-lt"/>
+                    <a:ea typeface="+mn-ea"/>
+                    <a:cs typeface="+mn-cs"/>
+                  </a:rPr>
+                </a:br>
+                <a:r>
+                  <a:rPr lang="en-US" sz="1200" b="0" i="0" kern="1200" dirty="0">
+                    <a:solidFill>
+                      <a:schemeClr val="tx1"/>
+                    </a:solidFill>
+                    <a:effectLst/>
+                    <a:latin typeface="+mn-lt"/>
+                    <a:ea typeface="+mn-ea"/>
+                    <a:cs typeface="+mn-cs"/>
+                  </a:rPr>
+                  <a:t>where </a:t>
+                </a:r>
+                <a14:m>
+                  <m:oMath xmlns:m="http://schemas.openxmlformats.org/officeDocument/2006/math">
+                    <m:sSub>
+                      <m:sSubPr>
+                        <m:ctrlPr>
+                          <a:rPr lang="ar-AE" sz="1200" kern="1200">
+                            <a:solidFill>
+                              <a:schemeClr val="tx1"/>
+                            </a:solidFill>
+                            <a:latin typeface="+mn-lt"/>
+                            <a:ea typeface="+mn-ea"/>
+                            <a:cs typeface="+mn-cs"/>
+                          </a:rPr>
+                        </m:ctrlPr>
+                      </m:sSubPr>
+                      <m:e>
+                        <m:r>
+                          <a:rPr lang="ar-AE" sz="1200" i="1" kern="1200">
+                            <a:solidFill>
+                              <a:schemeClr val="tx1"/>
+                            </a:solidFill>
+                            <a:latin typeface="+mn-lt"/>
+                            <a:ea typeface="+mn-ea"/>
+                            <a:cs typeface="+mn-cs"/>
+                          </a:rPr>
+                          <m:t>𝑝</m:t>
+                        </m:r>
+                      </m:e>
+                      <m:sub>
+                        <m:r>
+                          <a:rPr lang="ar-AE" sz="1200" i="1" kern="1200">
+                            <a:solidFill>
+                              <a:schemeClr val="tx1"/>
+                            </a:solidFill>
+                            <a:latin typeface="+mn-lt"/>
+                            <a:ea typeface="+mn-ea"/>
+                            <a:cs typeface="+mn-cs"/>
+                          </a:rPr>
+                          <m:t>𝑖</m:t>
+                        </m:r>
+                      </m:sub>
+                    </m:sSub>
+                  </m:oMath>
+                </a14:m>
+                <a:r>
+                  <a:rPr lang="ar-AE" sz="1200" b="0" i="0" kern="1200" dirty="0">
+                    <a:solidFill>
+                      <a:schemeClr val="tx1"/>
+                    </a:solidFill>
+                    <a:effectLst/>
+                    <a:latin typeface="+mn-lt"/>
+                    <a:ea typeface="+mn-ea"/>
+                    <a:cs typeface="+mn-cs"/>
+                  </a:rPr>
+                  <a:t> </a:t>
+                </a:r>
+                <a:r>
+                  <a:rPr lang="en-US" sz="1200" b="0" i="0" kern="1200" dirty="0">
+                    <a:solidFill>
+                      <a:schemeClr val="tx1"/>
+                    </a:solidFill>
+                    <a:effectLst/>
+                    <a:latin typeface="+mn-lt"/>
+                    <a:ea typeface="+mn-ea"/>
+                    <a:cs typeface="+mn-cs"/>
+                  </a:rPr>
+                  <a:t>is predicted probability of class 1, and </a:t>
+                </a:r>
+                <a14:m>
+                  <m:oMath xmlns:m="http://schemas.openxmlformats.org/officeDocument/2006/math">
+                    <m:sSub>
+                      <m:sSubPr>
+                        <m:ctrlPr>
+                          <a:rPr lang="ar-AE" sz="1200" kern="1200">
+                            <a:solidFill>
+                              <a:schemeClr val="tx1"/>
+                            </a:solidFill>
+                            <a:latin typeface="+mn-lt"/>
+                            <a:ea typeface="+mn-ea"/>
+                            <a:cs typeface="+mn-cs"/>
+                          </a:rPr>
+                        </m:ctrlPr>
+                      </m:sSubPr>
+                      <m:e>
+                        <m:r>
+                          <a:rPr lang="ar-AE" sz="1200" i="1" kern="1200">
+                            <a:solidFill>
+                              <a:schemeClr val="tx1"/>
+                            </a:solidFill>
+                            <a:latin typeface="+mn-lt"/>
+                            <a:ea typeface="+mn-ea"/>
+                            <a:cs typeface="+mn-cs"/>
+                          </a:rPr>
+                          <m:t>𝑦</m:t>
+                        </m:r>
+                      </m:e>
+                      <m:sub>
+                        <m:r>
+                          <a:rPr lang="ar-AE" sz="1200" i="1" kern="1200">
+                            <a:solidFill>
+                              <a:schemeClr val="tx1"/>
+                            </a:solidFill>
+                            <a:latin typeface="+mn-lt"/>
+                            <a:ea typeface="+mn-ea"/>
+                            <a:cs typeface="+mn-cs"/>
+                          </a:rPr>
+                          <m:t>𝑖</m:t>
+                        </m:r>
+                      </m:sub>
+                    </m:sSub>
+                    <m:r>
+                      <a:rPr lang="ar-AE" sz="1200" i="0" kern="1200">
+                        <a:solidFill>
+                          <a:schemeClr val="tx1"/>
+                        </a:solidFill>
+                        <a:latin typeface="+mn-lt"/>
+                        <a:ea typeface="+mn-ea"/>
+                        <a:cs typeface="+mn-cs"/>
+                      </a:rPr>
+                      <m:t>∈</m:t>
+                    </m:r>
+                    <m:d>
+                      <m:dPr>
+                        <m:begChr m:val="{"/>
+                        <m:endChr m:val="}"/>
+                        <m:sepChr m:val=","/>
+                        <m:ctrlPr>
+                          <a:rPr lang="ar-AE" sz="1200" i="1" kern="1200">
+                            <a:solidFill>
+                              <a:schemeClr val="tx1"/>
+                            </a:solidFill>
+                            <a:latin typeface="+mn-lt"/>
+                            <a:ea typeface="+mn-ea"/>
+                            <a:cs typeface="+mn-cs"/>
+                          </a:rPr>
+                        </m:ctrlPr>
+                      </m:dPr>
+                      <m:e>
+                        <m:r>
+                          <a:rPr lang="ar-AE" sz="1200" i="0" kern="1200">
+                            <a:solidFill>
+                              <a:schemeClr val="tx1"/>
+                            </a:solidFill>
+                            <a:latin typeface="+mn-lt"/>
+                            <a:ea typeface="+mn-ea"/>
+                            <a:cs typeface="+mn-cs"/>
+                          </a:rPr>
+                          <m:t>0</m:t>
+                        </m:r>
+                      </m:e>
+                      <m:e>
+                        <m:r>
+                          <a:rPr lang="ar-AE" sz="1200" i="0" kern="1200">
+                            <a:solidFill>
+                              <a:schemeClr val="tx1"/>
+                            </a:solidFill>
+                            <a:latin typeface="+mn-lt"/>
+                            <a:ea typeface="+mn-ea"/>
+                            <a:cs typeface="+mn-cs"/>
+                          </a:rPr>
+                          <m:t>1</m:t>
+                        </m:r>
+                      </m:e>
+                    </m:d>
+                  </m:oMath>
+                </a14:m>
+                <a:r>
+                  <a:rPr lang="ar-AE" sz="1200" b="0" i="0" kern="1200" dirty="0">
+                    <a:solidFill>
+                      <a:schemeClr val="tx1"/>
+                    </a:solidFill>
+                    <a:effectLst/>
+                    <a:latin typeface="+mn-lt"/>
+                    <a:ea typeface="+mn-ea"/>
+                    <a:cs typeface="+mn-cs"/>
+                  </a:rPr>
+                  <a:t>.</a:t>
+                </a:r>
+              </a:p>
+              <a:p>
+                <a:r>
+                  <a:rPr lang="en-US" sz="1200" b="0" i="0" kern="1200" dirty="0">
+                    <a:solidFill>
+                      <a:schemeClr val="tx1"/>
+                    </a:solidFill>
+                    <a:effectLst/>
+                    <a:latin typeface="+mn-lt"/>
+                    <a:ea typeface="+mn-ea"/>
+                    <a:cs typeface="+mn-cs"/>
+                  </a:rPr>
+                  <a:t>How it helps:</a:t>
+                </a:r>
+              </a:p>
+              <a:p>
+                <a:pPr marL="0" marR="0" lvl="0" indent="0" algn="l" defTabSz="914400" rtl="0" eaLnBrk="1" fontAlgn="auto" latinLnBrk="0" hangingPunct="1">
+                  <a:lnSpc>
+                    <a:spcPct val="100000"/>
+                  </a:lnSpc>
+                  <a:spcBef>
+                    <a:spcPts val="0"/>
+                  </a:spcBef>
+                  <a:spcAft>
+                    <a:spcPts val="0"/>
+                  </a:spcAft>
+                  <a:buClrTx/>
+                  <a:buSzTx/>
+                  <a:buFontTx/>
+                  <a:buNone/>
+                  <a:tabLst/>
+                  <a:defRPr/>
+                </a:pPr>
+                <a:r>
+                  <a:rPr lang="en-US" sz="1200" b="0" i="0" kern="1200" dirty="0">
+                    <a:solidFill>
+                      <a:schemeClr val="tx1"/>
+                    </a:solidFill>
+                    <a:effectLst/>
+                    <a:latin typeface="+mn-lt"/>
+                    <a:ea typeface="+mn-ea"/>
+                    <a:cs typeface="+mn-cs"/>
+                  </a:rPr>
+                  <a:t>Checks probability quality, not just </a:t>
+                </a:r>
+                <a:r>
+                  <a:rPr lang="en-US" sz="1200" b="0" i="0" kern="1200" dirty="0" err="1">
+                    <a:solidFill>
+                      <a:schemeClr val="tx1"/>
+                    </a:solidFill>
+                    <a:effectLst/>
+                    <a:latin typeface="+mn-lt"/>
+                    <a:ea typeface="+mn-ea"/>
+                    <a:cs typeface="+mn-cs"/>
+                  </a:rPr>
+                  <a:t>cRewards</a:t>
+                </a:r>
+                <a:r>
+                  <a:rPr lang="en-US" sz="1200" b="0" i="0" kern="1200" dirty="0">
+                    <a:solidFill>
+                      <a:schemeClr val="tx1"/>
+                    </a:solidFill>
+                    <a:effectLst/>
+                    <a:latin typeface="+mn-lt"/>
+                    <a:ea typeface="+mn-ea"/>
+                    <a:cs typeface="+mn-cs"/>
+                  </a:rPr>
+                  <a:t> well-calibrated confidence:</a:t>
+                </a:r>
+              </a:p>
+              <a:p>
+                <a:r>
+                  <a:rPr lang="en-US" sz="1200" b="0" i="0" kern="1200" dirty="0">
+                    <a:solidFill>
+                      <a:schemeClr val="tx1"/>
+                    </a:solidFill>
+                    <a:effectLst/>
+                    <a:latin typeface="+mn-lt"/>
+                    <a:ea typeface="+mn-ea"/>
+                    <a:cs typeface="+mn-cs"/>
+                  </a:rPr>
+                  <a:t>lass labels.</a:t>
+                </a:r>
+              </a:p>
+              <a:p>
+                <a:pPr lvl="1"/>
+                <a:r>
+                  <a:rPr lang="en-US" sz="1200" b="0" i="0" kern="1200" dirty="0">
+                    <a:solidFill>
+                      <a:schemeClr val="tx1"/>
+                    </a:solidFill>
+                    <a:effectLst/>
+                    <a:latin typeface="+mn-lt"/>
+                    <a:ea typeface="+mn-ea"/>
+                    <a:cs typeface="+mn-cs"/>
+                  </a:rPr>
+                  <a:t>If model predicts 0.8, the event should happen about 80% of the time.</a:t>
+                </a:r>
+              </a:p>
+              <a:p>
+                <a:r>
+                  <a:rPr lang="en-US" sz="1200" b="0" i="0" kern="1200" dirty="0">
+                    <a:solidFill>
+                      <a:schemeClr val="tx1"/>
+                    </a:solidFill>
+                    <a:effectLst/>
+                    <a:latin typeface="+mn-lt"/>
+                    <a:ea typeface="+mn-ea"/>
+                    <a:cs typeface="+mn-cs"/>
+                  </a:rPr>
+                  <a:t>Penalizes overconfident wrong predictions strongly.</a:t>
+                </a:r>
+              </a:p>
+              <a:p>
+                <a:r>
+                  <a:rPr lang="en-US" sz="1200" b="0" i="0" kern="1200" dirty="0">
+                    <a:solidFill>
+                      <a:schemeClr val="tx1"/>
+                    </a:solidFill>
+                    <a:effectLst/>
+                    <a:latin typeface="+mn-lt"/>
+                    <a:ea typeface="+mn-ea"/>
+                    <a:cs typeface="+mn-cs"/>
+                  </a:rPr>
+                  <a:t>Easy to compare models when you care about risk estimates, triage, or decision thresholds.</a:t>
+                </a:r>
+              </a:p>
+              <a:p>
+                <a:r>
+                  <a:rPr lang="en-US" sz="1200" b="0" i="0" kern="1200" dirty="0">
+                    <a:solidFill>
+                      <a:schemeClr val="tx1"/>
+                    </a:solidFill>
+                    <a:effectLst/>
+                    <a:latin typeface="+mn-lt"/>
+                    <a:ea typeface="+mn-ea"/>
+                    <a:cs typeface="+mn-cs"/>
+                  </a:rPr>
+                  <a:t>Interpretation:</a:t>
+                </a:r>
+              </a:p>
+              <a:p>
+                <a:r>
+                  <a:rPr lang="en-US" sz="1200" b="0" i="0" kern="1200" dirty="0">
+                    <a:solidFill>
+                      <a:schemeClr val="tx1"/>
+                    </a:solidFill>
+                    <a:effectLst/>
+                    <a:latin typeface="+mn-lt"/>
+                    <a:ea typeface="+mn-ea"/>
+                    <a:cs typeface="+mn-cs"/>
+                  </a:rPr>
+                  <a:t>Lower is better.</a:t>
+                </a:r>
+              </a:p>
+              <a:p>
+                <a:r>
+                  <a:rPr lang="en-US" sz="1200" b="0" i="0" kern="1200" dirty="0">
+                    <a:solidFill>
+                      <a:schemeClr val="tx1"/>
+                    </a:solidFill>
+                    <a:effectLst/>
+                    <a:latin typeface="+mn-lt"/>
+                    <a:ea typeface="+mn-ea"/>
+                    <a:cs typeface="+mn-cs"/>
+                  </a:rPr>
+                  <a:t>Best possible is 0.</a:t>
+                </a:r>
+              </a:p>
+              <a:p>
+                <a:r>
+                  <a:rPr lang="en-US" sz="1200" b="0" i="0" kern="1200" dirty="0">
+                    <a:solidFill>
+                      <a:schemeClr val="tx1"/>
+                    </a:solidFill>
+                    <a:effectLst/>
+                    <a:latin typeface="+mn-lt"/>
+                    <a:ea typeface="+mn-ea"/>
+                    <a:cs typeface="+mn-cs"/>
+                  </a:rPr>
+                  <a:t>For binary tasks, it usually ranges from 0 to 1.</a:t>
+                </a:r>
+              </a:p>
+              <a:p>
+                <a:endParaRPr lang="en-US" sz="1200" b="0" i="0" kern="1200" dirty="0">
+                  <a:solidFill>
+                    <a:schemeClr val="tx1"/>
+                  </a:solidFill>
+                  <a:effectLst/>
+                  <a:latin typeface="+mn-lt"/>
+                  <a:ea typeface="+mn-ea"/>
+                  <a:cs typeface="+mn-cs"/>
+                </a:endParaRPr>
+              </a:p>
+              <a:p>
+                <a:endParaRPr lang="en-US" dirty="0"/>
+              </a:p>
+            </p:txBody>
+          </p:sp>
+        </mc:Choice>
+        <mc:Fallback>
+          <p:sp>
+            <p:nvSpPr>
+              <p:cNvPr id="3" name="Notes Placeholder 2"/>
+              <p:cNvSpPr>
+                <a:spLocks noGrp="1"/>
+              </p:cNvSpPr>
+              <p:nvPr>
+                <p:ph type="body" idx="1"/>
+              </p:nvPr>
+            </p:nvSpPr>
+            <p:spPr/>
+            <p:txBody>
+              <a:bodyPr/>
+              <a:lstStyle/>
+              <a:p>
+                <a:r>
+                  <a:rPr lang="en-US" sz="1200" b="0" i="0" kern="1200" dirty="0">
+                    <a:solidFill>
+                      <a:schemeClr val="tx1"/>
+                    </a:solidFill>
+                    <a:effectLst/>
+                    <a:latin typeface="+mn-lt"/>
+                    <a:ea typeface="+mn-ea"/>
+                    <a:cs typeface="+mn-cs"/>
+                  </a:rPr>
+                  <a:t>"Headline numbers: ROC-AUC around 0.96, Brier around 0.087. But I'm reporting 95% bootstrap CIs alongside a plain logistic-regression baseline, and the bands overlap — so I am </a:t>
+                </a:r>
+                <a:r>
+                  <a:rPr lang="en-US" sz="1200" b="0" i="1" kern="1200" dirty="0">
+                    <a:solidFill>
+                      <a:schemeClr val="tx1"/>
+                    </a:solidFill>
+                    <a:effectLst/>
+                    <a:latin typeface="+mn-lt"/>
+                    <a:ea typeface="+mn-ea"/>
+                    <a:cs typeface="+mn-cs"/>
+                  </a:rPr>
+                  <a:t>not</a:t>
+                </a:r>
+                <a:r>
+                  <a:rPr lang="en-US" sz="1200" b="0" i="0" kern="1200" dirty="0">
+                    <a:solidFill>
+                      <a:schemeClr val="tx1"/>
+                    </a:solidFill>
+                    <a:effectLst/>
+                    <a:latin typeface="+mn-lt"/>
+                    <a:ea typeface="+mn-ea"/>
+                    <a:cs typeface="+mn-cs"/>
+                  </a:rPr>
+                  <a:t> overselling the gradient-boosting model. Honest limitations I name in the paper: the dataset is 303 rows, thirty years old, skewed male; calibration is fine on average but both models are most confident exactly when wrong on a handful of rows; the LLM is closed-weights so its </a:t>
+                </a:r>
+                <a:r>
+                  <a:rPr lang="en-US" sz="1200" b="0" i="0" kern="1200" dirty="0" err="1">
+                    <a:solidFill>
+                      <a:schemeClr val="tx1"/>
+                    </a:solidFill>
+                    <a:effectLst/>
+                    <a:latin typeface="+mn-lt"/>
+                    <a:ea typeface="+mn-ea"/>
+                    <a:cs typeface="+mn-cs"/>
+                  </a:rPr>
+                  <a:t>behaviour</a:t>
+                </a:r>
+                <a:r>
+                  <a:rPr lang="en-US" sz="1200" b="0" i="0" kern="1200" dirty="0">
+                    <a:solidFill>
+                      <a:schemeClr val="tx1"/>
+                    </a:solidFill>
+                    <a:effectLst/>
+                    <a:latin typeface="+mn-lt"/>
+                    <a:ea typeface="+mn-ea"/>
+                    <a:cs typeface="+mn-cs"/>
+                  </a:rPr>
+                  <a:t> can drift; the refusal list can be paraphrased past; and the knowledge base is synthetic. None of those are surprises — they're documented up front.“</a:t>
+                </a:r>
+              </a:p>
+              <a:p>
+                <a:r>
+                  <a:rPr lang="en-US" sz="1200" b="1" i="0" kern="1200" dirty="0">
+                    <a:solidFill>
+                      <a:schemeClr val="tx1"/>
+                    </a:solidFill>
+                    <a:effectLst/>
+                    <a:latin typeface="+mn-lt"/>
+                    <a:ea typeface="+mn-ea"/>
+                    <a:cs typeface="+mn-cs"/>
+                  </a:rPr>
+                  <a:t>ROC-AUC</a:t>
+                </a:r>
+                <a:r>
+                  <a:rPr lang="en-US" sz="1200" b="0" i="0" kern="1200" dirty="0">
+                    <a:solidFill>
+                      <a:schemeClr val="tx1"/>
+                    </a:solidFill>
+                    <a:effectLst/>
+                    <a:latin typeface="+mn-lt"/>
+                    <a:ea typeface="+mn-ea"/>
+                    <a:cs typeface="+mn-cs"/>
+                  </a:rPr>
+                  <a:t> = </a:t>
+                </a:r>
+                <a:r>
+                  <a:rPr lang="en-US" sz="1200" b="1" i="0" kern="1200" dirty="0">
+                    <a:solidFill>
+                      <a:schemeClr val="tx1"/>
+                    </a:solidFill>
+                    <a:effectLst/>
+                    <a:latin typeface="+mn-lt"/>
+                    <a:ea typeface="+mn-ea"/>
+                    <a:cs typeface="+mn-cs"/>
+                  </a:rPr>
+                  <a:t>Area Under the Receiver Operating Characteristic Curve</a:t>
+                </a:r>
+              </a:p>
+              <a:p>
+                <a:endParaRPr lang="en-US" sz="1200" b="1" i="0" kern="1200" dirty="0">
+                  <a:solidFill>
+                    <a:schemeClr val="tx1"/>
+                  </a:solidFill>
+                  <a:effectLst/>
+                  <a:latin typeface="+mn-lt"/>
+                  <a:ea typeface="+mn-ea"/>
+                  <a:cs typeface="+mn-cs"/>
+                </a:endParaRPr>
+              </a:p>
+              <a:p>
+                <a:r>
+                  <a:rPr lang="en-US" sz="1200" b="1" i="0" kern="1200" dirty="0">
+                    <a:solidFill>
+                      <a:schemeClr val="tx1"/>
+                    </a:solidFill>
+                    <a:effectLst/>
+                    <a:latin typeface="+mn-lt"/>
+                    <a:ea typeface="+mn-ea"/>
+                    <a:cs typeface="+mn-cs"/>
+                  </a:rPr>
+                  <a:t>How to read the number</a:t>
+                </a:r>
+              </a:p>
+              <a:p>
+                <a:r>
+                  <a:rPr lang="en-US" sz="1200" b="0" i="0" kern="1200" dirty="0" err="1">
+                    <a:solidFill>
+                      <a:schemeClr val="tx1"/>
+                    </a:solidFill>
+                    <a:effectLst/>
+                    <a:latin typeface="+mn-lt"/>
+                    <a:ea typeface="+mn-ea"/>
+                    <a:cs typeface="+mn-cs"/>
+                  </a:rPr>
+                  <a:t>AUCMeaning</a:t>
+                </a:r>
+                <a:endParaRPr lang="en-US" sz="1200" b="0" i="0" kern="1200" dirty="0">
+                  <a:solidFill>
+                    <a:schemeClr val="tx1"/>
+                  </a:solidFill>
+                  <a:effectLst/>
+                  <a:latin typeface="+mn-lt"/>
+                  <a:ea typeface="+mn-ea"/>
+                  <a:cs typeface="+mn-cs"/>
+                </a:endParaRPr>
+              </a:p>
+              <a:p>
+                <a:r>
+                  <a:rPr lang="en-US" sz="1200" b="1" i="0" kern="1200" dirty="0">
+                    <a:solidFill>
+                      <a:schemeClr val="tx1"/>
+                    </a:solidFill>
+                    <a:effectLst/>
+                    <a:latin typeface="+mn-lt"/>
+                    <a:ea typeface="+mn-ea"/>
+                    <a:cs typeface="+mn-cs"/>
+                  </a:rPr>
+                  <a:t>1.0        </a:t>
+                </a:r>
+                <a:r>
+                  <a:rPr lang="en-US" sz="1200" b="0" i="0" kern="1200" dirty="0">
+                    <a:solidFill>
+                      <a:schemeClr val="tx1"/>
+                    </a:solidFill>
+                    <a:effectLst/>
+                    <a:latin typeface="+mn-lt"/>
+                    <a:ea typeface="+mn-ea"/>
+                    <a:cs typeface="+mn-cs"/>
+                  </a:rPr>
+                  <a:t>Perfect — model ranks every positive above every negative.</a:t>
+                </a:r>
+              </a:p>
+              <a:p>
+                <a:r>
+                  <a:rPr lang="en-US" sz="1200" b="1" i="0" kern="1200" dirty="0">
+                    <a:solidFill>
+                      <a:schemeClr val="tx1"/>
+                    </a:solidFill>
+                    <a:effectLst/>
+                    <a:latin typeface="+mn-lt"/>
+                    <a:ea typeface="+mn-ea"/>
+                    <a:cs typeface="+mn-cs"/>
+                  </a:rPr>
+                  <a:t>0.9–1.0 </a:t>
+                </a:r>
+                <a:r>
+                  <a:rPr lang="en-US" sz="1200" b="0" i="0" kern="1200" dirty="0">
+                    <a:solidFill>
+                      <a:schemeClr val="tx1"/>
+                    </a:solidFill>
+                    <a:effectLst/>
+                    <a:latin typeface="+mn-lt"/>
+                    <a:ea typeface="+mn-ea"/>
+                    <a:cs typeface="+mn-cs"/>
+                  </a:rPr>
+                  <a:t>Excellent separation.</a:t>
+                </a:r>
+              </a:p>
+              <a:p>
+                <a:r>
+                  <a:rPr lang="en-US" sz="1200" b="1" i="0" kern="1200" dirty="0">
+                    <a:solidFill>
+                      <a:schemeClr val="tx1"/>
+                    </a:solidFill>
+                    <a:effectLst/>
+                    <a:latin typeface="+mn-lt"/>
+                    <a:ea typeface="+mn-ea"/>
+                    <a:cs typeface="+mn-cs"/>
+                  </a:rPr>
+                  <a:t>0.8–0.9 </a:t>
+                </a:r>
+                <a:r>
+                  <a:rPr lang="en-US" sz="1200" b="0" i="0" kern="1200" dirty="0">
+                    <a:solidFill>
+                      <a:schemeClr val="tx1"/>
+                    </a:solidFill>
+                    <a:effectLst/>
+                    <a:latin typeface="+mn-lt"/>
+                    <a:ea typeface="+mn-ea"/>
+                    <a:cs typeface="+mn-cs"/>
+                  </a:rPr>
+                  <a:t>Good.</a:t>
+                </a:r>
+              </a:p>
+              <a:p>
+                <a:r>
+                  <a:rPr lang="en-US" sz="1200" b="1" i="0" kern="1200" dirty="0">
+                    <a:solidFill>
+                      <a:schemeClr val="tx1"/>
+                    </a:solidFill>
+                    <a:effectLst/>
+                    <a:latin typeface="+mn-lt"/>
+                    <a:ea typeface="+mn-ea"/>
+                    <a:cs typeface="+mn-cs"/>
+                  </a:rPr>
+                  <a:t>0.7–0.8 </a:t>
+                </a:r>
+                <a:r>
+                  <a:rPr lang="en-US" sz="1200" b="0" i="0" kern="1200" dirty="0">
+                    <a:solidFill>
+                      <a:schemeClr val="tx1"/>
+                    </a:solidFill>
+                    <a:effectLst/>
+                    <a:latin typeface="+mn-lt"/>
+                    <a:ea typeface="+mn-ea"/>
+                    <a:cs typeface="+mn-cs"/>
+                  </a:rPr>
+                  <a:t>Fair.</a:t>
+                </a:r>
+              </a:p>
+              <a:p>
+                <a:r>
+                  <a:rPr lang="en-US" sz="1200" b="1" i="0" kern="1200" dirty="0">
+                    <a:solidFill>
+                      <a:schemeClr val="tx1"/>
+                    </a:solidFill>
+                    <a:effectLst/>
+                    <a:latin typeface="+mn-lt"/>
+                    <a:ea typeface="+mn-ea"/>
+                    <a:cs typeface="+mn-cs"/>
+                  </a:rPr>
+                  <a:t>0.5        </a:t>
+                </a:r>
+                <a:r>
+                  <a:rPr lang="en-US" sz="1200" b="0" i="0" kern="1200" dirty="0">
+                    <a:solidFill>
+                      <a:schemeClr val="tx1"/>
+                    </a:solidFill>
+                    <a:effectLst/>
+                    <a:latin typeface="+mn-lt"/>
+                    <a:ea typeface="+mn-ea"/>
+                    <a:cs typeface="+mn-cs"/>
+                  </a:rPr>
+                  <a:t>No better than random coin-flip.</a:t>
+                </a:r>
+              </a:p>
+              <a:p>
+                <a:r>
+                  <a:rPr lang="en-US" sz="1200" b="1" i="0" kern="1200" dirty="0">
+                    <a:solidFill>
+                      <a:schemeClr val="tx1"/>
+                    </a:solidFill>
+                    <a:effectLst/>
+                    <a:latin typeface="+mn-lt"/>
+                    <a:ea typeface="+mn-ea"/>
+                    <a:cs typeface="+mn-cs"/>
+                  </a:rPr>
+                  <a:t>&lt; 0.5     </a:t>
+                </a:r>
+                <a:r>
+                  <a:rPr lang="en-US" sz="1200" b="0" i="0" kern="1200" dirty="0">
+                    <a:solidFill>
+                      <a:schemeClr val="tx1"/>
+                    </a:solidFill>
+                    <a:effectLst/>
+                    <a:latin typeface="+mn-lt"/>
+                    <a:ea typeface="+mn-ea"/>
+                    <a:cs typeface="+mn-cs"/>
+                  </a:rPr>
+                  <a:t>Worse than random (you could invert predictions and do better).</a:t>
+                </a:r>
+              </a:p>
+              <a:p>
+                <a:endParaRPr lang="en-US" sz="1200" b="0" i="0" kern="1200" dirty="0">
+                  <a:solidFill>
+                    <a:schemeClr val="tx1"/>
+                  </a:solidFill>
+                  <a:effectLst/>
+                  <a:latin typeface="+mn-lt"/>
+                  <a:ea typeface="+mn-ea"/>
+                  <a:cs typeface="+mn-cs"/>
+                </a:endParaRPr>
+              </a:p>
+              <a:p>
+                <a:r>
+                  <a:rPr lang="en-US" sz="1200" b="1" i="0" kern="1200" dirty="0">
+                    <a:solidFill>
+                      <a:schemeClr val="tx1"/>
+                    </a:solidFill>
+                    <a:effectLst/>
+                    <a:latin typeface="+mn-lt"/>
+                    <a:ea typeface="+mn-ea"/>
+                    <a:cs typeface="+mn-cs"/>
+                  </a:rPr>
+                  <a:t>AUC = the probability that the model assigns a higher risk score to a randomly chosen </a:t>
+                </a:r>
+                <a:r>
+                  <a:rPr lang="en-US" sz="1200" b="1" i="1" kern="1200" dirty="0">
+                    <a:solidFill>
+                      <a:schemeClr val="tx1"/>
+                    </a:solidFill>
+                    <a:effectLst/>
+                    <a:latin typeface="+mn-lt"/>
+                    <a:ea typeface="+mn-ea"/>
+                    <a:cs typeface="+mn-cs"/>
+                  </a:rPr>
+                  <a:t>positive</a:t>
+                </a:r>
+                <a:r>
+                  <a:rPr lang="en-US" sz="1200" b="1" i="0" kern="1200" dirty="0">
+                    <a:solidFill>
+                      <a:schemeClr val="tx1"/>
+                    </a:solidFill>
+                    <a:effectLst/>
+                    <a:latin typeface="+mn-lt"/>
+                    <a:ea typeface="+mn-ea"/>
+                    <a:cs typeface="+mn-cs"/>
+                  </a:rPr>
+                  <a:t> patient than to a randomly chosen </a:t>
+                </a:r>
+                <a:r>
+                  <a:rPr lang="en-US" sz="1200" b="1" i="1" kern="1200" dirty="0">
+                    <a:solidFill>
+                      <a:schemeClr val="tx1"/>
+                    </a:solidFill>
+                    <a:effectLst/>
+                    <a:latin typeface="+mn-lt"/>
+                    <a:ea typeface="+mn-ea"/>
+                    <a:cs typeface="+mn-cs"/>
+                  </a:rPr>
+                  <a:t>negative</a:t>
+                </a:r>
+                <a:r>
+                  <a:rPr lang="en-US" sz="1200" b="1" i="0" kern="1200" dirty="0">
+                    <a:solidFill>
+                      <a:schemeClr val="tx1"/>
+                    </a:solidFill>
+                    <a:effectLst/>
+                    <a:latin typeface="+mn-lt"/>
+                    <a:ea typeface="+mn-ea"/>
+                    <a:cs typeface="+mn-cs"/>
+                  </a:rPr>
+                  <a:t> patient.</a:t>
+                </a:r>
+                <a:endParaRPr lang="en-US" sz="1200" b="0" i="0" kern="1200" dirty="0">
+                  <a:solidFill>
+                    <a:schemeClr val="tx1"/>
+                  </a:solidFill>
+                  <a:effectLst/>
+                  <a:latin typeface="+mn-lt"/>
+                  <a:ea typeface="+mn-ea"/>
+                  <a:cs typeface="+mn-cs"/>
+                </a:endParaRPr>
+              </a:p>
+              <a:p>
+                <a:r>
+                  <a:rPr lang="en-US" sz="1200" b="0" i="0" kern="1200" dirty="0">
+                    <a:solidFill>
+                      <a:schemeClr val="tx1"/>
+                    </a:solidFill>
+                    <a:effectLst/>
+                    <a:latin typeface="+mn-lt"/>
+                    <a:ea typeface="+mn-ea"/>
+                    <a:cs typeface="+mn-cs"/>
+                  </a:rPr>
+                  <a:t>So your project's </a:t>
+                </a:r>
+                <a:r>
+                  <a:rPr lang="en-US" sz="1200" b="1" i="0" kern="1200" dirty="0">
+                    <a:solidFill>
+                      <a:schemeClr val="tx1"/>
+                    </a:solidFill>
+                    <a:effectLst/>
+                    <a:latin typeface="+mn-lt"/>
+                    <a:ea typeface="+mn-ea"/>
+                    <a:cs typeface="+mn-cs"/>
+                  </a:rPr>
+                  <a:t>AUC ≈ 0.96</a:t>
+                </a:r>
+                <a:r>
+                  <a:rPr lang="en-US" sz="1200" b="0" i="0" kern="1200" dirty="0">
+                    <a:solidFill>
+                      <a:schemeClr val="tx1"/>
+                    </a:solidFill>
+                    <a:effectLst/>
+                    <a:latin typeface="+mn-lt"/>
+                    <a:ea typeface="+mn-ea"/>
+                    <a:cs typeface="+mn-cs"/>
+                  </a:rPr>
+                  <a:t> (slide 10) means: pick any sick patient and any healthy patient at random — the model ranks the sick one higher about 96% of the time.</a:t>
+                </a:r>
+              </a:p>
+              <a:p>
+                <a:endParaRPr lang="en-US" sz="1200" b="0" i="0" kern="1200" dirty="0">
+                  <a:solidFill>
+                    <a:schemeClr val="tx1"/>
+                  </a:solidFill>
+                  <a:effectLst/>
+                  <a:latin typeface="+mn-lt"/>
+                  <a:ea typeface="+mn-ea"/>
+                  <a:cs typeface="+mn-cs"/>
+                </a:endParaRPr>
+              </a:p>
+              <a:p>
+                <a:r>
+                  <a:rPr lang="en-US" sz="1200" b="1" i="0" kern="1200" dirty="0">
+                    <a:solidFill>
+                      <a:schemeClr val="tx1"/>
+                    </a:solidFill>
+                    <a:effectLst/>
+                    <a:latin typeface="+mn-lt"/>
+                    <a:ea typeface="+mn-ea"/>
+                    <a:cs typeface="+mn-cs"/>
+                  </a:rPr>
+                  <a:t>Brier score is a metric for probabilistic predictions in binary classification.</a:t>
+                </a:r>
+              </a:p>
+              <a:p>
+                <a:endParaRPr lang="en-US" sz="1200" b="0" i="0" kern="1200" dirty="0">
+                  <a:solidFill>
+                    <a:schemeClr val="tx1"/>
+                  </a:solidFill>
+                  <a:effectLst/>
+                  <a:latin typeface="+mn-lt"/>
+                  <a:ea typeface="+mn-ea"/>
+                  <a:cs typeface="+mn-cs"/>
+                </a:endParaRPr>
+              </a:p>
+              <a:p>
+                <a:r>
+                  <a:rPr lang="en-US" sz="1200" b="0" i="0" kern="1200" dirty="0">
+                    <a:solidFill>
+                      <a:schemeClr val="tx1"/>
+                    </a:solidFill>
+                    <a:effectLst/>
+                    <a:latin typeface="+mn-lt"/>
+                    <a:ea typeface="+mn-ea"/>
+                    <a:cs typeface="+mn-cs"/>
+                  </a:rPr>
+                  <a:t>It measures the mean squared error between predicted probability and actual outcome.</a:t>
+                </a:r>
+              </a:p>
+              <a:p>
+                <a:r>
+                  <a:rPr lang="en-US" sz="1200" b="0" i="0" kern="1200" dirty="0">
+                    <a:solidFill>
+                      <a:schemeClr val="tx1"/>
+                    </a:solidFill>
+                    <a:effectLst/>
+                    <a:latin typeface="+mn-lt"/>
+                    <a:ea typeface="+mn-ea"/>
+                    <a:cs typeface="+mn-cs"/>
+                  </a:rPr>
+                  <a:t>Formula:</a:t>
+                </a:r>
+                <a:br>
+                  <a:rPr lang="en-US" sz="1200" b="0" i="0" kern="1200" dirty="0">
+                    <a:solidFill>
+                      <a:schemeClr val="tx1"/>
+                    </a:solidFill>
+                    <a:effectLst/>
+                    <a:latin typeface="+mn-lt"/>
+                    <a:ea typeface="+mn-ea"/>
+                    <a:cs typeface="+mn-cs"/>
+                  </a:rPr>
+                </a:br>
+                <a:endParaRPr lang="en-US" sz="1200" b="0" i="0" kern="1200" dirty="0">
+                  <a:solidFill>
+                    <a:schemeClr val="tx1"/>
+                  </a:solidFill>
+                  <a:effectLst/>
+                  <a:latin typeface="+mn-lt"/>
+                  <a:ea typeface="+mn-ea"/>
+                  <a:cs typeface="+mn-cs"/>
+                </a:endParaRPr>
+              </a:p>
+              <a:p>
+                <a:r>
+                  <a:rPr lang="en-US" b="0" i="0">
+                    <a:latin typeface="Cambria Math" panose="02040503050406030204" pitchFamily="18" charset="0"/>
+                  </a:rPr>
+                  <a:t>"Brier</a:t>
+                </a:r>
+                <a:r>
+                  <a:rPr lang="en-US" sz="1200" b="0" i="0" kern="1200">
+                    <a:solidFill>
+                      <a:schemeClr val="tx1"/>
+                    </a:solidFill>
+                    <a:latin typeface="+mn-lt"/>
+                    <a:ea typeface="+mn-ea"/>
+                    <a:cs typeface="+mn-cs"/>
+                  </a:rPr>
+                  <a:t>"=</a:t>
+                </a:r>
+                <a:r>
+                  <a:rPr lang="ar-AE" sz="1200" b="0" i="0" kern="1200">
+                    <a:solidFill>
+                      <a:schemeClr val="tx1"/>
+                    </a:solidFill>
+                    <a:latin typeface="+mn-lt"/>
+                    <a:ea typeface="+mn-ea"/>
+                    <a:cs typeface="+mn-cs"/>
+                  </a:rPr>
+                  <a:t>1/𝑁 ∑128_(𝑖=1)^𝑁▒( ├ 𝑝_𝑖−𝑦_𝑖 ├ )┤^2 ┤</a:t>
+                </a:r>
+                <a:endParaRPr lang="ar-AE" sz="1200" b="0" i="0" kern="1200" dirty="0">
+                  <a:solidFill>
+                    <a:schemeClr val="tx1"/>
+                  </a:solidFill>
+                  <a:effectLst/>
+                  <a:latin typeface="+mn-lt"/>
+                  <a:ea typeface="+mn-ea"/>
+                  <a:cs typeface="+mn-cs"/>
+                </a:endParaRPr>
+              </a:p>
+              <a:p>
+                <a:br>
+                  <a:rPr lang="ar-AE" sz="1200" b="0" i="0" kern="1200" dirty="0">
+                    <a:solidFill>
+                      <a:schemeClr val="tx1"/>
+                    </a:solidFill>
+                    <a:effectLst/>
+                    <a:latin typeface="+mn-lt"/>
+                    <a:ea typeface="+mn-ea"/>
+                    <a:cs typeface="+mn-cs"/>
+                  </a:rPr>
+                </a:br>
+                <a:r>
+                  <a:rPr lang="en-US" sz="1200" b="0" i="0" kern="1200" dirty="0">
+                    <a:solidFill>
+                      <a:schemeClr val="tx1"/>
+                    </a:solidFill>
+                    <a:effectLst/>
+                    <a:latin typeface="+mn-lt"/>
+                    <a:ea typeface="+mn-ea"/>
+                    <a:cs typeface="+mn-cs"/>
+                  </a:rPr>
+                  <a:t>where </a:t>
+                </a:r>
+                <a:r>
+                  <a:rPr lang="ar-AE" sz="1200" i="0" kern="1200">
+                    <a:solidFill>
+                      <a:schemeClr val="tx1"/>
+                    </a:solidFill>
+                    <a:latin typeface="+mn-lt"/>
+                    <a:ea typeface="+mn-ea"/>
+                    <a:cs typeface="+mn-cs"/>
+                  </a:rPr>
+                  <a:t>𝑝_𝑖</a:t>
+                </a:r>
+                <a:r>
+                  <a:rPr lang="ar-AE" sz="1200" b="0" i="0" kern="1200" dirty="0">
+                    <a:solidFill>
+                      <a:schemeClr val="tx1"/>
+                    </a:solidFill>
+                    <a:effectLst/>
+                    <a:latin typeface="+mn-lt"/>
+                    <a:ea typeface="+mn-ea"/>
+                    <a:cs typeface="+mn-cs"/>
+                  </a:rPr>
+                  <a:t> </a:t>
+                </a:r>
+                <a:r>
+                  <a:rPr lang="en-US" sz="1200" b="0" i="0" kern="1200" dirty="0">
+                    <a:solidFill>
+                      <a:schemeClr val="tx1"/>
+                    </a:solidFill>
+                    <a:effectLst/>
+                    <a:latin typeface="+mn-lt"/>
+                    <a:ea typeface="+mn-ea"/>
+                    <a:cs typeface="+mn-cs"/>
+                  </a:rPr>
+                  <a:t>is predicted probability of class 1, and </a:t>
+                </a:r>
+                <a:r>
+                  <a:rPr lang="ar-AE" sz="1200" i="0" kern="1200">
+                    <a:solidFill>
+                      <a:schemeClr val="tx1"/>
+                    </a:solidFill>
+                    <a:latin typeface="+mn-lt"/>
+                    <a:ea typeface="+mn-ea"/>
+                    <a:cs typeface="+mn-cs"/>
+                  </a:rPr>
+                  <a:t>𝑦_𝑖∈{0ⓜ,1}</a:t>
+                </a:r>
+                <a:r>
+                  <a:rPr lang="ar-AE" sz="1200" b="0" i="0" kern="1200" dirty="0">
+                    <a:solidFill>
+                      <a:schemeClr val="tx1"/>
+                    </a:solidFill>
+                    <a:effectLst/>
+                    <a:latin typeface="+mn-lt"/>
+                    <a:ea typeface="+mn-ea"/>
+                    <a:cs typeface="+mn-cs"/>
+                  </a:rPr>
+                  <a:t>.</a:t>
+                </a:r>
+              </a:p>
+              <a:p>
+                <a:r>
+                  <a:rPr lang="en-US" sz="1200" b="0" i="0" kern="1200" dirty="0">
+                    <a:solidFill>
+                      <a:schemeClr val="tx1"/>
+                    </a:solidFill>
+                    <a:effectLst/>
+                    <a:latin typeface="+mn-lt"/>
+                    <a:ea typeface="+mn-ea"/>
+                    <a:cs typeface="+mn-cs"/>
+                  </a:rPr>
+                  <a:t>How it helps:</a:t>
+                </a:r>
+              </a:p>
+              <a:p>
+                <a:pPr marL="0" marR="0" lvl="0" indent="0" algn="l" defTabSz="914400" rtl="0" eaLnBrk="1" fontAlgn="auto" latinLnBrk="0" hangingPunct="1">
+                  <a:lnSpc>
+                    <a:spcPct val="100000"/>
+                  </a:lnSpc>
+                  <a:spcBef>
+                    <a:spcPts val="0"/>
+                  </a:spcBef>
+                  <a:spcAft>
+                    <a:spcPts val="0"/>
+                  </a:spcAft>
+                  <a:buClrTx/>
+                  <a:buSzTx/>
+                  <a:buFontTx/>
+                  <a:buNone/>
+                  <a:tabLst/>
+                  <a:defRPr/>
+                </a:pPr>
+                <a:r>
+                  <a:rPr lang="en-US" sz="1200" b="0" i="0" kern="1200" dirty="0">
+                    <a:solidFill>
+                      <a:schemeClr val="tx1"/>
+                    </a:solidFill>
+                    <a:effectLst/>
+                    <a:latin typeface="+mn-lt"/>
+                    <a:ea typeface="+mn-ea"/>
+                    <a:cs typeface="+mn-cs"/>
+                  </a:rPr>
+                  <a:t>Checks probability quality, not just </a:t>
+                </a:r>
+                <a:r>
+                  <a:rPr lang="en-US" sz="1200" b="0" i="0" kern="1200" dirty="0" err="1">
+                    <a:solidFill>
+                      <a:schemeClr val="tx1"/>
+                    </a:solidFill>
+                    <a:effectLst/>
+                    <a:latin typeface="+mn-lt"/>
+                    <a:ea typeface="+mn-ea"/>
+                    <a:cs typeface="+mn-cs"/>
+                  </a:rPr>
+                  <a:t>cRewards</a:t>
+                </a:r>
+                <a:r>
+                  <a:rPr lang="en-US" sz="1200" b="0" i="0" kern="1200" dirty="0">
+                    <a:solidFill>
+                      <a:schemeClr val="tx1"/>
+                    </a:solidFill>
+                    <a:effectLst/>
+                    <a:latin typeface="+mn-lt"/>
+                    <a:ea typeface="+mn-ea"/>
+                    <a:cs typeface="+mn-cs"/>
+                  </a:rPr>
+                  <a:t> well-calibrated confidence:</a:t>
+                </a:r>
+              </a:p>
+              <a:p>
+                <a:r>
+                  <a:rPr lang="en-US" sz="1200" b="0" i="0" kern="1200" dirty="0">
+                    <a:solidFill>
+                      <a:schemeClr val="tx1"/>
+                    </a:solidFill>
+                    <a:effectLst/>
+                    <a:latin typeface="+mn-lt"/>
+                    <a:ea typeface="+mn-ea"/>
+                    <a:cs typeface="+mn-cs"/>
+                  </a:rPr>
+                  <a:t>lass labels.</a:t>
+                </a:r>
+              </a:p>
+              <a:p>
+                <a:pPr lvl="1"/>
+                <a:r>
+                  <a:rPr lang="en-US" sz="1200" b="0" i="0" kern="1200" dirty="0">
+                    <a:solidFill>
+                      <a:schemeClr val="tx1"/>
+                    </a:solidFill>
+                    <a:effectLst/>
+                    <a:latin typeface="+mn-lt"/>
+                    <a:ea typeface="+mn-ea"/>
+                    <a:cs typeface="+mn-cs"/>
+                  </a:rPr>
+                  <a:t>If model predicts 0.8, the event should happen about 80% of the time.</a:t>
+                </a:r>
+              </a:p>
+              <a:p>
+                <a:r>
+                  <a:rPr lang="en-US" sz="1200" b="0" i="0" kern="1200" dirty="0">
+                    <a:solidFill>
+                      <a:schemeClr val="tx1"/>
+                    </a:solidFill>
+                    <a:effectLst/>
+                    <a:latin typeface="+mn-lt"/>
+                    <a:ea typeface="+mn-ea"/>
+                    <a:cs typeface="+mn-cs"/>
+                  </a:rPr>
+                  <a:t>Penalizes overconfident wrong predictions strongly.</a:t>
+                </a:r>
+              </a:p>
+              <a:p>
+                <a:r>
+                  <a:rPr lang="en-US" sz="1200" b="0" i="0" kern="1200" dirty="0">
+                    <a:solidFill>
+                      <a:schemeClr val="tx1"/>
+                    </a:solidFill>
+                    <a:effectLst/>
+                    <a:latin typeface="+mn-lt"/>
+                    <a:ea typeface="+mn-ea"/>
+                    <a:cs typeface="+mn-cs"/>
+                  </a:rPr>
+                  <a:t>Easy to compare models when you care about risk estimates, triage, or decision thresholds.</a:t>
+                </a:r>
+              </a:p>
+              <a:p>
+                <a:r>
+                  <a:rPr lang="en-US" sz="1200" b="0" i="0" kern="1200" dirty="0">
+                    <a:solidFill>
+                      <a:schemeClr val="tx1"/>
+                    </a:solidFill>
+                    <a:effectLst/>
+                    <a:latin typeface="+mn-lt"/>
+                    <a:ea typeface="+mn-ea"/>
+                    <a:cs typeface="+mn-cs"/>
+                  </a:rPr>
+                  <a:t>Interpretation:</a:t>
+                </a:r>
+              </a:p>
+              <a:p>
+                <a:r>
+                  <a:rPr lang="en-US" sz="1200" b="0" i="0" kern="1200" dirty="0">
+                    <a:solidFill>
+                      <a:schemeClr val="tx1"/>
+                    </a:solidFill>
+                    <a:effectLst/>
+                    <a:latin typeface="+mn-lt"/>
+                    <a:ea typeface="+mn-ea"/>
+                    <a:cs typeface="+mn-cs"/>
+                  </a:rPr>
+                  <a:t>Lower is better.</a:t>
+                </a:r>
+              </a:p>
+              <a:p>
+                <a:r>
+                  <a:rPr lang="en-US" sz="1200" b="0" i="0" kern="1200" dirty="0">
+                    <a:solidFill>
+                      <a:schemeClr val="tx1"/>
+                    </a:solidFill>
+                    <a:effectLst/>
+                    <a:latin typeface="+mn-lt"/>
+                    <a:ea typeface="+mn-ea"/>
+                    <a:cs typeface="+mn-cs"/>
+                  </a:rPr>
+                  <a:t>Best possible is 0.</a:t>
+                </a:r>
+              </a:p>
+              <a:p>
+                <a:r>
+                  <a:rPr lang="en-US" sz="1200" b="0" i="0" kern="1200" dirty="0">
+                    <a:solidFill>
+                      <a:schemeClr val="tx1"/>
+                    </a:solidFill>
+                    <a:effectLst/>
+                    <a:latin typeface="+mn-lt"/>
+                    <a:ea typeface="+mn-ea"/>
+                    <a:cs typeface="+mn-cs"/>
+                  </a:rPr>
+                  <a:t>For binary tasks, it usually ranges from 0 to 1.</a:t>
+                </a:r>
+              </a:p>
+              <a:p>
+                <a:endParaRPr lang="en-US" sz="1200" b="0" i="0" kern="1200" dirty="0">
+                  <a:solidFill>
+                    <a:schemeClr val="tx1"/>
+                  </a:solidFill>
+                  <a:effectLst/>
+                  <a:latin typeface="+mn-lt"/>
+                  <a:ea typeface="+mn-ea"/>
+                  <a:cs typeface="+mn-cs"/>
+                </a:endParaRPr>
+              </a:p>
+              <a:p>
+                <a:endParaRPr lang="en-US" dirty="0"/>
+              </a:p>
+            </p:txBody>
+          </p:sp>
+        </mc:Fallback>
+      </mc:AlternateContent>
       <p:sp>
         <p:nvSpPr>
           <p:cNvPr id="4" name="Slide Number Placeholder 3"/>
@@ -3874,8 +5752,1011 @@
                 <a:ea typeface="+mn-ea"/>
                 <a:cs typeface="+mn-cs"/>
               </a:rPr>
-              <a:t>"Five things in priority order: a calibration layer on the ensemble, per-slice bootstrap CIs on every subgroup, a real curated guideline KB, a classifier-based input filter to replace the substring list, and a human-in-the-loop feedback hook so the evaluator rubric refines empirically."</a:t>
-            </a:r>
+              <a:t>"Five things in priority order: a calibration layer on the ensemble, per-slice bootstrap CIs on every subgroup, a real curated guideline KB, a classifier-based input filter to replace the substring list, and a human-in-the-loop feedback hook so the evaluator rubric refines empirically.“</a:t>
+            </a:r>
+          </a:p>
+          <a:p>
+            <a:endParaRPr lang="en-US" sz="1200" b="0" i="0" kern="1200" dirty="0">
+              <a:solidFill>
+                <a:schemeClr val="tx1"/>
+              </a:solidFill>
+              <a:effectLst/>
+              <a:latin typeface="+mn-lt"/>
+              <a:ea typeface="+mn-ea"/>
+              <a:cs typeface="+mn-cs"/>
+            </a:endParaRPr>
+          </a:p>
+          <a:p>
+            <a:r>
+              <a:rPr lang="en-US" sz="1200" b="0" i="0" kern="1200" dirty="0">
+                <a:solidFill>
+                  <a:schemeClr val="tx1"/>
+                </a:solidFill>
+                <a:effectLst/>
+                <a:latin typeface="+mn-lt"/>
+                <a:ea typeface="+mn-ea"/>
+                <a:cs typeface="+mn-cs"/>
+              </a:rPr>
+              <a:t>Calibration layer before reporting probabilities</a:t>
+            </a:r>
+            <a:br>
+              <a:rPr lang="en-US" sz="1200" b="0" i="0" kern="1200" dirty="0">
+                <a:solidFill>
+                  <a:schemeClr val="tx1"/>
+                </a:solidFill>
+                <a:effectLst/>
+                <a:latin typeface="+mn-lt"/>
+                <a:ea typeface="+mn-ea"/>
+                <a:cs typeface="+mn-cs"/>
+              </a:rPr>
+            </a:br>
+            <a:r>
+              <a:rPr lang="en-US" sz="1200" b="0" i="0" kern="1200" dirty="0">
+                <a:solidFill>
+                  <a:schemeClr val="tx1"/>
+                </a:solidFill>
+                <a:effectLst/>
+                <a:latin typeface="+mn-lt"/>
+                <a:ea typeface="+mn-ea"/>
+                <a:cs typeface="+mn-cs"/>
+              </a:rPr>
+              <a:t>What it means:</a:t>
+            </a:r>
+            <a:br>
+              <a:rPr lang="en-US" sz="1200" b="0" i="0" kern="1200" dirty="0">
+                <a:solidFill>
+                  <a:schemeClr val="tx1"/>
+                </a:solidFill>
+                <a:effectLst/>
+                <a:latin typeface="+mn-lt"/>
+                <a:ea typeface="+mn-ea"/>
+                <a:cs typeface="+mn-cs"/>
+              </a:rPr>
+            </a:br>
+            <a:r>
+              <a:rPr lang="en-US" sz="1200" b="0" i="0" kern="1200" dirty="0">
+                <a:solidFill>
+                  <a:schemeClr val="tx1"/>
+                </a:solidFill>
+                <a:effectLst/>
+                <a:latin typeface="+mn-lt"/>
+                <a:ea typeface="+mn-ea"/>
+                <a:cs typeface="+mn-cs"/>
+              </a:rPr>
+              <a:t>Your model outputs scores like 0.82 or 0.31, but those are only useful as probabilities if they are calibrated. Calibration makes sure predicted risk matches observed frequency.</a:t>
+            </a:r>
+          </a:p>
+          <a:p>
+            <a:r>
+              <a:rPr lang="en-US" sz="1200" b="0" i="0" kern="1200" dirty="0">
+                <a:solidFill>
+                  <a:schemeClr val="tx1"/>
+                </a:solidFill>
+                <a:effectLst/>
+                <a:latin typeface="+mn-lt"/>
+                <a:ea typeface="+mn-ea"/>
+                <a:cs typeface="+mn-cs"/>
+              </a:rPr>
+              <a:t>Why it matters:</a:t>
+            </a:r>
+            <a:br>
+              <a:rPr lang="en-US" sz="1200" b="0" i="0" kern="1200" dirty="0">
+                <a:solidFill>
+                  <a:schemeClr val="tx1"/>
+                </a:solidFill>
+                <a:effectLst/>
+                <a:latin typeface="+mn-lt"/>
+                <a:ea typeface="+mn-ea"/>
+                <a:cs typeface="+mn-cs"/>
+              </a:rPr>
+            </a:br>
+            <a:r>
+              <a:rPr lang="en-US" sz="1200" b="0" i="0" kern="1200" dirty="0">
+                <a:solidFill>
+                  <a:schemeClr val="tx1"/>
+                </a:solidFill>
+                <a:effectLst/>
+                <a:latin typeface="+mn-lt"/>
+                <a:ea typeface="+mn-ea"/>
+                <a:cs typeface="+mn-cs"/>
+              </a:rPr>
+              <a:t>If your system says “80% risk,” clinicians should see roughly 8 out of 10 similar cases actually positive. Without calibration, confidence can be misleading even when ROC-AUC is good.</a:t>
+            </a:r>
+          </a:p>
+          <a:p>
+            <a:r>
+              <a:rPr lang="en-US" sz="1200" b="0" i="0" kern="1200" dirty="0">
+                <a:solidFill>
+                  <a:schemeClr val="tx1"/>
+                </a:solidFill>
+                <a:effectLst/>
+                <a:latin typeface="+mn-lt"/>
+                <a:ea typeface="+mn-ea"/>
+                <a:cs typeface="+mn-cs"/>
+              </a:rPr>
+              <a:t>How to implement:</a:t>
+            </a:r>
+          </a:p>
+          <a:p>
+            <a:r>
+              <a:rPr lang="en-US" sz="1200" b="0" i="0" kern="1200" dirty="0">
+                <a:solidFill>
+                  <a:schemeClr val="tx1"/>
+                </a:solidFill>
+                <a:effectLst/>
+                <a:latin typeface="+mn-lt"/>
+                <a:ea typeface="+mn-ea"/>
+                <a:cs typeface="+mn-cs"/>
+              </a:rPr>
+              <a:t>Split data into train/validation/test.</a:t>
+            </a:r>
+          </a:p>
+          <a:p>
+            <a:r>
+              <a:rPr lang="en-US" sz="1200" b="0" i="0" kern="1200" dirty="0">
+                <a:solidFill>
+                  <a:schemeClr val="tx1"/>
+                </a:solidFill>
+                <a:effectLst/>
+                <a:latin typeface="+mn-lt"/>
+                <a:ea typeface="+mn-ea"/>
+                <a:cs typeface="+mn-cs"/>
+              </a:rPr>
+              <a:t>Train base model on train.</a:t>
+            </a:r>
+          </a:p>
+          <a:p>
+            <a:r>
+              <a:rPr lang="en-US" sz="1200" b="0" i="0" kern="1200" dirty="0">
+                <a:solidFill>
+                  <a:schemeClr val="tx1"/>
+                </a:solidFill>
+                <a:effectLst/>
+                <a:latin typeface="+mn-lt"/>
+                <a:ea typeface="+mn-ea"/>
+                <a:cs typeface="+mn-cs"/>
+              </a:rPr>
+              <a:t>Fit a calibrator on validation only:</a:t>
+            </a:r>
+          </a:p>
+          <a:p>
+            <a:pPr lvl="1"/>
+            <a:r>
+              <a:rPr lang="en-US" sz="1200" b="0" i="0" kern="1200" dirty="0">
+                <a:solidFill>
+                  <a:schemeClr val="tx1"/>
+                </a:solidFill>
+                <a:effectLst/>
+                <a:latin typeface="+mn-lt"/>
+                <a:ea typeface="+mn-ea"/>
+                <a:cs typeface="+mn-cs"/>
+              </a:rPr>
+              <a:t>Platt scaling (sigmoid/logistic mapping)</a:t>
+            </a:r>
+          </a:p>
+          <a:p>
+            <a:pPr lvl="1"/>
+            <a:r>
+              <a:rPr lang="en-US" sz="1200" b="0" i="0" kern="1200" dirty="0">
+                <a:solidFill>
+                  <a:schemeClr val="tx1"/>
+                </a:solidFill>
+                <a:effectLst/>
+                <a:latin typeface="+mn-lt"/>
+                <a:ea typeface="+mn-ea"/>
+                <a:cs typeface="+mn-cs"/>
+              </a:rPr>
+              <a:t>Isotonic regression (non-parametric, often better with enough data)</a:t>
+            </a:r>
+          </a:p>
+          <a:p>
+            <a:r>
+              <a:rPr lang="en-US" sz="1200" b="0" i="0" kern="1200" dirty="0">
+                <a:solidFill>
+                  <a:schemeClr val="tx1"/>
+                </a:solidFill>
+                <a:effectLst/>
+                <a:latin typeface="+mn-lt"/>
+                <a:ea typeface="+mn-ea"/>
+                <a:cs typeface="+mn-cs"/>
+              </a:rPr>
+              <a:t>Apply calibrated probabilities on test and in production.</a:t>
+            </a:r>
+          </a:p>
+          <a:p>
+            <a:r>
+              <a:rPr lang="en-US" sz="1200" b="0" i="0" kern="1200" dirty="0">
+                <a:solidFill>
+                  <a:schemeClr val="tx1"/>
+                </a:solidFill>
+                <a:effectLst/>
+                <a:latin typeface="+mn-lt"/>
+                <a:ea typeface="+mn-ea"/>
+                <a:cs typeface="+mn-cs"/>
+              </a:rPr>
+              <a:t>How to evaluate:</a:t>
+            </a:r>
+          </a:p>
+          <a:p>
+            <a:r>
+              <a:rPr lang="en-US" sz="1200" b="0" i="0" kern="1200" dirty="0">
+                <a:solidFill>
+                  <a:schemeClr val="tx1"/>
+                </a:solidFill>
+                <a:effectLst/>
+                <a:latin typeface="+mn-lt"/>
+                <a:ea typeface="+mn-ea"/>
+                <a:cs typeface="+mn-cs"/>
+              </a:rPr>
+              <a:t>Brier score (lower is better)</a:t>
+            </a:r>
+          </a:p>
+          <a:p>
+            <a:r>
+              <a:rPr lang="en-US" sz="1200" b="0" i="0" kern="1200" dirty="0">
+                <a:solidFill>
+                  <a:schemeClr val="tx1"/>
+                </a:solidFill>
+                <a:effectLst/>
+                <a:latin typeface="+mn-lt"/>
+                <a:ea typeface="+mn-ea"/>
+                <a:cs typeface="+mn-cs"/>
+              </a:rPr>
+              <a:t>Calibration curve / reliability diagram</a:t>
+            </a:r>
+          </a:p>
+          <a:p>
+            <a:r>
+              <a:rPr lang="en-US" sz="1200" b="0" i="0" kern="1200" dirty="0">
+                <a:solidFill>
+                  <a:schemeClr val="tx1"/>
+                </a:solidFill>
+                <a:effectLst/>
+                <a:latin typeface="+mn-lt"/>
+                <a:ea typeface="+mn-ea"/>
+                <a:cs typeface="+mn-cs"/>
+              </a:rPr>
+              <a:t>ECE (Expected Calibration Error)</a:t>
+            </a:r>
+          </a:p>
+          <a:p>
+            <a:r>
+              <a:rPr lang="en-US" sz="1200" b="0" i="0" kern="1200" dirty="0">
+                <a:solidFill>
+                  <a:schemeClr val="tx1"/>
+                </a:solidFill>
+                <a:effectLst/>
+                <a:latin typeface="+mn-lt"/>
+                <a:ea typeface="+mn-ea"/>
+                <a:cs typeface="+mn-cs"/>
+              </a:rPr>
+              <a:t>)</a:t>
+            </a:r>
+          </a:p>
+          <a:p>
+            <a:r>
+              <a:rPr lang="en-US" sz="1200" b="0" i="0" kern="1200" dirty="0" err="1">
+                <a:solidFill>
+                  <a:schemeClr val="tx1"/>
+                </a:solidFill>
+                <a:effectLst/>
+                <a:latin typeface="+mn-lt"/>
+                <a:ea typeface="+mn-ea"/>
+                <a:cs typeface="+mn-cs"/>
+              </a:rPr>
+              <a:t>PDecision</a:t>
+            </a:r>
+            <a:r>
+              <a:rPr lang="en-US" sz="1200" b="0" i="0" kern="1200" dirty="0">
+                <a:solidFill>
+                  <a:schemeClr val="tx1"/>
+                </a:solidFill>
+                <a:effectLst/>
+                <a:latin typeface="+mn-lt"/>
+                <a:ea typeface="+mn-ea"/>
+                <a:cs typeface="+mn-cs"/>
+              </a:rPr>
+              <a:t> impact at thresholds (for triage </a:t>
+            </a:r>
+            <a:r>
+              <a:rPr lang="en-US" sz="1200" b="0" i="0" kern="1200" dirty="0" err="1">
+                <a:solidFill>
+                  <a:schemeClr val="tx1"/>
+                </a:solidFill>
+                <a:effectLst/>
+                <a:latin typeface="+mn-lt"/>
+                <a:ea typeface="+mn-ea"/>
+                <a:cs typeface="+mn-cs"/>
+              </a:rPr>
+              <a:t>bandsractical</a:t>
+            </a:r>
+            <a:r>
+              <a:rPr lang="en-US" sz="1200" b="0" i="0" kern="1200" dirty="0">
+                <a:solidFill>
+                  <a:schemeClr val="tx1"/>
+                </a:solidFill>
+                <a:effectLst/>
+                <a:latin typeface="+mn-lt"/>
+                <a:ea typeface="+mn-ea"/>
+                <a:cs typeface="+mn-cs"/>
+              </a:rPr>
+              <a:t> impact in your pipeline:</a:t>
+            </a:r>
+            <a:br>
+              <a:rPr lang="en-US" sz="1200" b="0" i="0" kern="1200" dirty="0">
+                <a:solidFill>
+                  <a:schemeClr val="tx1"/>
+                </a:solidFill>
+                <a:effectLst/>
+                <a:latin typeface="+mn-lt"/>
+                <a:ea typeface="+mn-ea"/>
+                <a:cs typeface="+mn-cs"/>
+              </a:rPr>
+            </a:br>
+            <a:r>
+              <a:rPr lang="en-US" sz="1200" b="0" i="0" kern="1200" dirty="0">
+                <a:solidFill>
+                  <a:schemeClr val="tx1"/>
+                </a:solidFill>
+                <a:effectLst/>
+                <a:latin typeface="+mn-lt"/>
+                <a:ea typeface="+mn-ea"/>
+                <a:cs typeface="+mn-cs"/>
+              </a:rPr>
+              <a:t>Risk tiers like low/moderate/high become more trustworthy, and the “confidence” label in disagreement cases becomes clinically safer.</a:t>
+            </a:r>
+          </a:p>
+          <a:p>
+            <a:endParaRPr lang="en-US" sz="1200" b="0" i="0" kern="1200" dirty="0">
+              <a:solidFill>
+                <a:schemeClr val="tx1"/>
+              </a:solidFill>
+              <a:effectLst/>
+              <a:latin typeface="+mn-lt"/>
+              <a:ea typeface="+mn-ea"/>
+              <a:cs typeface="+mn-cs"/>
+            </a:endParaRPr>
+          </a:p>
+          <a:p>
+            <a:r>
+              <a:rPr lang="en-US" sz="1200" b="0" i="0" kern="1200" dirty="0">
+                <a:solidFill>
+                  <a:schemeClr val="tx1"/>
+                </a:solidFill>
+                <a:effectLst/>
+                <a:latin typeface="+mn-lt"/>
+                <a:ea typeface="+mn-ea"/>
+                <a:cs typeface="+mn-cs"/>
+              </a:rPr>
+              <a:t>--------------------------------------------------------------------------------------</a:t>
+            </a:r>
+          </a:p>
+          <a:p>
+            <a:endParaRPr lang="en-US" sz="1200" b="0" i="0" kern="1200" dirty="0">
+              <a:solidFill>
+                <a:schemeClr val="tx1"/>
+              </a:solidFill>
+              <a:effectLst/>
+              <a:latin typeface="+mn-lt"/>
+              <a:ea typeface="+mn-ea"/>
+              <a:cs typeface="+mn-cs"/>
+            </a:endParaRPr>
+          </a:p>
+          <a:p>
+            <a:pPr marL="0" marR="0" lvl="0" indent="0" algn="l" defTabSz="914400" rtl="0" eaLnBrk="1" fontAlgn="auto" latinLnBrk="0" hangingPunct="1">
+              <a:lnSpc>
+                <a:spcPct val="100000"/>
+              </a:lnSpc>
+              <a:spcBef>
+                <a:spcPts val="0"/>
+              </a:spcBef>
+              <a:spcAft>
+                <a:spcPts val="0"/>
+              </a:spcAft>
+              <a:buClrTx/>
+              <a:buSzTx/>
+              <a:buFontTx/>
+              <a:buNone/>
+              <a:tabLst/>
+              <a:defRPr/>
+            </a:pPr>
+            <a:r>
+              <a:rPr lang="en-US" sz="1200" b="0" i="0" kern="1200" dirty="0">
+                <a:solidFill>
+                  <a:schemeClr val="tx1"/>
+                </a:solidFill>
+                <a:effectLst/>
+                <a:latin typeface="+mn-lt"/>
+                <a:ea typeface="+mn-ea"/>
+                <a:cs typeface="+mn-cs"/>
+              </a:rPr>
+              <a:t>Classifier-based input filter (replace substring list)</a:t>
+            </a:r>
+            <a:br>
+              <a:rPr lang="en-US" sz="1200" b="0" i="0" kern="1200" dirty="0">
+                <a:solidFill>
+                  <a:schemeClr val="tx1"/>
+                </a:solidFill>
+                <a:effectLst/>
+                <a:latin typeface="+mn-lt"/>
+                <a:ea typeface="+mn-ea"/>
+                <a:cs typeface="+mn-cs"/>
+              </a:rPr>
+            </a:br>
+            <a:r>
+              <a:rPr lang="en-US" sz="1200" b="0" i="0" kern="1200" dirty="0">
+                <a:solidFill>
+                  <a:schemeClr val="tx1"/>
+                </a:solidFill>
+                <a:effectLst/>
+                <a:latin typeface="+mn-lt"/>
+                <a:ea typeface="+mn-ea"/>
+                <a:cs typeface="+mn-cs"/>
+              </a:rPr>
+              <a:t>What it means:</a:t>
+            </a:r>
+            <a:br>
+              <a:rPr lang="en-US" sz="1200" b="0" i="0" kern="1200" dirty="0">
+                <a:solidFill>
+                  <a:schemeClr val="tx1"/>
+                </a:solidFill>
+                <a:effectLst/>
+                <a:latin typeface="+mn-lt"/>
+                <a:ea typeface="+mn-ea"/>
+                <a:cs typeface="+mn-cs"/>
+              </a:rPr>
+            </a:br>
+            <a:r>
+              <a:rPr lang="en-US" sz="1200" b="0" i="0" kern="1200" dirty="0">
+                <a:solidFill>
+                  <a:schemeClr val="tx1"/>
+                </a:solidFill>
+                <a:effectLst/>
+                <a:latin typeface="+mn-lt"/>
+                <a:ea typeface="+mn-ea"/>
+                <a:cs typeface="+mn-cs"/>
+              </a:rPr>
+              <a:t>Instead of blocking risky prompts with a simple keyword list, use a trained intent/safety classifier that detects harmful or out-of-scope requests more robustly.</a:t>
+            </a:r>
+          </a:p>
+          <a:p>
+            <a:r>
+              <a:rPr lang="en-US" sz="1200" b="0" i="0" kern="1200" dirty="0">
+                <a:solidFill>
+                  <a:schemeClr val="tx1"/>
+                </a:solidFill>
+                <a:effectLst/>
+                <a:latin typeface="+mn-lt"/>
+                <a:ea typeface="+mn-ea"/>
+                <a:cs typeface="+mn-cs"/>
+              </a:rPr>
+              <a:t>Better design:</a:t>
+            </a:r>
+          </a:p>
+          <a:p>
+            <a:r>
+              <a:rPr lang="en-US" sz="1200" b="0" i="0" kern="1200" dirty="0">
+                <a:solidFill>
+                  <a:schemeClr val="tx1"/>
+                </a:solidFill>
+                <a:effectLst/>
+                <a:latin typeface="+mn-lt"/>
+                <a:ea typeface="+mn-ea"/>
+                <a:cs typeface="+mn-cs"/>
+              </a:rPr>
+              <a:t>Multi-label classifier for intents like:</a:t>
+            </a:r>
+          </a:p>
+          <a:p>
+            <a:pPr lvl="1"/>
+            <a:r>
+              <a:rPr lang="en-US" sz="1200" b="0" i="0" kern="1200" dirty="0">
+                <a:solidFill>
+                  <a:schemeClr val="tx1"/>
+                </a:solidFill>
+                <a:effectLst/>
+                <a:latin typeface="+mn-lt"/>
+                <a:ea typeface="+mn-ea"/>
+                <a:cs typeface="+mn-cs"/>
+              </a:rPr>
+              <a:t>diagnosis request</a:t>
+            </a:r>
+          </a:p>
+          <a:p>
+            <a:pPr lvl="1"/>
+            <a:r>
+              <a:rPr lang="en-US" sz="1200" b="0" i="0" kern="1200" dirty="0">
+                <a:solidFill>
+                  <a:schemeClr val="tx1"/>
+                </a:solidFill>
+                <a:effectLst/>
+                <a:latin typeface="+mn-lt"/>
+                <a:ea typeface="+mn-ea"/>
+                <a:cs typeface="+mn-cs"/>
+              </a:rPr>
+              <a:t>treatment/prescription request</a:t>
+            </a:r>
+          </a:p>
+          <a:p>
+            <a:pPr lvl="1"/>
+            <a:r>
+              <a:rPr lang="en-US" sz="1200" b="0" i="0" kern="1200" dirty="0">
+                <a:solidFill>
+                  <a:schemeClr val="tx1"/>
+                </a:solidFill>
+                <a:effectLst/>
+                <a:latin typeface="+mn-lt"/>
+                <a:ea typeface="+mn-ea"/>
+                <a:cs typeface="+mn-cs"/>
+              </a:rPr>
+              <a:t>self-harm/unsafe intent</a:t>
+            </a:r>
+          </a:p>
+          <a:p>
+            <a:pPr lvl="1"/>
+            <a:r>
+              <a:rPr lang="en-US" sz="1200" b="0" i="0" kern="1200" dirty="0">
+                <a:solidFill>
+                  <a:schemeClr val="tx1"/>
+                </a:solidFill>
+                <a:effectLst/>
+                <a:latin typeface="+mn-lt"/>
+                <a:ea typeface="+mn-ea"/>
+                <a:cs typeface="+mn-cs"/>
+              </a:rPr>
+              <a:t>data exfiltration/privacy risk</a:t>
+            </a:r>
+          </a:p>
+          <a:p>
+            <a:pPr lvl="1"/>
+            <a:r>
+              <a:rPr lang="en-US" sz="1200" b="0" i="0" kern="1200" dirty="0">
+                <a:solidFill>
+                  <a:schemeClr val="tx1"/>
+                </a:solidFill>
+                <a:effectLst/>
+                <a:latin typeface="+mn-lt"/>
+                <a:ea typeface="+mn-ea"/>
+                <a:cs typeface="+mn-cs"/>
+              </a:rPr>
+              <a:t>normal educational request</a:t>
+            </a:r>
+          </a:p>
+          <a:p>
+            <a:r>
+              <a:rPr lang="en-US" sz="1200" b="0" i="0" kern="1200" dirty="0">
+                <a:solidFill>
+                  <a:schemeClr val="tx1"/>
+                </a:solidFill>
+                <a:effectLst/>
+                <a:latin typeface="+mn-lt"/>
+                <a:ea typeface="+mn-ea"/>
+                <a:cs typeface="+mn-cs"/>
+              </a:rPr>
+              <a:t>Risk scoring + policy engine:</a:t>
+            </a:r>
+          </a:p>
+          <a:p>
+            <a:pPr lvl="1"/>
+            <a:r>
+              <a:rPr lang="en-US" sz="1200" b="0" i="0" kern="1200" dirty="0">
+                <a:solidFill>
+                  <a:schemeClr val="tx1"/>
+                </a:solidFill>
+                <a:effectLst/>
+                <a:latin typeface="+mn-lt"/>
+                <a:ea typeface="+mn-ea"/>
+                <a:cs typeface="+mn-cs"/>
+              </a:rPr>
+              <a:t>allow</a:t>
+            </a:r>
+          </a:p>
+          <a:p>
+            <a:pPr lvl="1"/>
+            <a:r>
+              <a:rPr lang="en-US" sz="1200" b="0" i="0" kern="1200" dirty="0">
+                <a:solidFill>
+                  <a:schemeClr val="tx1"/>
+                </a:solidFill>
+                <a:effectLst/>
+                <a:latin typeface="+mn-lt"/>
+                <a:ea typeface="+mn-ea"/>
+                <a:cs typeface="+mn-cs"/>
+              </a:rPr>
+              <a:t>allow with warning</a:t>
+            </a:r>
+          </a:p>
+          <a:p>
+            <a:pPr lvl="1"/>
+            <a:r>
+              <a:rPr lang="en-US" sz="1200" b="0" i="0" kern="1200" dirty="0">
+                <a:solidFill>
+                  <a:schemeClr val="tx1"/>
+                </a:solidFill>
+                <a:effectLst/>
+                <a:latin typeface="+mn-lt"/>
+                <a:ea typeface="+mn-ea"/>
+                <a:cs typeface="+mn-cs"/>
+              </a:rPr>
+              <a:t>refuse</a:t>
+            </a:r>
+          </a:p>
+          <a:p>
+            <a:pPr lvl="1"/>
+            <a:r>
+              <a:rPr lang="en-US" sz="1200" b="0" i="0" kern="1200" dirty="0">
+                <a:solidFill>
+                  <a:schemeClr val="tx1"/>
+                </a:solidFill>
+                <a:effectLst/>
+                <a:latin typeface="+mn-lt"/>
+                <a:ea typeface="+mn-ea"/>
+                <a:cs typeface="+mn-cs"/>
+              </a:rPr>
+              <a:t>escalate to human</a:t>
+            </a:r>
+          </a:p>
+          <a:p>
+            <a:r>
+              <a:rPr lang="en-US" sz="1200" b="0" i="0" kern="1200" dirty="0">
+                <a:solidFill>
+                  <a:schemeClr val="tx1"/>
+                </a:solidFill>
+                <a:effectLst/>
+                <a:latin typeface="+mn-lt"/>
+                <a:ea typeface="+mn-ea"/>
+                <a:cs typeface="+mn-cs"/>
+              </a:rPr>
+              <a:t>Keep rules as fallback:</a:t>
+            </a:r>
+          </a:p>
+          <a:p>
+            <a:pPr lvl="1"/>
+            <a:r>
+              <a:rPr lang="en-US" sz="1200" b="0" i="0" kern="1200" dirty="0">
+                <a:solidFill>
+                  <a:schemeClr val="tx1"/>
+                </a:solidFill>
+                <a:effectLst/>
+                <a:latin typeface="+mn-lt"/>
+                <a:ea typeface="+mn-ea"/>
+                <a:cs typeface="+mn-cs"/>
+              </a:rPr>
+              <a:t>deterministic “hard block” list for critical terms</a:t>
+            </a:r>
+          </a:p>
+          <a:p>
+            <a:pPr lvl="1"/>
+            <a:r>
+              <a:rPr lang="en-US" sz="1200" b="0" i="0" kern="1200" dirty="0">
+                <a:solidFill>
+                  <a:schemeClr val="tx1"/>
+                </a:solidFill>
+                <a:effectLst/>
+                <a:latin typeface="+mn-lt"/>
+                <a:ea typeface="+mn-ea"/>
+                <a:cs typeface="+mn-cs"/>
+              </a:rPr>
+              <a:t>classifier handles nuanced language</a:t>
+            </a:r>
+          </a:p>
+          <a:p>
+            <a:r>
+              <a:rPr lang="en-US" sz="1200" b="0" i="0" kern="1200" dirty="0">
+                <a:solidFill>
+                  <a:schemeClr val="tx1"/>
+                </a:solidFill>
+                <a:effectLst/>
+                <a:latin typeface="+mn-lt"/>
+                <a:ea typeface="+mn-ea"/>
+                <a:cs typeface="+mn-cs"/>
+              </a:rPr>
+              <a:t>--------------------------------------------------------------------------------------</a:t>
+            </a:r>
+          </a:p>
+          <a:p>
+            <a:r>
+              <a:rPr lang="en-US" sz="1200" b="0" i="0" kern="1200" dirty="0">
+                <a:solidFill>
+                  <a:schemeClr val="tx1"/>
+                </a:solidFill>
+                <a:effectLst/>
+                <a:latin typeface="+mn-lt"/>
+                <a:ea typeface="+mn-ea"/>
+                <a:cs typeface="+mn-cs"/>
+              </a:rPr>
+              <a:t>Counterfactual explanations</a:t>
+            </a:r>
+            <a:br>
+              <a:rPr lang="en-US" sz="1200" b="0" i="0" kern="1200" dirty="0">
+                <a:solidFill>
+                  <a:schemeClr val="tx1"/>
+                </a:solidFill>
+                <a:effectLst/>
+                <a:latin typeface="+mn-lt"/>
+                <a:ea typeface="+mn-ea"/>
+                <a:cs typeface="+mn-cs"/>
+              </a:rPr>
+            </a:br>
+            <a:r>
+              <a:rPr lang="en-US" sz="1200" b="0" i="0" kern="1200" dirty="0">
+                <a:solidFill>
+                  <a:schemeClr val="tx1"/>
+                </a:solidFill>
+                <a:effectLst/>
+                <a:latin typeface="+mn-lt"/>
+                <a:ea typeface="+mn-ea"/>
+                <a:cs typeface="+mn-cs"/>
+              </a:rPr>
+              <a:t>What it means:</a:t>
+            </a:r>
+            <a:br>
+              <a:rPr lang="en-US" sz="1200" b="0" i="0" kern="1200" dirty="0">
+                <a:solidFill>
+                  <a:schemeClr val="tx1"/>
+                </a:solidFill>
+                <a:effectLst/>
+                <a:latin typeface="+mn-lt"/>
+                <a:ea typeface="+mn-ea"/>
+                <a:cs typeface="+mn-cs"/>
+              </a:rPr>
+            </a:br>
+            <a:r>
+              <a:rPr lang="en-US" sz="1200" b="0" i="0" kern="1200" dirty="0">
+                <a:solidFill>
+                  <a:schemeClr val="tx1"/>
+                </a:solidFill>
+                <a:effectLst/>
+                <a:latin typeface="+mn-lt"/>
+                <a:ea typeface="+mn-ea"/>
+                <a:cs typeface="+mn-cs"/>
+              </a:rPr>
+              <a:t>Explain “what minimum changes would move this patient from higher to lower risk,” not just “why risk is high.”</a:t>
+            </a:r>
+          </a:p>
+          <a:p>
+            <a:r>
+              <a:rPr lang="en-US" sz="1200" b="0" i="0" kern="1200" dirty="0">
+                <a:solidFill>
+                  <a:schemeClr val="tx1"/>
+                </a:solidFill>
+                <a:effectLst/>
+                <a:latin typeface="+mn-lt"/>
+                <a:ea typeface="+mn-ea"/>
+                <a:cs typeface="+mn-cs"/>
+              </a:rPr>
+              <a:t>Example style:</a:t>
+            </a:r>
+            <a:br>
+              <a:rPr lang="en-US" sz="1200" b="0" i="0" kern="1200" dirty="0">
+                <a:solidFill>
+                  <a:schemeClr val="tx1"/>
+                </a:solidFill>
+                <a:effectLst/>
+                <a:latin typeface="+mn-lt"/>
+                <a:ea typeface="+mn-ea"/>
+                <a:cs typeface="+mn-cs"/>
+              </a:rPr>
+            </a:br>
+            <a:r>
+              <a:rPr lang="en-US" sz="1200" b="0" i="0" kern="1200" dirty="0">
+                <a:solidFill>
+                  <a:schemeClr val="tx1"/>
+                </a:solidFill>
+                <a:effectLst/>
+                <a:latin typeface="+mn-lt"/>
+                <a:ea typeface="+mn-ea"/>
+                <a:cs typeface="+mn-cs"/>
+              </a:rPr>
+              <a:t>“Risk is moderate at 0.64. If resting BP were 12 mmHg lower and exercise frequency increased to X level, predicted risk would likely move below 0.50.”</a:t>
+            </a:r>
+          </a:p>
+          <a:p>
+            <a:r>
+              <a:rPr lang="en-US" sz="1200" b="0" i="0" kern="1200" dirty="0">
+                <a:solidFill>
+                  <a:schemeClr val="tx1"/>
+                </a:solidFill>
+                <a:effectLst/>
+                <a:latin typeface="+mn-lt"/>
+                <a:ea typeface="+mn-ea"/>
+                <a:cs typeface="+mn-cs"/>
+              </a:rPr>
+              <a:t>---------------------------------------------------------------------------------------</a:t>
+            </a:r>
+          </a:p>
+          <a:p>
+            <a:r>
+              <a:rPr lang="en-US" sz="1200" b="0" i="0" kern="1200" dirty="0">
+                <a:solidFill>
+                  <a:schemeClr val="tx1"/>
+                </a:solidFill>
+                <a:effectLst/>
+                <a:latin typeface="+mn-lt"/>
+                <a:ea typeface="+mn-ea"/>
+                <a:cs typeface="+mn-cs"/>
+              </a:rPr>
+              <a:t>Human-in-the-loop feedback channel</a:t>
+            </a:r>
+            <a:br>
+              <a:rPr lang="en-US" sz="1200" b="0" i="0" kern="1200" dirty="0">
+                <a:solidFill>
+                  <a:schemeClr val="tx1"/>
+                </a:solidFill>
+                <a:effectLst/>
+                <a:latin typeface="+mn-lt"/>
+                <a:ea typeface="+mn-ea"/>
+                <a:cs typeface="+mn-cs"/>
+              </a:rPr>
+            </a:br>
+            <a:r>
+              <a:rPr lang="en-US" sz="1200" b="0" i="0" kern="1200" dirty="0">
+                <a:solidFill>
+                  <a:schemeClr val="tx1"/>
+                </a:solidFill>
+                <a:effectLst/>
+                <a:latin typeface="+mn-lt"/>
+                <a:ea typeface="+mn-ea"/>
+                <a:cs typeface="+mn-cs"/>
+              </a:rPr>
+              <a:t>What it means:</a:t>
+            </a:r>
+            <a:br>
+              <a:rPr lang="en-US" sz="1200" b="0" i="0" kern="1200" dirty="0">
+                <a:solidFill>
+                  <a:schemeClr val="tx1"/>
+                </a:solidFill>
+                <a:effectLst/>
+                <a:latin typeface="+mn-lt"/>
+                <a:ea typeface="+mn-ea"/>
+                <a:cs typeface="+mn-cs"/>
+              </a:rPr>
+            </a:br>
+            <a:r>
+              <a:rPr lang="en-US" sz="1200" b="0" i="0" kern="1200" dirty="0">
+                <a:solidFill>
+                  <a:schemeClr val="tx1"/>
+                </a:solidFill>
+                <a:effectLst/>
+                <a:latin typeface="+mn-lt"/>
+                <a:ea typeface="+mn-ea"/>
+                <a:cs typeface="+mn-cs"/>
+              </a:rPr>
+              <a:t>Add a mechanism where clinicians can rate, correct, and annotate system outputs, and route uncertain/high-risk cases for manual review.</a:t>
+            </a:r>
+          </a:p>
+          <a:p>
+            <a:r>
+              <a:rPr lang="en-US" sz="1200" b="0" i="0" kern="1200" dirty="0">
+                <a:solidFill>
+                  <a:schemeClr val="tx1"/>
+                </a:solidFill>
+                <a:effectLst/>
+                <a:latin typeface="+mn-lt"/>
+                <a:ea typeface="+mn-ea"/>
+                <a:cs typeface="+mn-cs"/>
+              </a:rPr>
+              <a:t>Core components:</a:t>
+            </a:r>
+          </a:p>
+          <a:p>
+            <a:r>
+              <a:rPr lang="en-US" sz="1200" b="0" i="0" kern="1200" dirty="0">
+                <a:solidFill>
+                  <a:schemeClr val="tx1"/>
+                </a:solidFill>
+                <a:effectLst/>
+                <a:latin typeface="+mn-lt"/>
+                <a:ea typeface="+mn-ea"/>
+                <a:cs typeface="+mn-cs"/>
+              </a:rPr>
+              <a:t>Review UI/workflow:</a:t>
+            </a:r>
+          </a:p>
+          <a:p>
+            <a:pPr lvl="1"/>
+            <a:r>
+              <a:rPr lang="en-US" sz="1200" b="0" i="0" kern="1200" dirty="0">
+                <a:solidFill>
+                  <a:schemeClr val="tx1"/>
+                </a:solidFill>
+                <a:effectLst/>
+                <a:latin typeface="+mn-lt"/>
+                <a:ea typeface="+mn-ea"/>
+                <a:cs typeface="+mn-cs"/>
+              </a:rPr>
+              <a:t>accept / reject / edit explanation</a:t>
+            </a:r>
+          </a:p>
+          <a:p>
+            <a:pPr lvl="1"/>
+            <a:r>
+              <a:rPr lang="en-US" sz="1200" b="0" i="0" kern="1200" dirty="0">
+                <a:solidFill>
+                  <a:schemeClr val="tx1"/>
+                </a:solidFill>
+                <a:effectLst/>
+                <a:latin typeface="+mn-lt"/>
+                <a:ea typeface="+mn-ea"/>
+                <a:cs typeface="+mn-cs"/>
+              </a:rPr>
+              <a:t>mark citation quality</a:t>
+            </a:r>
+          </a:p>
+          <a:p>
+            <a:pPr lvl="1"/>
+            <a:r>
+              <a:rPr lang="en-US" sz="1200" b="0" i="0" kern="1200" dirty="0">
+                <a:solidFill>
+                  <a:schemeClr val="tx1"/>
+                </a:solidFill>
+                <a:effectLst/>
+                <a:latin typeface="+mn-lt"/>
+                <a:ea typeface="+mn-ea"/>
+                <a:cs typeface="+mn-cs"/>
+              </a:rPr>
+              <a:t>flag unsafe or unclear output</a:t>
+            </a:r>
+          </a:p>
+          <a:p>
+            <a:r>
+              <a:rPr lang="en-US" sz="1200" b="0" i="0" kern="1200" dirty="0">
+                <a:solidFill>
+                  <a:schemeClr val="tx1"/>
+                </a:solidFill>
+                <a:effectLst/>
+                <a:latin typeface="+mn-lt"/>
+                <a:ea typeface="+mn-ea"/>
+                <a:cs typeface="+mn-cs"/>
+              </a:rPr>
+              <a:t>Escalation rules:</a:t>
+            </a:r>
+          </a:p>
+          <a:p>
+            <a:pPr lvl="1"/>
+            <a:r>
+              <a:rPr lang="en-US" sz="1200" b="0" i="0" kern="1200" dirty="0">
+                <a:solidFill>
+                  <a:schemeClr val="tx1"/>
+                </a:solidFill>
+                <a:effectLst/>
+                <a:latin typeface="+mn-lt"/>
+                <a:ea typeface="+mn-ea"/>
+                <a:cs typeface="+mn-cs"/>
+              </a:rPr>
+              <a:t>low confidence</a:t>
+            </a:r>
+          </a:p>
+          <a:p>
+            <a:pPr lvl="1"/>
+            <a:r>
+              <a:rPr lang="en-US" sz="1200" b="0" i="0" kern="1200">
+                <a:solidFill>
+                  <a:schemeClr val="tx1"/>
+                </a:solidFill>
+                <a:effectLst/>
+                <a:latin typeface="+mn-lt"/>
+                <a:ea typeface="+mn-ea"/>
+                <a:cs typeface="+mn-cs"/>
+              </a:rPr>
+              <a:t>retrieval uncertainty</a:t>
+            </a:r>
+          </a:p>
+          <a:p>
+            <a:endParaRPr lang="en-US" sz="1200" b="0" i="0" kern="1200" dirty="0">
+              <a:solidFill>
+                <a:schemeClr val="tx1"/>
+              </a:solidFill>
+              <a:effectLst/>
+              <a:latin typeface="+mn-lt"/>
+              <a:ea typeface="+mn-ea"/>
+              <a:cs typeface="+mn-cs"/>
+            </a:endParaRPr>
+          </a:p>
+          <a:p>
+            <a:br>
+              <a:rPr lang="en-US" dirty="0"/>
+            </a:br>
             <a:endParaRPr lang="en-US" dirty="0"/>
           </a:p>
         </p:txBody>
@@ -7300,15 +10181,15 @@
             </a:pPr>
             <a:r>
               <a:rPr dirty="0"/>
-              <a:t>95 % bootstrap CIs reported alongside a </a:t>
-            </a:r>
-            <a:r>
-              <a:rPr dirty="0" err="1"/>
-              <a:t>LogisticRegression</a:t>
+              <a:t>95 % bootstrap CIs reported alongside a Logistic</a:t>
+            </a:r>
+            <a:r>
+              <a:rPr lang="en-US" dirty="0"/>
+              <a:t> </a:t>
             </a:r>
             <a:r>
               <a:rPr dirty="0"/>
-              <a:t> baseline → bands overlap → results are honest, not oversold.</a:t>
+              <a:t>Regression baseline → bands overlap → results are honest, not oversold.</a:t>
             </a:r>
           </a:p>
           <a:p>
@@ -9923,8 +12804,56 @@
               </a:defRPr>
             </a:pPr>
             <a:r>
+              <a:rPr dirty="0"/>
               <a:t>Project 8 Defense  ·  Clinical-Triage Explainer  ·  Educational artifact, not for clinical use  ·  6/14</a:t>
             </a:r>
+          </a:p>
+        </p:txBody>
+      </p:sp>
+      <p:sp>
+        <p:nvSpPr>
+          <p:cNvPr id="5" name="TextBox 4">
+            <a:extLst>
+              <a:ext uri="{FF2B5EF4-FFF2-40B4-BE49-F238E27FC236}">
+                <a16:creationId xmlns:a16="http://schemas.microsoft.com/office/drawing/2014/main" id="{A87D41AE-2BA1-90A7-083B-ACD5C789CFAD}"/>
+              </a:ext>
+            </a:extLst>
+          </p:cNvPr>
+          <p:cNvSpPr txBox="1"/>
+          <p:nvPr/>
+        </p:nvSpPr>
+        <p:spPr>
+          <a:xfrm>
+            <a:off x="914400" y="4387821"/>
+            <a:ext cx="2504212" cy="138499"/>
+          </a:xfrm>
+          <a:prstGeom prst="rect">
+            <a:avLst/>
+          </a:prstGeom>
+          <a:noFill/>
+        </p:spPr>
+        <p:txBody>
+          <a:bodyPr wrap="none" tIns="0" bIns="0">
+            <a:spAutoFit/>
+          </a:bodyPr>
+          <a:lstStyle/>
+          <a:p>
+            <a:pPr>
+              <a:defRPr sz="900">
+                <a:solidFill>
+                  <a:srgbClr val="555555"/>
+                </a:solidFill>
+              </a:defRPr>
+            </a:pPr>
+            <a:r>
+              <a:rPr lang="en-US" i="1" dirty="0"/>
+              <a:t>CI = Confidence intervals, LR = </a:t>
+            </a:r>
+            <a:r>
+              <a:rPr lang="en-US" sz="900" i="1" dirty="0"/>
+              <a:t>Logistic Regression</a:t>
+            </a:r>
+            <a:endParaRPr i="1" dirty="0"/>
           </a:p>
         </p:txBody>
       </p:sp>
